--- a/assets/codex-team-deck.pptx
+++ b/assets/codex-team-deck.pptx
@@ -20,9 +20,11 @@
     <p:sldId id="268" r:id="rId14"/>
     <p:sldId id="269" r:id="rId15"/>
     <p:sldId id="270" r:id="rId16"/>
+    <p:sldId id="271" r:id="rId17"/>
+    <p:sldId id="272" r:id="rId18"/>
   </p:sldIdLst>
   <p:notesMasterIdLst>
-    <p:notesMasterId r:id="rId17"/>
+    <p:notesMasterId r:id="rId19"/>
   </p:notesMasterIdLst>
   <p:sldSz cx="12191695" cy="6858000"/>
   <p:notesSz cx="6858000" cy="12191695"/>
@@ -1068,6 +1070,182 @@
             <a:fld id="{F7021451-1387-4CA6-816F-3879F97B5CBC}" type="slidenum">
               <a:rPr lang="en-US"/>
               <a:t>15</a:t>
+            </a:fld>
+            <a:endParaRPr lang="en-US"/>
+          </a:p>
+        </p:txBody>
+      </p:sp>
+    </p:spTree>
+    <p:extLst>
+      <p:ext uri="{BB962C8B-B14F-4D97-AF65-F5344CB8AC3E}">
+        <p14:creationId xmlns:p14="http://schemas.microsoft.com/office/powerpoint/2010/main" val="1024086991"/>
+      </p:ext>
+    </p:extLst>
+  </p:cSld>
+  <p:clrMapOvr>
+    <a:masterClrMapping/>
+  </p:clrMapOvr>
+</p:notes>
+</file>
+
+<file path=ppt/notesSlides/notesSlide16.xml><?xml version="1.0" encoding="utf-8"?>
+<p:notes xmlns:a="http://schemas.openxmlformats.org/drawingml/2006/main" xmlns:r="http://schemas.openxmlformats.org/officeDocument/2006/relationships" xmlns:p="http://schemas.openxmlformats.org/presentationml/2006/main">
+  <p:cSld>
+    <p:spTree>
+      <p:nvGrpSpPr>
+        <p:cNvPr id="1" name=""/>
+        <p:cNvGrpSpPr/>
+        <p:nvPr/>
+      </p:nvGrpSpPr>
+      <p:grpSpPr>
+        <a:xfrm>
+          <a:off x="0" y="0"/>
+          <a:ext cx="0" cy="0"/>
+          <a:chOff x="0" y="0"/>
+          <a:chExt cx="0" cy="0"/>
+        </a:xfrm>
+      </p:grpSpPr>
+      <p:sp>
+        <p:nvSpPr>
+          <p:cNvPr id="2" name="Slide Image Placeholder 1"/>
+          <p:cNvSpPr>
+            <a:spLocks noGrp="1" noRot="1" noChangeAspect="1"/>
+          </p:cNvSpPr>
+          <p:nvPr>
+            <p:ph type="sldImg"/>
+          </p:nvPr>
+        </p:nvSpPr>
+        <p:spPr/>
+      </p:sp>
+      <p:sp>
+        <p:nvSpPr>
+          <p:cNvPr id="3" name="Notes Placeholder 2"/>
+          <p:cNvSpPr>
+            <a:spLocks noGrp="1"/>
+          </p:cNvSpPr>
+          <p:nvPr>
+            <p:ph type="body" idx="1"/>
+          </p:nvPr>
+        </p:nvSpPr>
+        <p:spPr/>
+        <p:txBody>
+          <a:bodyPr/>
+          <a:lstStyle/>
+          <a:p>
+            <a:r>
+              <a:rPr lang="en-US" dirty="0"/>
+              <a:t/>
+            </a:r>
+            <a:endParaRPr lang="en-US" dirty="0"/>
+          </a:p>
+        </p:txBody>
+      </p:sp>
+      <p:sp>
+        <p:nvSpPr>
+          <p:cNvPr id="4" name="Slide Number Placeholder 3"/>
+          <p:cNvSpPr>
+            <a:spLocks noGrp="1"/>
+          </p:cNvSpPr>
+          <p:nvPr>
+            <p:ph type="sldNum" sz="quarter" idx="10"/>
+          </p:nvPr>
+        </p:nvSpPr>
+        <p:spPr/>
+        <p:txBody>
+          <a:bodyPr/>
+          <a:lstStyle/>
+          <a:p>
+            <a:fld id="{F7021451-1387-4CA6-816F-3879F97B5CBC}" type="slidenum">
+              <a:rPr lang="en-US"/>
+              <a:t>16</a:t>
+            </a:fld>
+            <a:endParaRPr lang="en-US"/>
+          </a:p>
+        </p:txBody>
+      </p:sp>
+    </p:spTree>
+    <p:extLst>
+      <p:ext uri="{BB962C8B-B14F-4D97-AF65-F5344CB8AC3E}">
+        <p14:creationId xmlns:p14="http://schemas.microsoft.com/office/powerpoint/2010/main" val="1024086991"/>
+      </p:ext>
+    </p:extLst>
+  </p:cSld>
+  <p:clrMapOvr>
+    <a:masterClrMapping/>
+  </p:clrMapOvr>
+</p:notes>
+</file>
+
+<file path=ppt/notesSlides/notesSlide17.xml><?xml version="1.0" encoding="utf-8"?>
+<p:notes xmlns:a="http://schemas.openxmlformats.org/drawingml/2006/main" xmlns:r="http://schemas.openxmlformats.org/officeDocument/2006/relationships" xmlns:p="http://schemas.openxmlformats.org/presentationml/2006/main">
+  <p:cSld>
+    <p:spTree>
+      <p:nvGrpSpPr>
+        <p:cNvPr id="1" name=""/>
+        <p:cNvGrpSpPr/>
+        <p:nvPr/>
+      </p:nvGrpSpPr>
+      <p:grpSpPr>
+        <a:xfrm>
+          <a:off x="0" y="0"/>
+          <a:ext cx="0" cy="0"/>
+          <a:chOff x="0" y="0"/>
+          <a:chExt cx="0" cy="0"/>
+        </a:xfrm>
+      </p:grpSpPr>
+      <p:sp>
+        <p:nvSpPr>
+          <p:cNvPr id="2" name="Slide Image Placeholder 1"/>
+          <p:cNvSpPr>
+            <a:spLocks noGrp="1" noRot="1" noChangeAspect="1"/>
+          </p:cNvSpPr>
+          <p:nvPr>
+            <p:ph type="sldImg"/>
+          </p:nvPr>
+        </p:nvSpPr>
+        <p:spPr/>
+      </p:sp>
+      <p:sp>
+        <p:nvSpPr>
+          <p:cNvPr id="3" name="Notes Placeholder 2"/>
+          <p:cNvSpPr>
+            <a:spLocks noGrp="1"/>
+          </p:cNvSpPr>
+          <p:nvPr>
+            <p:ph type="body" idx="1"/>
+          </p:nvPr>
+        </p:nvSpPr>
+        <p:spPr/>
+        <p:txBody>
+          <a:bodyPr/>
+          <a:lstStyle/>
+          <a:p>
+            <a:r>
+              <a:rPr lang="en-US" dirty="0"/>
+              <a:t/>
+            </a:r>
+            <a:endParaRPr lang="en-US" dirty="0"/>
+          </a:p>
+        </p:txBody>
+      </p:sp>
+      <p:sp>
+        <p:nvSpPr>
+          <p:cNvPr id="4" name="Slide Number Placeholder 3"/>
+          <p:cNvSpPr>
+            <a:spLocks noGrp="1"/>
+          </p:cNvSpPr>
+          <p:nvPr>
+            <p:ph type="sldNum" sz="quarter" idx="10"/>
+          </p:nvPr>
+        </p:nvSpPr>
+        <p:spPr/>
+        <p:txBody>
+          <a:bodyPr/>
+          <a:lstStyle/>
+          <a:p>
+            <a:fld id="{F7021451-1387-4CA6-816F-3879F97B5CBC}" type="slidenum">
+              <a:rPr lang="en-US"/>
+              <a:t>17</a:t>
             </a:fld>
             <a:endParaRPr lang="en-US"/>
           </a:p>
@@ -2558,7 +2736,7 @@
     <p:bg>
       <p:bgPr>
         <a:solidFill>
-          <a:srgbClr val="F1F3EC"/>
+          <a:srgbClr val="14201B"/>
         </a:solidFill>
       </p:bgPr>
     </p:bg>
@@ -2584,16 +2762,16 @@
         </p:nvSpPr>
         <p:spPr>
           <a:xfrm>
-            <a:off x="9814255" y="384048"/>
-            <a:ext cx="1828800" cy="384048"/>
+            <a:off x="548640" y="457200"/>
+            <a:ext cx="1920240" cy="411480"/>
           </a:xfrm>
           <a:prstGeom prst="roundRect">
             <a:avLst>
-              <a:gd name="adj" fmla="val 50000"/>
+              <a:gd name="adj" fmla="val 48889"/>
             </a:avLst>
           </a:prstGeom>
           <a:solidFill>
-            <a:srgbClr val="D7E6DE"/>
+            <a:srgbClr val="C97F1E"/>
           </a:solidFill>
           <a:ln/>
         </p:spPr>
@@ -2606,8 +2784,8 @@
         </p:nvSpPr>
         <p:spPr>
           <a:xfrm>
-            <a:off x="9814255" y="384048"/>
-            <a:ext cx="1828800" cy="384048"/>
+            <a:off x="548640" y="457200"/>
+            <a:ext cx="1920240" cy="411480"/>
           </a:xfrm>
           <a:prstGeom prst="rect">
             <a:avLst/>
@@ -2623,17 +2801,17 @@
               <a:buNone/>
             </a:pPr>
             <a:r>
-              <a:rPr lang="en-US" sz="1200" b="1" dirty="0">
-                <a:solidFill>
-                  <a:srgbClr val="2F5548"/>
-                </a:solidFill>
-                <a:latin typeface="Leelawadee UI" pitchFamily="34" charset="0"/>
-                <a:ea typeface="Leelawadee UI" pitchFamily="34" charset="-122"/>
-                <a:cs typeface="Leelawadee UI" pitchFamily="34" charset="-120"/>
-              </a:rPr>
-              <a:t>ระดับกลาง</a:t>
-            </a:r>
-            <a:endParaRPr lang="en-US" sz="1200" dirty="0"/>
+              <a:rPr lang="en-US" sz="1300" b="1" dirty="0">
+                <a:solidFill>
+                  <a:srgbClr val="14201B"/>
+                </a:solidFill>
+                <a:latin typeface="Leelawadee UI" pitchFamily="34" charset="0"/>
+                <a:ea typeface="Leelawadee UI" pitchFamily="34" charset="-122"/>
+                <a:cs typeface="Leelawadee UI" pitchFamily="34" charset="-120"/>
+              </a:rPr>
+              <a:t>ใหม่ล่าสุด</a:t>
+            </a:r>
+            <a:endParaRPr lang="en-US" sz="1300" dirty="0"/>
           </a:p>
         </p:txBody>
       </p:sp>
@@ -2645,34 +2823,34 @@
         </p:nvSpPr>
         <p:spPr>
           <a:xfrm>
-            <a:off x="548640" y="384048"/>
-            <a:ext cx="7315200" cy="365760"/>
-          </a:xfrm>
-          <a:prstGeom prst="rect">
-            <a:avLst/>
-          </a:prstGeom>
-          <a:noFill/>
-          <a:ln/>
-        </p:spPr>
-        <p:txBody>
-          <a:bodyPr wrap="square" lIns="0" tIns="0" rIns="0" bIns="0" rtlCol="0" anchor="ctr"/>
-          <a:lstStyle/>
-          <a:p>
-            <a:pPr indent="0" marL="0">
-              <a:buNone/>
-            </a:pPr>
-            <a:r>
-              <a:rPr lang="en-US" sz="1300" b="1" spc="200" kern="0" dirty="0">
-                <a:solidFill>
-                  <a:srgbClr val="2F5548"/>
-                </a:solidFill>
-                <a:latin typeface="Leelawadee UI" pitchFamily="34" charset="0"/>
-                <a:ea typeface="Leelawadee UI" pitchFamily="34" charset="-122"/>
-                <a:cs typeface="Leelawadee UI" pitchFamily="34" charset="-120"/>
-              </a:rPr>
-              <a:t>ก่อนไปต่อ</a:t>
-            </a:r>
-            <a:endParaRPr lang="en-US" sz="1300" dirty="0"/>
+            <a:off x="548640" y="1280160"/>
+            <a:ext cx="10515600" cy="1005840"/>
+          </a:xfrm>
+          <a:prstGeom prst="rect">
+            <a:avLst/>
+          </a:prstGeom>
+          <a:noFill/>
+          <a:ln/>
+        </p:spPr>
+        <p:txBody>
+          <a:bodyPr wrap="square" lIns="0" tIns="0" rIns="0" bIns="0" rtlCol="0" anchor="ctr"/>
+          <a:lstStyle/>
+          <a:p>
+            <a:pPr indent="0" marL="0">
+              <a:buNone/>
+            </a:pPr>
+            <a:r>
+              <a:rPr lang="en-US" sz="4000" b="1" dirty="0">
+                <a:solidFill>
+                  <a:srgbClr val="ECF1E8"/>
+                </a:solidFill>
+                <a:latin typeface="Leelawadee UI" pitchFamily="34" charset="0"/>
+                <a:ea typeface="Leelawadee UI" pitchFamily="34" charset="-122"/>
+                <a:cs typeface="Leelawadee UI" pitchFamily="34" charset="-120"/>
+              </a:rPr>
+              <a:t>GPT-6 Astra</a:t>
+            </a:r>
+            <a:endParaRPr lang="en-US" sz="4000" dirty="0"/>
           </a:p>
         </p:txBody>
       </p:sp>
@@ -2684,57 +2862,291 @@
         </p:nvSpPr>
         <p:spPr>
           <a:xfrm>
-            <a:off x="548640" y="713232"/>
-            <a:ext cx="9601200" cy="822960"/>
-          </a:xfrm>
-          <a:prstGeom prst="rect">
-            <a:avLst/>
-          </a:prstGeom>
-          <a:noFill/>
-          <a:ln/>
-        </p:spPr>
-        <p:txBody>
-          <a:bodyPr wrap="square" lIns="0" tIns="0" rIns="0" bIns="0" rtlCol="0" anchor="ctr"/>
-          <a:lstStyle/>
-          <a:p>
-            <a:pPr indent="0" marL="0">
-              <a:buNone/>
-            </a:pPr>
-            <a:r>
-              <a:rPr lang="en-US" sz="3000" b="1" dirty="0">
-                <a:solidFill>
-                  <a:srgbClr val="1E2E28"/>
-                </a:solidFill>
-                <a:latin typeface="Leelawadee UI" pitchFamily="34" charset="0"/>
-                <a:ea typeface="Leelawadee UI" pitchFamily="34" charset="-122"/>
-                <a:cs typeface="Leelawadee UI" pitchFamily="34" charset="-120"/>
-              </a:rPr>
-              <a:t>ข้อดี-ข้อเสีย ของการใช้จริงจัง</a:t>
-            </a:r>
-            <a:endParaRPr lang="en-US" sz="3000" dirty="0"/>
-          </a:p>
-        </p:txBody>
-      </p:sp>
-      <p:sp>
-        <p:nvSpPr>
-          <p:cNvPr id="6" name="Shape 4"/>
+            <a:off x="548640" y="2286000"/>
+            <a:ext cx="10515600" cy="457200"/>
+          </a:xfrm>
+          <a:prstGeom prst="rect">
+            <a:avLst/>
+          </a:prstGeom>
+          <a:noFill/>
+          <a:ln/>
+        </p:spPr>
+        <p:txBody>
+          <a:bodyPr wrap="square" lIns="0" tIns="0" rIns="0" bIns="0" rtlCol="0" anchor="ctr"/>
+          <a:lstStyle/>
+          <a:p>
+            <a:pPr indent="0" marL="0">
+              <a:buNone/>
+            </a:pPr>
+            <a:r>
+              <a:rPr lang="en-US" sz="1800" dirty="0">
+                <a:solidFill>
+                  <a:srgbClr val="86BBA6"/>
+                </a:solidFill>
+                <a:latin typeface="Leelawadee UI" pitchFamily="34" charset="0"/>
+                <a:ea typeface="Leelawadee UI" pitchFamily="34" charset="-122"/>
+                <a:cs typeface="Leelawadee UI" pitchFamily="34" charset="-120"/>
+              </a:rPr>
+              <a:t>โมเดลใหม่ที่ทำให้ Codex ฉลาดขึ้น (ปล่อย 3 ก.ย. 2026)</a:t>
+            </a:r>
+            <a:endParaRPr lang="en-US" sz="1800" dirty="0"/>
+          </a:p>
+        </p:txBody>
+      </p:sp>
+      <p:sp>
+        <p:nvSpPr>
+          <p:cNvPr id="6" name="Text 4"/>
+          <p:cNvSpPr txBox="1"/>
+          <p:nvPr/>
+        </p:nvSpPr>
+        <p:spPr>
+          <a:xfrm>
+            <a:off x="548640" y="3108960"/>
+            <a:ext cx="457200" cy="548640"/>
+          </a:xfrm>
+          <a:prstGeom prst="rect">
+            <a:avLst/>
+          </a:prstGeom>
+          <a:noFill/>
+          <a:ln/>
+        </p:spPr>
+        <p:txBody>
+          <a:bodyPr wrap="square" lIns="0" tIns="0" rIns="0" bIns="0" rtlCol="0" anchor="ctr"/>
+          <a:lstStyle/>
+          <a:p>
+            <a:pPr indent="0" marL="0">
+              <a:buNone/>
+            </a:pPr>
+            <a:r>
+              <a:rPr lang="en-US" sz="1800" b="1" dirty="0">
+                <a:solidFill>
+                  <a:srgbClr val="F0AC4C"/>
+                </a:solidFill>
+                <a:latin typeface="Leelawadee UI" pitchFamily="34" charset="0"/>
+                <a:ea typeface="Leelawadee UI" pitchFamily="34" charset="-122"/>
+                <a:cs typeface="Leelawadee UI" pitchFamily="34" charset="-120"/>
+              </a:rPr>
+              <a:t>→</a:t>
+            </a:r>
+            <a:endParaRPr lang="en-US" sz="1800" dirty="0"/>
+          </a:p>
+        </p:txBody>
+      </p:sp>
+      <p:sp>
+        <p:nvSpPr>
+          <p:cNvPr id="7" name="Text 5"/>
+          <p:cNvSpPr txBox="1"/>
+          <p:nvPr/>
+        </p:nvSpPr>
+        <p:spPr>
+          <a:xfrm>
+            <a:off x="1097280" y="3108960"/>
+            <a:ext cx="9144000" cy="548640"/>
+          </a:xfrm>
+          <a:prstGeom prst="rect">
+            <a:avLst/>
+          </a:prstGeom>
+          <a:noFill/>
+          <a:ln/>
+        </p:spPr>
+        <p:txBody>
+          <a:bodyPr wrap="square" lIns="0" tIns="0" rIns="0" bIns="0" rtlCol="0" anchor="ctr"/>
+          <a:lstStyle/>
+          <a:p>
+            <a:pPr indent="0" marL="0">
+              <a:buNone/>
+            </a:pPr>
+            <a:r>
+              <a:rPr lang="en-US" sz="1600" dirty="0">
+                <a:solidFill>
+                  <a:srgbClr val="ECF1E8"/>
+                </a:solidFill>
+                <a:latin typeface="Leelawadee UI" pitchFamily="34" charset="0"/>
+                <a:ea typeface="Leelawadee UI" pitchFamily="34" charset="-122"/>
+                <a:cs typeface="Leelawadee UI" pitchFamily="34" charset="-120"/>
+              </a:rPr>
+              <a:t>วางแผนงานซับซ้อนได้ดีขึ้น</a:t>
+            </a:r>
+            <a:endParaRPr lang="en-US" sz="1600" dirty="0"/>
+          </a:p>
+        </p:txBody>
+      </p:sp>
+      <p:sp>
+        <p:nvSpPr>
+          <p:cNvPr id="8" name="Text 6"/>
+          <p:cNvSpPr txBox="1"/>
+          <p:nvPr/>
+        </p:nvSpPr>
+        <p:spPr>
+          <a:xfrm>
+            <a:off x="548640" y="3794760"/>
+            <a:ext cx="457200" cy="548640"/>
+          </a:xfrm>
+          <a:prstGeom prst="rect">
+            <a:avLst/>
+          </a:prstGeom>
+          <a:noFill/>
+          <a:ln/>
+        </p:spPr>
+        <p:txBody>
+          <a:bodyPr wrap="square" lIns="0" tIns="0" rIns="0" bIns="0" rtlCol="0" anchor="ctr"/>
+          <a:lstStyle/>
+          <a:p>
+            <a:pPr indent="0" marL="0">
+              <a:buNone/>
+            </a:pPr>
+            <a:r>
+              <a:rPr lang="en-US" sz="1800" b="1" dirty="0">
+                <a:solidFill>
+                  <a:srgbClr val="F0AC4C"/>
+                </a:solidFill>
+                <a:latin typeface="Leelawadee UI" pitchFamily="34" charset="0"/>
+                <a:ea typeface="Leelawadee UI" pitchFamily="34" charset="-122"/>
+                <a:cs typeface="Leelawadee UI" pitchFamily="34" charset="-120"/>
+              </a:rPr>
+              <a:t>→</a:t>
+            </a:r>
+            <a:endParaRPr lang="en-US" sz="1800" dirty="0"/>
+          </a:p>
+        </p:txBody>
+      </p:sp>
+      <p:sp>
+        <p:nvSpPr>
+          <p:cNvPr id="9" name="Text 7"/>
+          <p:cNvSpPr txBox="1"/>
+          <p:nvPr/>
+        </p:nvSpPr>
+        <p:spPr>
+          <a:xfrm>
+            <a:off x="1097280" y="3794760"/>
+            <a:ext cx="9144000" cy="548640"/>
+          </a:xfrm>
+          <a:prstGeom prst="rect">
+            <a:avLst/>
+          </a:prstGeom>
+          <a:noFill/>
+          <a:ln/>
+        </p:spPr>
+        <p:txBody>
+          <a:bodyPr wrap="square" lIns="0" tIns="0" rIns="0" bIns="0" rtlCol="0" anchor="ctr"/>
+          <a:lstStyle/>
+          <a:p>
+            <a:pPr indent="0" marL="0">
+              <a:buNone/>
+            </a:pPr>
+            <a:r>
+              <a:rPr lang="en-US" sz="1600" dirty="0">
+                <a:solidFill>
+                  <a:srgbClr val="ECF1E8"/>
+                </a:solidFill>
+                <a:latin typeface="Leelawadee UI" pitchFamily="34" charset="0"/>
+                <a:ea typeface="Leelawadee UI" pitchFamily="34" charset="-122"/>
+                <a:cs typeface="Leelawadee UI" pitchFamily="34" charset="-120"/>
+              </a:rPr>
+              <a:t>คุมคอมพิวเตอร์ได้แม่นขึ้น (computer use)</a:t>
+            </a:r>
+            <a:endParaRPr lang="en-US" sz="1600" dirty="0"/>
+          </a:p>
+        </p:txBody>
+      </p:sp>
+      <p:sp>
+        <p:nvSpPr>
+          <p:cNvPr id="10" name="Text 8"/>
+          <p:cNvSpPr txBox="1"/>
+          <p:nvPr/>
+        </p:nvSpPr>
+        <p:spPr>
+          <a:xfrm>
+            <a:off x="548640" y="4480560"/>
+            <a:ext cx="457200" cy="548640"/>
+          </a:xfrm>
+          <a:prstGeom prst="rect">
+            <a:avLst/>
+          </a:prstGeom>
+          <a:noFill/>
+          <a:ln/>
+        </p:spPr>
+        <p:txBody>
+          <a:bodyPr wrap="square" lIns="0" tIns="0" rIns="0" bIns="0" rtlCol="0" anchor="ctr"/>
+          <a:lstStyle/>
+          <a:p>
+            <a:pPr indent="0" marL="0">
+              <a:buNone/>
+            </a:pPr>
+            <a:r>
+              <a:rPr lang="en-US" sz="1800" b="1" dirty="0">
+                <a:solidFill>
+                  <a:srgbClr val="F0AC4C"/>
+                </a:solidFill>
+                <a:latin typeface="Leelawadee UI" pitchFamily="34" charset="0"/>
+                <a:ea typeface="Leelawadee UI" pitchFamily="34" charset="-122"/>
+                <a:cs typeface="Leelawadee UI" pitchFamily="34" charset="-120"/>
+              </a:rPr>
+              <a:t>→</a:t>
+            </a:r>
+            <a:endParaRPr lang="en-US" sz="1800" dirty="0"/>
+          </a:p>
+        </p:txBody>
+      </p:sp>
+      <p:sp>
+        <p:nvSpPr>
+          <p:cNvPr id="11" name="Text 9"/>
+          <p:cNvSpPr txBox="1"/>
+          <p:nvPr/>
+        </p:nvSpPr>
+        <p:spPr>
+          <a:xfrm>
+            <a:off x="1097280" y="4480560"/>
+            <a:ext cx="9144000" cy="548640"/>
+          </a:xfrm>
+          <a:prstGeom prst="rect">
+            <a:avLst/>
+          </a:prstGeom>
+          <a:noFill/>
+          <a:ln/>
+        </p:spPr>
+        <p:txBody>
+          <a:bodyPr wrap="square" lIns="0" tIns="0" rIns="0" bIns="0" rtlCol="0" anchor="ctr"/>
+          <a:lstStyle/>
+          <a:p>
+            <a:pPr indent="0" marL="0">
+              <a:buNone/>
+            </a:pPr>
+            <a:r>
+              <a:rPr lang="en-US" sz="1600" dirty="0">
+                <a:solidFill>
+                  <a:srgbClr val="ECF1E8"/>
+                </a:solidFill>
+                <a:latin typeface="Leelawadee UI" pitchFamily="34" charset="0"/>
+                <a:ea typeface="Leelawadee UI" pitchFamily="34" charset="-122"/>
+                <a:cs typeface="Leelawadee UI" pitchFamily="34" charset="-120"/>
+              </a:rPr>
+              <a:t>จำ context ยาวๆ ข้ามหลายเซสชันได้</a:t>
+            </a:r>
+            <a:endParaRPr lang="en-US" sz="1600" dirty="0"/>
+          </a:p>
+        </p:txBody>
+      </p:sp>
+      <p:sp>
+        <p:nvSpPr>
+          <p:cNvPr id="12" name="Shape 10"/>
           <p:cNvSpPr/>
           <p:nvPr/>
         </p:nvSpPr>
         <p:spPr>
           <a:xfrm>
-            <a:off x="548640" y="1920240"/>
-            <a:ext cx="5074920" cy="4114800"/>
+            <a:off x="548640" y="5349240"/>
+            <a:ext cx="10881360" cy="914400"/>
           </a:xfrm>
           <a:prstGeom prst="roundRect">
             <a:avLst>
-              <a:gd name="adj" fmla="val 2667"/>
+              <a:gd name="adj" fmla="val 12000"/>
             </a:avLst>
           </a:prstGeom>
           <a:solidFill>
-            <a:srgbClr val="FFFFFF"/>
+            <a:srgbClr val="1B2822"/>
           </a:solidFill>
-          <a:ln w="15240">
+          <a:ln w="12700">
             <a:solidFill>
               <a:srgbClr val="2F5548"/>
             </a:solidFill>
@@ -2744,598 +3156,46 @@
       </p:sp>
       <p:sp>
         <p:nvSpPr>
-          <p:cNvPr id="7" name="Text 5"/>
-          <p:cNvSpPr txBox="1"/>
-          <p:nvPr/>
-        </p:nvSpPr>
-        <p:spPr>
-          <a:xfrm>
-            <a:off x="822960" y="2148840"/>
-            <a:ext cx="4526280" cy="365760"/>
-          </a:xfrm>
-          <a:prstGeom prst="rect">
-            <a:avLst/>
-          </a:prstGeom>
-          <a:noFill/>
-          <a:ln/>
-        </p:spPr>
-        <p:txBody>
-          <a:bodyPr wrap="square" lIns="0" tIns="0" rIns="0" bIns="0" rtlCol="0" anchor="ctr"/>
-          <a:lstStyle/>
-          <a:p>
-            <a:pPr indent="0" marL="0">
-              <a:buNone/>
-            </a:pPr>
-            <a:r>
-              <a:rPr lang="en-US" sz="1600" b="1" dirty="0">
-                <a:solidFill>
-                  <a:srgbClr val="2F5548"/>
-                </a:solidFill>
-                <a:latin typeface="Leelawadee UI" pitchFamily="34" charset="0"/>
-                <a:ea typeface="Leelawadee UI" pitchFamily="34" charset="-122"/>
-                <a:cs typeface="Leelawadee UI" pitchFamily="34" charset="-120"/>
-              </a:rPr>
-              <a:t>ข้อดี</a:t>
-            </a:r>
-            <a:endParaRPr lang="en-US" sz="1600" dirty="0"/>
-          </a:p>
-        </p:txBody>
-      </p:sp>
-      <p:sp>
-        <p:nvSpPr>
-          <p:cNvPr id="8" name="Text 6"/>
-          <p:cNvSpPr txBox="1"/>
-          <p:nvPr/>
-        </p:nvSpPr>
-        <p:spPr>
-          <a:xfrm>
-            <a:off x="822960" y="2697480"/>
-            <a:ext cx="320040" cy="822960"/>
-          </a:xfrm>
-          <a:prstGeom prst="rect">
-            <a:avLst/>
-          </a:prstGeom>
-          <a:noFill/>
-          <a:ln/>
-        </p:spPr>
-        <p:txBody>
-          <a:bodyPr wrap="square" lIns="0" tIns="0" rIns="0" bIns="0" rtlCol="0" anchor="ctr"/>
-          <a:lstStyle/>
-          <a:p>
-            <a:pPr indent="0" marL="0">
-              <a:buNone/>
-            </a:pPr>
-            <a:r>
-              <a:rPr lang="en-US" sz="1800" b="1" dirty="0">
-                <a:solidFill>
-                  <a:srgbClr val="2F5548"/>
-                </a:solidFill>
-                <a:latin typeface="Leelawadee UI" pitchFamily="34" charset="0"/>
-                <a:ea typeface="Leelawadee UI" pitchFamily="34" charset="-122"/>
-                <a:cs typeface="Leelawadee UI" pitchFamily="34" charset="-120"/>
-              </a:rPr>
-              <a:t>+</a:t>
-            </a:r>
-            <a:endParaRPr lang="en-US" sz="1800" dirty="0"/>
-          </a:p>
-        </p:txBody>
-      </p:sp>
-      <p:sp>
-        <p:nvSpPr>
-          <p:cNvPr id="9" name="Text 7"/>
-          <p:cNvSpPr txBox="1"/>
-          <p:nvPr/>
-        </p:nvSpPr>
-        <p:spPr>
-          <a:xfrm>
-            <a:off x="1188720" y="2697480"/>
-            <a:ext cx="4160520" cy="822960"/>
-          </a:xfrm>
-          <a:prstGeom prst="rect">
-            <a:avLst/>
-          </a:prstGeom>
-          <a:noFill/>
-          <a:ln/>
-        </p:spPr>
-        <p:txBody>
-          <a:bodyPr wrap="square" lIns="0" tIns="0" rIns="0" bIns="0" rtlCol="0" anchor="ctr"/>
-          <a:lstStyle/>
-          <a:p>
-            <a:pPr indent="0" marL="0">
-              <a:lnSpc>
-                <a:spcPct val="115000"/>
-              </a:lnSpc>
-              <a:buNone/>
-            </a:pPr>
-            <a:r>
-              <a:rPr lang="en-US" sz="1350" dirty="0">
-                <a:solidFill>
-                  <a:srgbClr val="55685D"/>
-                </a:solidFill>
-                <a:latin typeface="Leelawadee UI" pitchFamily="34" charset="0"/>
-                <a:ea typeface="Leelawadee UI" pitchFamily="34" charset="-122"/>
-                <a:cs typeface="Leelawadee UI" pitchFamily="34" charset="-120"/>
-              </a:rPr>
-              <a:t>เร็วกว่าทำเอง โดยเฉพาะงานซ้ำ</a:t>
-            </a:r>
-            <a:endParaRPr lang="en-US" sz="1350" dirty="0"/>
-          </a:p>
-        </p:txBody>
-      </p:sp>
-      <p:sp>
-        <p:nvSpPr>
-          <p:cNvPr id="10" name="Text 8"/>
-          <p:cNvSpPr txBox="1"/>
-          <p:nvPr/>
-        </p:nvSpPr>
-        <p:spPr>
-          <a:xfrm>
-            <a:off x="822960" y="3657600"/>
-            <a:ext cx="320040" cy="822960"/>
-          </a:xfrm>
-          <a:prstGeom prst="rect">
-            <a:avLst/>
-          </a:prstGeom>
-          <a:noFill/>
-          <a:ln/>
-        </p:spPr>
-        <p:txBody>
-          <a:bodyPr wrap="square" lIns="0" tIns="0" rIns="0" bIns="0" rtlCol="0" anchor="ctr"/>
-          <a:lstStyle/>
-          <a:p>
-            <a:pPr indent="0" marL="0">
-              <a:buNone/>
-            </a:pPr>
-            <a:r>
-              <a:rPr lang="en-US" sz="1800" b="1" dirty="0">
-                <a:solidFill>
-                  <a:srgbClr val="2F5548"/>
-                </a:solidFill>
-                <a:latin typeface="Leelawadee UI" pitchFamily="34" charset="0"/>
-                <a:ea typeface="Leelawadee UI" pitchFamily="34" charset="-122"/>
-                <a:cs typeface="Leelawadee UI" pitchFamily="34" charset="-120"/>
-              </a:rPr>
-              <a:t>+</a:t>
-            </a:r>
-            <a:endParaRPr lang="en-US" sz="1800" dirty="0"/>
-          </a:p>
-        </p:txBody>
-      </p:sp>
-      <p:sp>
-        <p:nvSpPr>
-          <p:cNvPr id="11" name="Text 9"/>
-          <p:cNvSpPr txBox="1"/>
-          <p:nvPr/>
-        </p:nvSpPr>
-        <p:spPr>
-          <a:xfrm>
-            <a:off x="1188720" y="3657600"/>
-            <a:ext cx="4160520" cy="822960"/>
-          </a:xfrm>
-          <a:prstGeom prst="rect">
-            <a:avLst/>
-          </a:prstGeom>
-          <a:noFill/>
-          <a:ln/>
-        </p:spPr>
-        <p:txBody>
-          <a:bodyPr wrap="square" lIns="0" tIns="0" rIns="0" bIns="0" rtlCol="0" anchor="ctr"/>
-          <a:lstStyle/>
-          <a:p>
-            <a:pPr indent="0" marL="0">
-              <a:lnSpc>
-                <a:spcPct val="115000"/>
-              </a:lnSpc>
-              <a:buNone/>
-            </a:pPr>
-            <a:r>
-              <a:rPr lang="en-US" sz="1350" dirty="0">
-                <a:solidFill>
-                  <a:srgbClr val="55685D"/>
-                </a:solidFill>
-                <a:latin typeface="Leelawadee UI" pitchFamily="34" charset="0"/>
-                <a:ea typeface="Leelawadee UI" pitchFamily="34" charset="-122"/>
-                <a:cs typeface="Leelawadee UI" pitchFamily="34" charset="-120"/>
-              </a:rPr>
-              <a:t>มอบหมายแล้วไปทำอย่างอื่นได้</a:t>
-            </a:r>
-            <a:endParaRPr lang="en-US" sz="1350" dirty="0"/>
-          </a:p>
-        </p:txBody>
-      </p:sp>
-      <p:sp>
-        <p:nvSpPr>
-          <p:cNvPr id="12" name="Text 10"/>
-          <p:cNvSpPr txBox="1"/>
-          <p:nvPr/>
-        </p:nvSpPr>
-        <p:spPr>
-          <a:xfrm>
-            <a:off x="822960" y="4617720"/>
-            <a:ext cx="320040" cy="822960"/>
-          </a:xfrm>
-          <a:prstGeom prst="rect">
-            <a:avLst/>
-          </a:prstGeom>
-          <a:noFill/>
-          <a:ln/>
-        </p:spPr>
-        <p:txBody>
-          <a:bodyPr wrap="square" lIns="0" tIns="0" rIns="0" bIns="0" rtlCol="0" anchor="ctr"/>
-          <a:lstStyle/>
-          <a:p>
-            <a:pPr indent="0" marL="0">
-              <a:buNone/>
-            </a:pPr>
-            <a:r>
-              <a:rPr lang="en-US" sz="1800" b="1" dirty="0">
-                <a:solidFill>
-                  <a:srgbClr val="2F5548"/>
-                </a:solidFill>
-                <a:latin typeface="Leelawadee UI" pitchFamily="34" charset="0"/>
-                <a:ea typeface="Leelawadee UI" pitchFamily="34" charset="-122"/>
-                <a:cs typeface="Leelawadee UI" pitchFamily="34" charset="-120"/>
-              </a:rPr>
-              <a:t>+</a:t>
-            </a:r>
-            <a:endParaRPr lang="en-US" sz="1800" dirty="0"/>
-          </a:p>
-        </p:txBody>
-      </p:sp>
-      <p:sp>
-        <p:nvSpPr>
           <p:cNvPr id="13" name="Text 11"/>
           <p:cNvSpPr txBox="1"/>
           <p:nvPr/>
         </p:nvSpPr>
         <p:spPr>
           <a:xfrm>
-            <a:off x="1188720" y="4617720"/>
-            <a:ext cx="4160520" cy="822960"/>
-          </a:xfrm>
-          <a:prstGeom prst="rect">
-            <a:avLst/>
-          </a:prstGeom>
-          <a:noFill/>
-          <a:ln/>
-        </p:spPr>
-        <p:txBody>
-          <a:bodyPr wrap="square" lIns="0" tIns="0" rIns="0" bIns="0" rtlCol="0" anchor="ctr"/>
-          <a:lstStyle/>
-          <a:p>
-            <a:pPr indent="0" marL="0">
-              <a:lnSpc>
-                <a:spcPct val="115000"/>
-              </a:lnSpc>
-              <a:buNone/>
-            </a:pPr>
-            <a:r>
-              <a:rPr lang="en-US" sz="1350" dirty="0">
-                <a:solidFill>
-                  <a:srgbClr val="55685D"/>
-                </a:solidFill>
-                <a:latin typeface="Leelawadee UI" pitchFamily="34" charset="0"/>
-                <a:ea typeface="Leelawadee UI" pitchFamily="34" charset="-122"/>
-                <a:cs typeface="Leelawadee UI" pitchFamily="34" charset="-120"/>
-              </a:rPr>
-              <a:t>ตั้ง MEMORY.md ดี คุณภาพงานสม่ำเสมอขึ้นตามเวลา</a:t>
-            </a:r>
-            <a:endParaRPr lang="en-US" sz="1350" dirty="0"/>
-          </a:p>
-        </p:txBody>
-      </p:sp>
-      <p:sp>
-        <p:nvSpPr>
-          <p:cNvPr id="14" name="Shape 12"/>
-          <p:cNvSpPr/>
-          <p:nvPr/>
-        </p:nvSpPr>
-        <p:spPr>
-          <a:xfrm>
-            <a:off x="5989320" y="1920240"/>
-            <a:ext cx="5074920" cy="4114800"/>
-          </a:xfrm>
-          <a:prstGeom prst="roundRect">
-            <a:avLst>
-              <a:gd name="adj" fmla="val 2667"/>
-            </a:avLst>
-          </a:prstGeom>
-          <a:solidFill>
-            <a:srgbClr val="FFFFFF"/>
-          </a:solidFill>
-          <a:ln w="15240">
-            <a:solidFill>
-              <a:srgbClr val="C97F1E"/>
-            </a:solidFill>
-            <a:prstDash val="solid"/>
-          </a:ln>
-        </p:spPr>
-      </p:sp>
-      <p:sp>
-        <p:nvSpPr>
-          <p:cNvPr id="15" name="Text 13"/>
-          <p:cNvSpPr txBox="1"/>
-          <p:nvPr/>
-        </p:nvSpPr>
-        <p:spPr>
-          <a:xfrm>
-            <a:off x="6263640" y="2148840"/>
-            <a:ext cx="4526280" cy="365760"/>
-          </a:xfrm>
-          <a:prstGeom prst="rect">
-            <a:avLst/>
-          </a:prstGeom>
-          <a:noFill/>
-          <a:ln/>
-        </p:spPr>
-        <p:txBody>
-          <a:bodyPr wrap="square" lIns="0" tIns="0" rIns="0" bIns="0" rtlCol="0" anchor="ctr"/>
-          <a:lstStyle/>
-          <a:p>
-            <a:pPr indent="0" marL="0">
-              <a:buNone/>
-            </a:pPr>
-            <a:r>
-              <a:rPr lang="en-US" sz="1600" b="1" dirty="0">
-                <a:solidFill>
-                  <a:srgbClr val="C97F1E"/>
-                </a:solidFill>
-                <a:latin typeface="Leelawadee UI" pitchFamily="34" charset="0"/>
-                <a:ea typeface="Leelawadee UI" pitchFamily="34" charset="-122"/>
-                <a:cs typeface="Leelawadee UI" pitchFamily="34" charset="-120"/>
-              </a:rPr>
-              <a:t>ข้อควรระวัง</a:t>
-            </a:r>
-            <a:endParaRPr lang="en-US" sz="1600" dirty="0"/>
-          </a:p>
-        </p:txBody>
-      </p:sp>
-      <p:sp>
-        <p:nvSpPr>
-          <p:cNvPr id="16" name="Text 14"/>
-          <p:cNvSpPr txBox="1"/>
-          <p:nvPr/>
-        </p:nvSpPr>
-        <p:spPr>
-          <a:xfrm>
-            <a:off x="6263640" y="2697480"/>
-            <a:ext cx="320040" cy="822960"/>
-          </a:xfrm>
-          <a:prstGeom prst="rect">
-            <a:avLst/>
-          </a:prstGeom>
-          <a:noFill/>
-          <a:ln/>
-        </p:spPr>
-        <p:txBody>
-          <a:bodyPr wrap="square" lIns="0" tIns="0" rIns="0" bIns="0" rtlCol="0" anchor="ctr"/>
-          <a:lstStyle/>
-          <a:p>
-            <a:pPr indent="0" marL="0">
-              <a:buNone/>
-            </a:pPr>
-            <a:r>
-              <a:rPr lang="en-US" sz="1800" b="1" dirty="0">
-                <a:solidFill>
-                  <a:srgbClr val="C97F1E"/>
-                </a:solidFill>
-                <a:latin typeface="Leelawadee UI" pitchFamily="34" charset="0"/>
-                <a:ea typeface="Leelawadee UI" pitchFamily="34" charset="-122"/>
-                <a:cs typeface="Leelawadee UI" pitchFamily="34" charset="-120"/>
-              </a:rPr>
-              <a:t>–</a:t>
-            </a:r>
-            <a:endParaRPr lang="en-US" sz="1800" dirty="0"/>
-          </a:p>
-        </p:txBody>
-      </p:sp>
-      <p:sp>
-        <p:nvSpPr>
-          <p:cNvPr id="17" name="Text 15"/>
-          <p:cNvSpPr txBox="1"/>
-          <p:nvPr/>
-        </p:nvSpPr>
-        <p:spPr>
-          <a:xfrm>
-            <a:off x="6629400" y="2697480"/>
-            <a:ext cx="4160520" cy="822960"/>
-          </a:xfrm>
-          <a:prstGeom prst="rect">
-            <a:avLst/>
-          </a:prstGeom>
-          <a:noFill/>
-          <a:ln/>
-        </p:spPr>
-        <p:txBody>
-          <a:bodyPr wrap="square" lIns="0" tIns="0" rIns="0" bIns="0" rtlCol="0" anchor="ctr"/>
-          <a:lstStyle/>
-          <a:p>
-            <a:pPr indent="0" marL="0">
-              <a:lnSpc>
-                <a:spcPct val="115000"/>
-              </a:lnSpc>
-              <a:buNone/>
-            </a:pPr>
-            <a:r>
-              <a:rPr lang="en-US" sz="1350" dirty="0">
-                <a:solidFill>
-                  <a:srgbClr val="55685D"/>
-                </a:solidFill>
-                <a:latin typeface="Leelawadee UI" pitchFamily="34" charset="0"/>
-                <a:ea typeface="Leelawadee UI" pitchFamily="34" charset="-122"/>
-                <a:cs typeface="Leelawadee UI" pitchFamily="34" charset="-120"/>
-              </a:rPr>
-              <a:t>ยังพลาดได้ (hallucinate) — ต้องมีคนตรวจทานเสมอ</a:t>
-            </a:r>
-            <a:endParaRPr lang="en-US" sz="1350" dirty="0"/>
-          </a:p>
-        </p:txBody>
-      </p:sp>
-      <p:sp>
-        <p:nvSpPr>
-          <p:cNvPr id="18" name="Text 16"/>
-          <p:cNvSpPr txBox="1"/>
-          <p:nvPr/>
-        </p:nvSpPr>
-        <p:spPr>
-          <a:xfrm>
-            <a:off x="6263640" y="3657600"/>
-            <a:ext cx="320040" cy="822960"/>
-          </a:xfrm>
-          <a:prstGeom prst="rect">
-            <a:avLst/>
-          </a:prstGeom>
-          <a:noFill/>
-          <a:ln/>
-        </p:spPr>
-        <p:txBody>
-          <a:bodyPr wrap="square" lIns="0" tIns="0" rIns="0" bIns="0" rtlCol="0" anchor="ctr"/>
-          <a:lstStyle/>
-          <a:p>
-            <a:pPr indent="0" marL="0">
-              <a:buNone/>
-            </a:pPr>
-            <a:r>
-              <a:rPr lang="en-US" sz="1800" b="1" dirty="0">
-                <a:solidFill>
-                  <a:srgbClr val="C97F1E"/>
-                </a:solidFill>
-                <a:latin typeface="Leelawadee UI" pitchFamily="34" charset="0"/>
-                <a:ea typeface="Leelawadee UI" pitchFamily="34" charset="-122"/>
-                <a:cs typeface="Leelawadee UI" pitchFamily="34" charset="-120"/>
-              </a:rPr>
-              <a:t>–</a:t>
-            </a:r>
-            <a:endParaRPr lang="en-US" sz="1800" dirty="0"/>
-          </a:p>
-        </p:txBody>
-      </p:sp>
-      <p:sp>
-        <p:nvSpPr>
-          <p:cNvPr id="19" name="Text 17"/>
-          <p:cNvSpPr txBox="1"/>
-          <p:nvPr/>
-        </p:nvSpPr>
-        <p:spPr>
-          <a:xfrm>
-            <a:off x="6629400" y="3657600"/>
-            <a:ext cx="4160520" cy="822960"/>
-          </a:xfrm>
-          <a:prstGeom prst="rect">
-            <a:avLst/>
-          </a:prstGeom>
-          <a:noFill/>
-          <a:ln/>
-        </p:spPr>
-        <p:txBody>
-          <a:bodyPr wrap="square" lIns="0" tIns="0" rIns="0" bIns="0" rtlCol="0" anchor="ctr"/>
-          <a:lstStyle/>
-          <a:p>
-            <a:pPr indent="0" marL="0">
-              <a:lnSpc>
-                <a:spcPct val="115000"/>
-              </a:lnSpc>
-              <a:buNone/>
-            </a:pPr>
-            <a:r>
-              <a:rPr lang="en-US" sz="1350" dirty="0">
-                <a:solidFill>
-                  <a:srgbClr val="55685D"/>
-                </a:solidFill>
-                <a:latin typeface="Leelawadee UI" pitchFamily="34" charset="0"/>
-                <a:ea typeface="Leelawadee UI" pitchFamily="34" charset="-122"/>
-                <a:cs typeface="Leelawadee UI" pitchFamily="34" charset="-120"/>
-              </a:rPr>
-              <a:t>สั่งงานคลุมเครือ = ได้ผลลัพธ์คลุมเครือ</a:t>
-            </a:r>
-            <a:endParaRPr lang="en-US" sz="1350" dirty="0"/>
-          </a:p>
-        </p:txBody>
-      </p:sp>
-      <p:sp>
-        <p:nvSpPr>
-          <p:cNvPr id="20" name="Text 18"/>
-          <p:cNvSpPr txBox="1"/>
-          <p:nvPr/>
-        </p:nvSpPr>
-        <p:spPr>
-          <a:xfrm>
-            <a:off x="6263640" y="4617720"/>
-            <a:ext cx="320040" cy="822960"/>
-          </a:xfrm>
-          <a:prstGeom prst="rect">
-            <a:avLst/>
-          </a:prstGeom>
-          <a:noFill/>
-          <a:ln/>
-        </p:spPr>
-        <p:txBody>
-          <a:bodyPr wrap="square" lIns="0" tIns="0" rIns="0" bIns="0" rtlCol="0" anchor="ctr"/>
-          <a:lstStyle/>
-          <a:p>
-            <a:pPr indent="0" marL="0">
-              <a:buNone/>
-            </a:pPr>
-            <a:r>
-              <a:rPr lang="en-US" sz="1800" b="1" dirty="0">
-                <a:solidFill>
-                  <a:srgbClr val="C97F1E"/>
-                </a:solidFill>
-                <a:latin typeface="Leelawadee UI" pitchFamily="34" charset="0"/>
-                <a:ea typeface="Leelawadee UI" pitchFamily="34" charset="-122"/>
-                <a:cs typeface="Leelawadee UI" pitchFamily="34" charset="-120"/>
-              </a:rPr>
-              <a:t>–</a:t>
-            </a:r>
-            <a:endParaRPr lang="en-US" sz="1800" dirty="0"/>
-          </a:p>
-        </p:txBody>
-      </p:sp>
-      <p:sp>
-        <p:nvSpPr>
-          <p:cNvPr id="21" name="Text 19"/>
-          <p:cNvSpPr txBox="1"/>
-          <p:nvPr/>
-        </p:nvSpPr>
-        <p:spPr>
-          <a:xfrm>
-            <a:off x="6629400" y="4617720"/>
-            <a:ext cx="4160520" cy="822960"/>
-          </a:xfrm>
-          <a:prstGeom prst="rect">
-            <a:avLst/>
-          </a:prstGeom>
-          <a:noFill/>
-          <a:ln/>
-        </p:spPr>
-        <p:txBody>
-          <a:bodyPr wrap="square" lIns="0" tIns="0" rIns="0" bIns="0" rtlCol="0" anchor="ctr"/>
-          <a:lstStyle/>
-          <a:p>
-            <a:pPr indent="0" marL="0">
-              <a:lnSpc>
-                <a:spcPct val="115000"/>
-              </a:lnSpc>
-              <a:buNone/>
-            </a:pPr>
-            <a:r>
-              <a:rPr lang="en-US" sz="1350" dirty="0">
-                <a:solidFill>
-                  <a:srgbClr val="55685D"/>
-                </a:solidFill>
-                <a:latin typeface="Leelawadee UI" pitchFamily="34" charset="0"/>
-                <a:ea typeface="Leelawadee UI" pitchFamily="34" charset="-122"/>
-                <a:cs typeface="Leelawadee UI" pitchFamily="34" charset="-120"/>
-              </a:rPr>
-              <a:t>ให้สิทธิ์เข้าถึงเกินจำเป็น = เสี่ยงด้านความปลอดภัย</a:t>
-            </a:r>
-            <a:endParaRPr lang="en-US" sz="1350" dirty="0"/>
-          </a:p>
-        </p:txBody>
-      </p:sp>
-      <p:sp>
-        <p:nvSpPr>
-          <p:cNvPr id="22" name="Text 20"/>
+            <a:off x="914400" y="5349240"/>
+            <a:ext cx="10149840" cy="914400"/>
+          </a:xfrm>
+          <a:prstGeom prst="rect">
+            <a:avLst/>
+          </a:prstGeom>
+          <a:noFill/>
+          <a:ln/>
+        </p:spPr>
+        <p:txBody>
+          <a:bodyPr wrap="square" lIns="0" tIns="0" rIns="0" bIns="0" rtlCol="0" anchor="ctr"/>
+          <a:lstStyle/>
+          <a:p>
+            <a:pPr indent="0" marL="0">
+              <a:buNone/>
+            </a:pPr>
+            <a:r>
+              <a:rPr lang="en-US" sz="1300" i="1" dirty="0">
+                <a:solidFill>
+                  <a:srgbClr val="86BBA6"/>
+                </a:solidFill>
+                <a:latin typeface="Leelawadee UI" pitchFamily="34" charset="0"/>
+                <a:ea typeface="Leelawadee UI" pitchFamily="34" charset="-122"/>
+                <a:cs typeface="Leelawadee UI" pitchFamily="34" charset="-120"/>
+              </a:rPr>
+              <a:t>ทยอยเปิดให้ Pro/Business/Enterprise ก่อน · ไม่ต้องติดตั้งอะไรเพิ่ม แค่อัปเดตแอป · ข้อมูลใหม่มาก อาจเปลี่ยนเร็ว</a:t>
+            </a:r>
+            <a:endParaRPr lang="en-US" sz="1300" dirty="0"/>
+          </a:p>
+        </p:txBody>
+      </p:sp>
+      <p:sp>
+        <p:nvSpPr>
+          <p:cNvPr id="14" name="Text 12"/>
           <p:cNvSpPr txBox="1"/>
           <p:nvPr/>
         </p:nvSpPr>
@@ -3498,7 +3358,7 @@
                 <a:ea typeface="Leelawadee UI" pitchFamily="34" charset="-122"/>
                 <a:cs typeface="Leelawadee UI" pitchFamily="34" charset="-120"/>
               </a:rPr>
-              <a:t>ให้ Codex จำงานได้</a:t>
+              <a:t>ก่อนไปต่อ</a:t>
             </a:r>
             <a:endParaRPr lang="en-US" sz="1300" dirty="0"/>
           </a:p>
@@ -3529,7 +3389,7 @@
               <a:buNone/>
             </a:pPr>
             <a:r>
-              <a:rPr lang="en-US" sz="2700" b="1" dirty="0">
+              <a:rPr lang="en-US" sz="3000" b="1" dirty="0">
                 <a:solidFill>
                   <a:srgbClr val="1E2E28"/>
                 </a:solidFill>
@@ -3537,84 +3397,77 @@
                 <a:ea typeface="Leelawadee UI" pitchFamily="34" charset="-122"/>
                 <a:cs typeface="Leelawadee UI" pitchFamily="34" charset="-120"/>
               </a:rPr>
-              <a:t>3 แนวคิด: Memory · Skill · Harness</a:t>
-            </a:r>
-            <a:endParaRPr lang="en-US" sz="2700" dirty="0"/>
-          </a:p>
-        </p:txBody>
-      </p:sp>
-      <p:sp>
-        <p:nvSpPr>
-          <p:cNvPr id="6" name="Text 4"/>
-          <p:cNvSpPr txBox="1"/>
-          <p:nvPr/>
-        </p:nvSpPr>
-        <p:spPr>
-          <a:xfrm>
-            <a:off x="548640" y="1508760"/>
-            <a:ext cx="10881360" cy="365760"/>
-          </a:xfrm>
-          <a:prstGeom prst="rect">
-            <a:avLst/>
-          </a:prstGeom>
-          <a:noFill/>
-          <a:ln/>
-        </p:spPr>
-        <p:txBody>
-          <a:bodyPr wrap="square" lIns="0" tIns="0" rIns="0" bIns="0" rtlCol="0" anchor="ctr"/>
-          <a:lstStyle/>
-          <a:p>
-            <a:pPr indent="0" marL="0">
-              <a:buNone/>
-            </a:pPr>
-            <a:r>
-              <a:rPr lang="en-US" sz="1200" i="1" dirty="0">
-                <a:solidFill>
-                  <a:srgbClr val="8A9A8F"/>
-                </a:solidFill>
-                <a:latin typeface="Leelawadee UI" pitchFamily="34" charset="0"/>
-                <a:ea typeface="Leelawadee UI" pitchFamily="34" charset="-122"/>
-                <a:cs typeface="Leelawadee UI" pitchFamily="34" charset="-120"/>
-              </a:rPr>
-              <a:t>หมายเหตุ: ไม่ใช่ปุ่มในแอป Codex — เป็นวิธีทำงานที่ตั้งเอง ใช้ได้กับ AI agent ตัวไหนก็ได้</a:t>
-            </a:r>
-            <a:endParaRPr lang="en-US" sz="1200" dirty="0"/>
-          </a:p>
-        </p:txBody>
-      </p:sp>
-      <p:sp>
-        <p:nvSpPr>
-          <p:cNvPr id="7" name="Shape 5"/>
+              <a:t>ข้อดี-ข้อเสีย ของการใช้จริงจัง</a:t>
+            </a:r>
+            <a:endParaRPr lang="en-US" sz="3000" dirty="0"/>
+          </a:p>
+        </p:txBody>
+      </p:sp>
+      <p:sp>
+        <p:nvSpPr>
+          <p:cNvPr id="6" name="Shape 4"/>
           <p:cNvSpPr/>
           <p:nvPr/>
         </p:nvSpPr>
         <p:spPr>
           <a:xfrm>
-            <a:off x="548640" y="2057400"/>
-            <a:ext cx="3520440" cy="2926080"/>
+            <a:off x="548640" y="1920240"/>
+            <a:ext cx="5074920" cy="4114800"/>
           </a:xfrm>
           <a:prstGeom prst="roundRect">
             <a:avLst>
-              <a:gd name="adj" fmla="val 3750"/>
+              <a:gd name="adj" fmla="val 2667"/>
             </a:avLst>
           </a:prstGeom>
           <a:solidFill>
             <a:srgbClr val="FFFFFF"/>
           </a:solidFill>
-          <a:ln w="12700">
+          <a:ln w="15240">
             <a:solidFill>
-              <a:srgbClr val="D9DECB"/>
+              <a:srgbClr val="2F5548"/>
             </a:solidFill>
             <a:prstDash val="solid"/>
           </a:ln>
-          <a:effectLst>
-            <a:outerShdw sx="100000" sy="100000" kx="0" ky="0" algn="bl" rotWithShape="0" blurRad="76200" dist="25400" dir="5400000">
-              <a:srgbClr val="1E2E28">
-                <a:alpha val="12000"/>
-              </a:srgbClr>
-            </a:outerShdw>
-          </a:effectLst>
-        </p:spPr>
+        </p:spPr>
+      </p:sp>
+      <p:sp>
+        <p:nvSpPr>
+          <p:cNvPr id="7" name="Text 5"/>
+          <p:cNvSpPr txBox="1"/>
+          <p:nvPr/>
+        </p:nvSpPr>
+        <p:spPr>
+          <a:xfrm>
+            <a:off x="822960" y="2148840"/>
+            <a:ext cx="4526280" cy="365760"/>
+          </a:xfrm>
+          <a:prstGeom prst="rect">
+            <a:avLst/>
+          </a:prstGeom>
+          <a:noFill/>
+          <a:ln/>
+        </p:spPr>
+        <p:txBody>
+          <a:bodyPr wrap="square" lIns="0" tIns="0" rIns="0" bIns="0" rtlCol="0" anchor="ctr"/>
+          <a:lstStyle/>
+          <a:p>
+            <a:pPr indent="0" marL="0">
+              <a:buNone/>
+            </a:pPr>
+            <a:r>
+              <a:rPr lang="en-US" sz="1600" b="1" dirty="0">
+                <a:solidFill>
+                  <a:srgbClr val="2F5548"/>
+                </a:solidFill>
+                <a:latin typeface="Leelawadee UI" pitchFamily="34" charset="0"/>
+                <a:ea typeface="Leelawadee UI" pitchFamily="34" charset="-122"/>
+                <a:cs typeface="Leelawadee UI" pitchFamily="34" charset="-120"/>
+              </a:rPr>
+              <a:t>ข้อดี</a:t>
+            </a:r>
+            <a:endParaRPr lang="en-US" sz="1600" dirty="0"/>
+          </a:p>
+        </p:txBody>
       </p:sp>
       <p:sp>
         <p:nvSpPr>
@@ -3624,34 +3477,34 @@
         </p:nvSpPr>
         <p:spPr>
           <a:xfrm>
-            <a:off x="749808" y="2221992"/>
-            <a:ext cx="548640" cy="457200"/>
-          </a:xfrm>
-          <a:prstGeom prst="rect">
-            <a:avLst/>
-          </a:prstGeom>
-          <a:noFill/>
-          <a:ln/>
-        </p:spPr>
-        <p:txBody>
-          <a:bodyPr wrap="square" lIns="0" tIns="0" rIns="0" bIns="0" rtlCol="0" anchor="ctr"/>
-          <a:lstStyle/>
-          <a:p>
-            <a:pPr indent="0" marL="0">
-              <a:buNone/>
-            </a:pPr>
-            <a:r>
-              <a:rPr lang="en-US" sz="2400" dirty="0">
-                <a:solidFill>
-                  <a:srgbClr val="000000"/>
-                </a:solidFill>
-                <a:latin typeface="Leelawadee UI" pitchFamily="34" charset="0"/>
-                <a:ea typeface="Leelawadee UI" pitchFamily="34" charset="-122"/>
-                <a:cs typeface="Leelawadee UI" pitchFamily="34" charset="-120"/>
-              </a:rPr>
-              <a:t>📝</a:t>
-            </a:r>
-            <a:endParaRPr lang="en-US" sz="2400" dirty="0"/>
+            <a:off x="822960" y="2697480"/>
+            <a:ext cx="320040" cy="822960"/>
+          </a:xfrm>
+          <a:prstGeom prst="rect">
+            <a:avLst/>
+          </a:prstGeom>
+          <a:noFill/>
+          <a:ln/>
+        </p:spPr>
+        <p:txBody>
+          <a:bodyPr wrap="square" lIns="0" tIns="0" rIns="0" bIns="0" rtlCol="0" anchor="ctr"/>
+          <a:lstStyle/>
+          <a:p>
+            <a:pPr indent="0" marL="0">
+              <a:buNone/>
+            </a:pPr>
+            <a:r>
+              <a:rPr lang="en-US" sz="1800" b="1" dirty="0">
+                <a:solidFill>
+                  <a:srgbClr val="2F5548"/>
+                </a:solidFill>
+                <a:latin typeface="Leelawadee UI" pitchFamily="34" charset="0"/>
+                <a:ea typeface="Leelawadee UI" pitchFamily="34" charset="-122"/>
+                <a:cs typeface="Leelawadee UI" pitchFamily="34" charset="-120"/>
+              </a:rPr>
+              <a:t>+</a:t>
+            </a:r>
+            <a:endParaRPr lang="en-US" sz="1800" dirty="0"/>
           </a:p>
         </p:txBody>
       </p:sp>
@@ -3663,56 +3516,17 @@
         </p:nvSpPr>
         <p:spPr>
           <a:xfrm>
-            <a:off x="749808" y="2624328"/>
-            <a:ext cx="3118104" cy="457200"/>
-          </a:xfrm>
-          <a:prstGeom prst="rect">
-            <a:avLst/>
-          </a:prstGeom>
-          <a:noFill/>
-          <a:ln/>
-        </p:spPr>
-        <p:txBody>
-          <a:bodyPr wrap="square" lIns="0" tIns="0" rIns="0" bIns="0" rtlCol="0" anchor="t"/>
-          <a:lstStyle/>
-          <a:p>
-            <a:pPr indent="0" marL="0">
-              <a:buNone/>
-            </a:pPr>
-            <a:r>
-              <a:rPr lang="en-US" sz="1450" b="1" dirty="0">
-                <a:solidFill>
-                  <a:srgbClr val="1E2E28"/>
-                </a:solidFill>
-                <a:latin typeface="Leelawadee UI" pitchFamily="34" charset="0"/>
-                <a:ea typeface="Leelawadee UI" pitchFamily="34" charset="-122"/>
-                <a:cs typeface="Leelawadee UI" pitchFamily="34" charset="-120"/>
-              </a:rPr>
-              <a:t>MEMORY.md</a:t>
-            </a:r>
-            <a:endParaRPr lang="en-US" sz="1450" dirty="0"/>
-          </a:p>
-        </p:txBody>
-      </p:sp>
-      <p:sp>
-        <p:nvSpPr>
-          <p:cNvPr id="10" name="Text 8"/>
-          <p:cNvSpPr txBox="1"/>
-          <p:nvPr/>
-        </p:nvSpPr>
-        <p:spPr>
-          <a:xfrm>
-            <a:off x="749808" y="3044952"/>
-            <a:ext cx="3118104" cy="1773936"/>
-          </a:xfrm>
-          <a:prstGeom prst="rect">
-            <a:avLst/>
-          </a:prstGeom>
-          <a:noFill/>
-          <a:ln/>
-        </p:spPr>
-        <p:txBody>
-          <a:bodyPr wrap="square" lIns="0" tIns="0" rIns="0" bIns="0" rtlCol="0" anchor="t"/>
+            <a:off x="1188720" y="2697480"/>
+            <a:ext cx="4160520" cy="822960"/>
+          </a:xfrm>
+          <a:prstGeom prst="rect">
+            <a:avLst/>
+          </a:prstGeom>
+          <a:noFill/>
+          <a:ln/>
+        </p:spPr>
+        <p:txBody>
+          <a:bodyPr wrap="square" lIns="0" tIns="0" rIns="0" bIns="0" rtlCol="0" anchor="ctr"/>
           <a:lstStyle/>
           <a:p>
             <a:pPr indent="0" marL="0">
@@ -3722,7 +3536,7 @@
               <a:buNone/>
             </a:pPr>
             <a:r>
-              <a:rPr lang="en-US" sz="1100" dirty="0">
+              <a:rPr lang="en-US" sz="1350" dirty="0">
                 <a:solidFill>
                   <a:srgbClr val="55685D"/>
                 </a:solidFill>
@@ -3730,143 +3544,298 @@
                 <a:ea typeface="Leelawadee UI" pitchFamily="34" charset="-122"/>
                 <a:cs typeface="Leelawadee UI" pitchFamily="34" charset="-120"/>
               </a:rPr>
-              <a:t>ไฟล์ความจำ ให้ Codex อ่านก่อนเริ่มงาน + จดสิ่งที่ตัดสินใจไว้ท้ายไฟล์เมื่อทำเสร็จ — เซสชันหน้าไม่ต้องอธิบายซ้ำ</a:t>
-            </a:r>
-            <a:endParaRPr lang="en-US" sz="1100" dirty="0"/>
-          </a:p>
-        </p:txBody>
-      </p:sp>
-      <p:sp>
-        <p:nvSpPr>
-          <p:cNvPr id="11" name="Shape 9"/>
+              <a:t>เร็วกว่าทำเอง โดยเฉพาะงานซ้ำ</a:t>
+            </a:r>
+            <a:endParaRPr lang="en-US" sz="1350" dirty="0"/>
+          </a:p>
+        </p:txBody>
+      </p:sp>
+      <p:sp>
+        <p:nvSpPr>
+          <p:cNvPr id="10" name="Text 8"/>
+          <p:cNvSpPr txBox="1"/>
+          <p:nvPr/>
+        </p:nvSpPr>
+        <p:spPr>
+          <a:xfrm>
+            <a:off x="822960" y="3657600"/>
+            <a:ext cx="320040" cy="822960"/>
+          </a:xfrm>
+          <a:prstGeom prst="rect">
+            <a:avLst/>
+          </a:prstGeom>
+          <a:noFill/>
+          <a:ln/>
+        </p:spPr>
+        <p:txBody>
+          <a:bodyPr wrap="square" lIns="0" tIns="0" rIns="0" bIns="0" rtlCol="0" anchor="ctr"/>
+          <a:lstStyle/>
+          <a:p>
+            <a:pPr indent="0" marL="0">
+              <a:buNone/>
+            </a:pPr>
+            <a:r>
+              <a:rPr lang="en-US" sz="1800" b="1" dirty="0">
+                <a:solidFill>
+                  <a:srgbClr val="2F5548"/>
+                </a:solidFill>
+                <a:latin typeface="Leelawadee UI" pitchFamily="34" charset="0"/>
+                <a:ea typeface="Leelawadee UI" pitchFamily="34" charset="-122"/>
+                <a:cs typeface="Leelawadee UI" pitchFamily="34" charset="-120"/>
+              </a:rPr>
+              <a:t>+</a:t>
+            </a:r>
+            <a:endParaRPr lang="en-US" sz="1800" dirty="0"/>
+          </a:p>
+        </p:txBody>
+      </p:sp>
+      <p:sp>
+        <p:nvSpPr>
+          <p:cNvPr id="11" name="Text 9"/>
+          <p:cNvSpPr txBox="1"/>
+          <p:nvPr/>
+        </p:nvSpPr>
+        <p:spPr>
+          <a:xfrm>
+            <a:off x="1188720" y="3657600"/>
+            <a:ext cx="4160520" cy="822960"/>
+          </a:xfrm>
+          <a:prstGeom prst="rect">
+            <a:avLst/>
+          </a:prstGeom>
+          <a:noFill/>
+          <a:ln/>
+        </p:spPr>
+        <p:txBody>
+          <a:bodyPr wrap="square" lIns="0" tIns="0" rIns="0" bIns="0" rtlCol="0" anchor="ctr"/>
+          <a:lstStyle/>
+          <a:p>
+            <a:pPr indent="0" marL="0">
+              <a:lnSpc>
+                <a:spcPct val="115000"/>
+              </a:lnSpc>
+              <a:buNone/>
+            </a:pPr>
+            <a:r>
+              <a:rPr lang="en-US" sz="1350" dirty="0">
+                <a:solidFill>
+                  <a:srgbClr val="55685D"/>
+                </a:solidFill>
+                <a:latin typeface="Leelawadee UI" pitchFamily="34" charset="0"/>
+                <a:ea typeface="Leelawadee UI" pitchFamily="34" charset="-122"/>
+                <a:cs typeface="Leelawadee UI" pitchFamily="34" charset="-120"/>
+              </a:rPr>
+              <a:t>มอบหมายแล้วไปทำอย่างอื่นได้</a:t>
+            </a:r>
+            <a:endParaRPr lang="en-US" sz="1350" dirty="0"/>
+          </a:p>
+        </p:txBody>
+      </p:sp>
+      <p:sp>
+        <p:nvSpPr>
+          <p:cNvPr id="12" name="Text 10"/>
+          <p:cNvSpPr txBox="1"/>
+          <p:nvPr/>
+        </p:nvSpPr>
+        <p:spPr>
+          <a:xfrm>
+            <a:off x="822960" y="4617720"/>
+            <a:ext cx="320040" cy="822960"/>
+          </a:xfrm>
+          <a:prstGeom prst="rect">
+            <a:avLst/>
+          </a:prstGeom>
+          <a:noFill/>
+          <a:ln/>
+        </p:spPr>
+        <p:txBody>
+          <a:bodyPr wrap="square" lIns="0" tIns="0" rIns="0" bIns="0" rtlCol="0" anchor="ctr"/>
+          <a:lstStyle/>
+          <a:p>
+            <a:pPr indent="0" marL="0">
+              <a:buNone/>
+            </a:pPr>
+            <a:r>
+              <a:rPr lang="en-US" sz="1800" b="1" dirty="0">
+                <a:solidFill>
+                  <a:srgbClr val="2F5548"/>
+                </a:solidFill>
+                <a:latin typeface="Leelawadee UI" pitchFamily="34" charset="0"/>
+                <a:ea typeface="Leelawadee UI" pitchFamily="34" charset="-122"/>
+                <a:cs typeface="Leelawadee UI" pitchFamily="34" charset="-120"/>
+              </a:rPr>
+              <a:t>+</a:t>
+            </a:r>
+            <a:endParaRPr lang="en-US" sz="1800" dirty="0"/>
+          </a:p>
+        </p:txBody>
+      </p:sp>
+      <p:sp>
+        <p:nvSpPr>
+          <p:cNvPr id="13" name="Text 11"/>
+          <p:cNvSpPr txBox="1"/>
+          <p:nvPr/>
+        </p:nvSpPr>
+        <p:spPr>
+          <a:xfrm>
+            <a:off x="1188720" y="4617720"/>
+            <a:ext cx="4160520" cy="822960"/>
+          </a:xfrm>
+          <a:prstGeom prst="rect">
+            <a:avLst/>
+          </a:prstGeom>
+          <a:noFill/>
+          <a:ln/>
+        </p:spPr>
+        <p:txBody>
+          <a:bodyPr wrap="square" lIns="0" tIns="0" rIns="0" bIns="0" rtlCol="0" anchor="ctr"/>
+          <a:lstStyle/>
+          <a:p>
+            <a:pPr indent="0" marL="0">
+              <a:lnSpc>
+                <a:spcPct val="115000"/>
+              </a:lnSpc>
+              <a:buNone/>
+            </a:pPr>
+            <a:r>
+              <a:rPr lang="en-US" sz="1350" dirty="0">
+                <a:solidFill>
+                  <a:srgbClr val="55685D"/>
+                </a:solidFill>
+                <a:latin typeface="Leelawadee UI" pitchFamily="34" charset="0"/>
+                <a:ea typeface="Leelawadee UI" pitchFamily="34" charset="-122"/>
+                <a:cs typeface="Leelawadee UI" pitchFamily="34" charset="-120"/>
+              </a:rPr>
+              <a:t>ตั้ง MEMORY.md ดี คุณภาพงานสม่ำเสมอขึ้นตามเวลา</a:t>
+            </a:r>
+            <a:endParaRPr lang="en-US" sz="1350" dirty="0"/>
+          </a:p>
+        </p:txBody>
+      </p:sp>
+      <p:sp>
+        <p:nvSpPr>
+          <p:cNvPr id="14" name="Shape 12"/>
           <p:cNvSpPr/>
           <p:nvPr/>
         </p:nvSpPr>
         <p:spPr>
           <a:xfrm>
-            <a:off x="4297680" y="2057400"/>
-            <a:ext cx="3520440" cy="2926080"/>
+            <a:off x="5989320" y="1920240"/>
+            <a:ext cx="5074920" cy="4114800"/>
           </a:xfrm>
           <a:prstGeom prst="roundRect">
             <a:avLst>
-              <a:gd name="adj" fmla="val 3750"/>
+              <a:gd name="adj" fmla="val 2667"/>
             </a:avLst>
           </a:prstGeom>
           <a:solidFill>
             <a:srgbClr val="FFFFFF"/>
           </a:solidFill>
-          <a:ln w="12700">
+          <a:ln w="15240">
             <a:solidFill>
-              <a:srgbClr val="D9DECB"/>
+              <a:srgbClr val="C97F1E"/>
             </a:solidFill>
             <a:prstDash val="solid"/>
           </a:ln>
-          <a:effectLst>
-            <a:outerShdw sx="100000" sy="100000" kx="0" ky="0" algn="bl" rotWithShape="0" blurRad="76200" dist="25400" dir="5400000">
-              <a:srgbClr val="1E2E28">
-                <a:alpha val="12000"/>
-              </a:srgbClr>
-            </a:outerShdw>
-          </a:effectLst>
-        </p:spPr>
-      </p:sp>
-      <p:sp>
-        <p:nvSpPr>
-          <p:cNvPr id="12" name="Text 10"/>
-          <p:cNvSpPr txBox="1"/>
-          <p:nvPr/>
-        </p:nvSpPr>
-        <p:spPr>
-          <a:xfrm>
-            <a:off x="4498848" y="2221992"/>
-            <a:ext cx="548640" cy="457200"/>
-          </a:xfrm>
-          <a:prstGeom prst="rect">
-            <a:avLst/>
-          </a:prstGeom>
-          <a:noFill/>
-          <a:ln/>
-        </p:spPr>
-        <p:txBody>
-          <a:bodyPr wrap="square" lIns="0" tIns="0" rIns="0" bIns="0" rtlCol="0" anchor="ctr"/>
-          <a:lstStyle/>
-          <a:p>
-            <a:pPr indent="0" marL="0">
-              <a:buNone/>
-            </a:pPr>
-            <a:r>
-              <a:rPr lang="en-US" sz="2400" dirty="0">
-                <a:solidFill>
-                  <a:srgbClr val="000000"/>
-                </a:solidFill>
-                <a:latin typeface="Leelawadee UI" pitchFamily="34" charset="0"/>
-                <a:ea typeface="Leelawadee UI" pitchFamily="34" charset="-122"/>
-                <a:cs typeface="Leelawadee UI" pitchFamily="34" charset="-120"/>
-              </a:rPr>
-              <a:t>📋</a:t>
-            </a:r>
-            <a:endParaRPr lang="en-US" sz="2400" dirty="0"/>
-          </a:p>
-        </p:txBody>
-      </p:sp>
-      <p:sp>
-        <p:nvSpPr>
-          <p:cNvPr id="13" name="Text 11"/>
-          <p:cNvSpPr txBox="1"/>
-          <p:nvPr/>
-        </p:nvSpPr>
-        <p:spPr>
-          <a:xfrm>
-            <a:off x="4498848" y="2624328"/>
-            <a:ext cx="3118104" cy="457200"/>
-          </a:xfrm>
-          <a:prstGeom prst="rect">
-            <a:avLst/>
-          </a:prstGeom>
-          <a:noFill/>
-          <a:ln/>
-        </p:spPr>
-        <p:txBody>
-          <a:bodyPr wrap="square" lIns="0" tIns="0" rIns="0" bIns="0" rtlCol="0" anchor="t"/>
-          <a:lstStyle/>
-          <a:p>
-            <a:pPr indent="0" marL="0">
-              <a:buNone/>
-            </a:pPr>
-            <a:r>
-              <a:rPr lang="en-US" sz="1450" b="1" dirty="0">
-                <a:solidFill>
-                  <a:srgbClr val="1E2E28"/>
-                </a:solidFill>
-                <a:latin typeface="Leelawadee UI" pitchFamily="34" charset="0"/>
-                <a:ea typeface="Leelawadee UI" pitchFamily="34" charset="-122"/>
-                <a:cs typeface="Leelawadee UI" pitchFamily="34" charset="-120"/>
-              </a:rPr>
-              <a:t>SKILL.md</a:t>
-            </a:r>
-            <a:endParaRPr lang="en-US" sz="1450" dirty="0"/>
-          </a:p>
-        </p:txBody>
-      </p:sp>
-      <p:sp>
-        <p:nvSpPr>
-          <p:cNvPr id="14" name="Text 12"/>
-          <p:cNvSpPr txBox="1"/>
-          <p:nvPr/>
-        </p:nvSpPr>
-        <p:spPr>
-          <a:xfrm>
-            <a:off x="4498848" y="3044952"/>
-            <a:ext cx="3118104" cy="1773936"/>
-          </a:xfrm>
-          <a:prstGeom prst="rect">
-            <a:avLst/>
-          </a:prstGeom>
-          <a:noFill/>
-          <a:ln/>
-        </p:spPr>
-        <p:txBody>
-          <a:bodyPr wrap="square" lIns="0" tIns="0" rIns="0" bIns="0" rtlCol="0" anchor="t"/>
+        </p:spPr>
+      </p:sp>
+      <p:sp>
+        <p:nvSpPr>
+          <p:cNvPr id="15" name="Text 13"/>
+          <p:cNvSpPr txBox="1"/>
+          <p:nvPr/>
+        </p:nvSpPr>
+        <p:spPr>
+          <a:xfrm>
+            <a:off x="6263640" y="2148840"/>
+            <a:ext cx="4526280" cy="365760"/>
+          </a:xfrm>
+          <a:prstGeom prst="rect">
+            <a:avLst/>
+          </a:prstGeom>
+          <a:noFill/>
+          <a:ln/>
+        </p:spPr>
+        <p:txBody>
+          <a:bodyPr wrap="square" lIns="0" tIns="0" rIns="0" bIns="0" rtlCol="0" anchor="ctr"/>
+          <a:lstStyle/>
+          <a:p>
+            <a:pPr indent="0" marL="0">
+              <a:buNone/>
+            </a:pPr>
+            <a:r>
+              <a:rPr lang="en-US" sz="1600" b="1" dirty="0">
+                <a:solidFill>
+                  <a:srgbClr val="C97F1E"/>
+                </a:solidFill>
+                <a:latin typeface="Leelawadee UI" pitchFamily="34" charset="0"/>
+                <a:ea typeface="Leelawadee UI" pitchFamily="34" charset="-122"/>
+                <a:cs typeface="Leelawadee UI" pitchFamily="34" charset="-120"/>
+              </a:rPr>
+              <a:t>ข้อควรระวัง</a:t>
+            </a:r>
+            <a:endParaRPr lang="en-US" sz="1600" dirty="0"/>
+          </a:p>
+        </p:txBody>
+      </p:sp>
+      <p:sp>
+        <p:nvSpPr>
+          <p:cNvPr id="16" name="Text 14"/>
+          <p:cNvSpPr txBox="1"/>
+          <p:nvPr/>
+        </p:nvSpPr>
+        <p:spPr>
+          <a:xfrm>
+            <a:off x="6263640" y="2697480"/>
+            <a:ext cx="320040" cy="822960"/>
+          </a:xfrm>
+          <a:prstGeom prst="rect">
+            <a:avLst/>
+          </a:prstGeom>
+          <a:noFill/>
+          <a:ln/>
+        </p:spPr>
+        <p:txBody>
+          <a:bodyPr wrap="square" lIns="0" tIns="0" rIns="0" bIns="0" rtlCol="0" anchor="ctr"/>
+          <a:lstStyle/>
+          <a:p>
+            <a:pPr indent="0" marL="0">
+              <a:buNone/>
+            </a:pPr>
+            <a:r>
+              <a:rPr lang="en-US" sz="1800" b="1" dirty="0">
+                <a:solidFill>
+                  <a:srgbClr val="C97F1E"/>
+                </a:solidFill>
+                <a:latin typeface="Leelawadee UI" pitchFamily="34" charset="0"/>
+                <a:ea typeface="Leelawadee UI" pitchFamily="34" charset="-122"/>
+                <a:cs typeface="Leelawadee UI" pitchFamily="34" charset="-120"/>
+              </a:rPr>
+              <a:t>–</a:t>
+            </a:r>
+            <a:endParaRPr lang="en-US" sz="1800" dirty="0"/>
+          </a:p>
+        </p:txBody>
+      </p:sp>
+      <p:sp>
+        <p:nvSpPr>
+          <p:cNvPr id="17" name="Text 15"/>
+          <p:cNvSpPr txBox="1"/>
+          <p:nvPr/>
+        </p:nvSpPr>
+        <p:spPr>
+          <a:xfrm>
+            <a:off x="6629400" y="2697480"/>
+            <a:ext cx="4160520" cy="822960"/>
+          </a:xfrm>
+          <a:prstGeom prst="rect">
+            <a:avLst/>
+          </a:prstGeom>
+          <a:noFill/>
+          <a:ln/>
+        </p:spPr>
+        <p:txBody>
+          <a:bodyPr wrap="square" lIns="0" tIns="0" rIns="0" bIns="0" rtlCol="0" anchor="ctr"/>
           <a:lstStyle/>
           <a:p>
             <a:pPr indent="0" marL="0">
@@ -3876,7 +3845,7 @@
               <a:buNone/>
             </a:pPr>
             <a:r>
-              <a:rPr lang="en-US" sz="1100" dirty="0">
+              <a:rPr lang="en-US" sz="1350" dirty="0">
                 <a:solidFill>
                   <a:srgbClr val="55685D"/>
                 </a:solidFill>
@@ -3884,121 +3853,9 @@
                 <a:ea typeface="Leelawadee UI" pitchFamily="34" charset="-122"/>
                 <a:cs typeface="Leelawadee UI" pitchFamily="34" charset="-120"/>
               </a:rPr>
-              <a:t>งานที่ทำซ้ำบ่อย เขียนเป็นไฟล์ขั้นตอนแยกไว้ต่างหาก — เหมือน SOP ให้พนักงานใหม่ แทนสอนปากเปล่าทุกครั้ง</a:t>
-            </a:r>
-            <a:endParaRPr lang="en-US" sz="1100" dirty="0"/>
-          </a:p>
-        </p:txBody>
-      </p:sp>
-      <p:sp>
-        <p:nvSpPr>
-          <p:cNvPr id="15" name="Shape 13"/>
-          <p:cNvSpPr/>
-          <p:nvPr/>
-        </p:nvSpPr>
-        <p:spPr>
-          <a:xfrm>
-            <a:off x="8046720" y="2057400"/>
-            <a:ext cx="3520440" cy="2926080"/>
-          </a:xfrm>
-          <a:prstGeom prst="roundRect">
-            <a:avLst>
-              <a:gd name="adj" fmla="val 3750"/>
-            </a:avLst>
-          </a:prstGeom>
-          <a:solidFill>
-            <a:srgbClr val="FFFFFF"/>
-          </a:solidFill>
-          <a:ln w="12700">
-            <a:solidFill>
-              <a:srgbClr val="D9DECB"/>
-            </a:solidFill>
-            <a:prstDash val="solid"/>
-          </a:ln>
-          <a:effectLst>
-            <a:outerShdw sx="100000" sy="100000" kx="0" ky="0" algn="bl" rotWithShape="0" blurRad="76200" dist="25400" dir="5400000">
-              <a:srgbClr val="1E2E28">
-                <a:alpha val="12000"/>
-              </a:srgbClr>
-            </a:outerShdw>
-          </a:effectLst>
-        </p:spPr>
-      </p:sp>
-      <p:sp>
-        <p:nvSpPr>
-          <p:cNvPr id="16" name="Text 14"/>
-          <p:cNvSpPr txBox="1"/>
-          <p:nvPr/>
-        </p:nvSpPr>
-        <p:spPr>
-          <a:xfrm>
-            <a:off x="8247888" y="2221992"/>
-            <a:ext cx="548640" cy="457200"/>
-          </a:xfrm>
-          <a:prstGeom prst="rect">
-            <a:avLst/>
-          </a:prstGeom>
-          <a:noFill/>
-          <a:ln/>
-        </p:spPr>
-        <p:txBody>
-          <a:bodyPr wrap="square" lIns="0" tIns="0" rIns="0" bIns="0" rtlCol="0" anchor="ctr"/>
-          <a:lstStyle/>
-          <a:p>
-            <a:pPr indent="0" marL="0">
-              <a:buNone/>
-            </a:pPr>
-            <a:r>
-              <a:rPr lang="en-US" sz="2400" dirty="0">
-                <a:solidFill>
-                  <a:srgbClr val="000000"/>
-                </a:solidFill>
-                <a:latin typeface="Leelawadee UI" pitchFamily="34" charset="0"/>
-                <a:ea typeface="Leelawadee UI" pitchFamily="34" charset="-122"/>
-                <a:cs typeface="Leelawadee UI" pitchFamily="34" charset="-120"/>
-              </a:rPr>
-              <a:t>🧩</a:t>
-            </a:r>
-            <a:endParaRPr lang="en-US" sz="2400" dirty="0"/>
-          </a:p>
-        </p:txBody>
-      </p:sp>
-      <p:sp>
-        <p:nvSpPr>
-          <p:cNvPr id="17" name="Text 15"/>
-          <p:cNvSpPr txBox="1"/>
-          <p:nvPr/>
-        </p:nvSpPr>
-        <p:spPr>
-          <a:xfrm>
-            <a:off x="8247888" y="2624328"/>
-            <a:ext cx="3118104" cy="457200"/>
-          </a:xfrm>
-          <a:prstGeom prst="rect">
-            <a:avLst/>
-          </a:prstGeom>
-          <a:noFill/>
-          <a:ln/>
-        </p:spPr>
-        <p:txBody>
-          <a:bodyPr wrap="square" lIns="0" tIns="0" rIns="0" bIns="0" rtlCol="0" anchor="t"/>
-          <a:lstStyle/>
-          <a:p>
-            <a:pPr indent="0" marL="0">
-              <a:buNone/>
-            </a:pPr>
-            <a:r>
-              <a:rPr lang="en-US" sz="1450" b="1" dirty="0">
-                <a:solidFill>
-                  <a:srgbClr val="1E2E28"/>
-                </a:solidFill>
-                <a:latin typeface="Leelawadee UI" pitchFamily="34" charset="0"/>
-                <a:ea typeface="Leelawadee UI" pitchFamily="34" charset="-122"/>
-                <a:cs typeface="Leelawadee UI" pitchFamily="34" charset="-120"/>
-              </a:rPr>
-              <a:t>Harness</a:t>
-            </a:r>
-            <a:endParaRPr lang="en-US" sz="1450" dirty="0"/>
+              <a:t>ยังพลาดได้ (hallucinate) — ต้องมีคนตรวจทานเสมอ</a:t>
+            </a:r>
+            <a:endParaRPr lang="en-US" sz="1350" dirty="0"/>
           </a:p>
         </p:txBody>
       </p:sp>
@@ -4010,17 +3867,56 @@
         </p:nvSpPr>
         <p:spPr>
           <a:xfrm>
-            <a:off x="8247888" y="3044952"/>
-            <a:ext cx="3118104" cy="1773936"/>
-          </a:xfrm>
-          <a:prstGeom prst="rect">
-            <a:avLst/>
-          </a:prstGeom>
-          <a:noFill/>
-          <a:ln/>
-        </p:spPr>
-        <p:txBody>
-          <a:bodyPr wrap="square" lIns="0" tIns="0" rIns="0" bIns="0" rtlCol="0" anchor="t"/>
+            <a:off x="6263640" y="3657600"/>
+            <a:ext cx="320040" cy="822960"/>
+          </a:xfrm>
+          <a:prstGeom prst="rect">
+            <a:avLst/>
+          </a:prstGeom>
+          <a:noFill/>
+          <a:ln/>
+        </p:spPr>
+        <p:txBody>
+          <a:bodyPr wrap="square" lIns="0" tIns="0" rIns="0" bIns="0" rtlCol="0" anchor="ctr"/>
+          <a:lstStyle/>
+          <a:p>
+            <a:pPr indent="0" marL="0">
+              <a:buNone/>
+            </a:pPr>
+            <a:r>
+              <a:rPr lang="en-US" sz="1800" b="1" dirty="0">
+                <a:solidFill>
+                  <a:srgbClr val="C97F1E"/>
+                </a:solidFill>
+                <a:latin typeface="Leelawadee UI" pitchFamily="34" charset="0"/>
+                <a:ea typeface="Leelawadee UI" pitchFamily="34" charset="-122"/>
+                <a:cs typeface="Leelawadee UI" pitchFamily="34" charset="-120"/>
+              </a:rPr>
+              <a:t>–</a:t>
+            </a:r>
+            <a:endParaRPr lang="en-US" sz="1800" dirty="0"/>
+          </a:p>
+        </p:txBody>
+      </p:sp>
+      <p:sp>
+        <p:nvSpPr>
+          <p:cNvPr id="19" name="Text 17"/>
+          <p:cNvSpPr txBox="1"/>
+          <p:nvPr/>
+        </p:nvSpPr>
+        <p:spPr>
+          <a:xfrm>
+            <a:off x="6629400" y="3657600"/>
+            <a:ext cx="4160520" cy="822960"/>
+          </a:xfrm>
+          <a:prstGeom prst="rect">
+            <a:avLst/>
+          </a:prstGeom>
+          <a:noFill/>
+          <a:ln/>
+        </p:spPr>
+        <p:txBody>
+          <a:bodyPr wrap="square" lIns="0" tIns="0" rIns="0" bIns="0" rtlCol="0" anchor="ctr"/>
           <a:lstStyle/>
           <a:p>
             <a:pPr indent="0" marL="0">
@@ -4030,7 +3926,7 @@
               <a:buNone/>
             </a:pPr>
             <a:r>
-              <a:rPr lang="en-US" sz="1100" dirty="0">
+              <a:rPr lang="en-US" sz="1350" dirty="0">
                 <a:solidFill>
                   <a:srgbClr val="55685D"/>
                 </a:solidFill>
@@ -4038,15 +3934,96 @@
                 <a:ea typeface="Leelawadee UI" pitchFamily="34" charset="-122"/>
                 <a:cs typeface="Leelawadee UI" pitchFamily="34" charset="-120"/>
               </a:rPr>
-              <a:t>แอปที่ห่อโมเดล AI แล้วให้เครื่องมือมัน (แตะไฟล์ ท่องเว็บ) — Chat เปล่าไม่มี harness, Codex/Work มี</a:t>
-            </a:r>
-            <a:endParaRPr lang="en-US" sz="1100" dirty="0"/>
-          </a:p>
-        </p:txBody>
-      </p:sp>
-      <p:sp>
-        <p:nvSpPr>
-          <p:cNvPr id="19" name="Text 17"/>
+              <a:t>สั่งงานคลุมเครือ = ได้ผลลัพธ์คลุมเครือ</a:t>
+            </a:r>
+            <a:endParaRPr lang="en-US" sz="1350" dirty="0"/>
+          </a:p>
+        </p:txBody>
+      </p:sp>
+      <p:sp>
+        <p:nvSpPr>
+          <p:cNvPr id="20" name="Text 18"/>
+          <p:cNvSpPr txBox="1"/>
+          <p:nvPr/>
+        </p:nvSpPr>
+        <p:spPr>
+          <a:xfrm>
+            <a:off x="6263640" y="4617720"/>
+            <a:ext cx="320040" cy="822960"/>
+          </a:xfrm>
+          <a:prstGeom prst="rect">
+            <a:avLst/>
+          </a:prstGeom>
+          <a:noFill/>
+          <a:ln/>
+        </p:spPr>
+        <p:txBody>
+          <a:bodyPr wrap="square" lIns="0" tIns="0" rIns="0" bIns="0" rtlCol="0" anchor="ctr"/>
+          <a:lstStyle/>
+          <a:p>
+            <a:pPr indent="0" marL="0">
+              <a:buNone/>
+            </a:pPr>
+            <a:r>
+              <a:rPr lang="en-US" sz="1800" b="1" dirty="0">
+                <a:solidFill>
+                  <a:srgbClr val="C97F1E"/>
+                </a:solidFill>
+                <a:latin typeface="Leelawadee UI" pitchFamily="34" charset="0"/>
+                <a:ea typeface="Leelawadee UI" pitchFamily="34" charset="-122"/>
+                <a:cs typeface="Leelawadee UI" pitchFamily="34" charset="-120"/>
+              </a:rPr>
+              <a:t>–</a:t>
+            </a:r>
+            <a:endParaRPr lang="en-US" sz="1800" dirty="0"/>
+          </a:p>
+        </p:txBody>
+      </p:sp>
+      <p:sp>
+        <p:nvSpPr>
+          <p:cNvPr id="21" name="Text 19"/>
+          <p:cNvSpPr txBox="1"/>
+          <p:nvPr/>
+        </p:nvSpPr>
+        <p:spPr>
+          <a:xfrm>
+            <a:off x="6629400" y="4617720"/>
+            <a:ext cx="4160520" cy="822960"/>
+          </a:xfrm>
+          <a:prstGeom prst="rect">
+            <a:avLst/>
+          </a:prstGeom>
+          <a:noFill/>
+          <a:ln/>
+        </p:spPr>
+        <p:txBody>
+          <a:bodyPr wrap="square" lIns="0" tIns="0" rIns="0" bIns="0" rtlCol="0" anchor="ctr"/>
+          <a:lstStyle/>
+          <a:p>
+            <a:pPr indent="0" marL="0">
+              <a:lnSpc>
+                <a:spcPct val="115000"/>
+              </a:lnSpc>
+              <a:buNone/>
+            </a:pPr>
+            <a:r>
+              <a:rPr lang="en-US" sz="1350" dirty="0">
+                <a:solidFill>
+                  <a:srgbClr val="55685D"/>
+                </a:solidFill>
+                <a:latin typeface="Leelawadee UI" pitchFamily="34" charset="0"/>
+                <a:ea typeface="Leelawadee UI" pitchFamily="34" charset="-122"/>
+                <a:cs typeface="Leelawadee UI" pitchFamily="34" charset="-120"/>
+              </a:rPr>
+              <a:t>ให้สิทธิ์เข้าถึงเกินจำเป็น = เสี่ยงด้านความปลอดภัย</a:t>
+            </a:r>
+            <a:endParaRPr lang="en-US" sz="1350" dirty="0"/>
+          </a:p>
+        </p:txBody>
+      </p:sp>
+      <p:sp>
+        <p:nvSpPr>
+          <p:cNvPr id="22" name="Text 20"/>
           <p:cNvSpPr txBox="1"/>
           <p:nvPr/>
         </p:nvSpPr>
@@ -4132,7 +4109,7 @@
             </a:avLst>
           </a:prstGeom>
           <a:solidFill>
-            <a:srgbClr val="14201B"/>
+            <a:srgbClr val="D7E6DE"/>
           </a:solidFill>
           <a:ln/>
         </p:spPr>
@@ -4164,13 +4141,13 @@
             <a:r>
               <a:rPr lang="en-US" sz="1200" b="1" dirty="0">
                 <a:solidFill>
-                  <a:srgbClr val="F0AC4C"/>
-                </a:solidFill>
-                <a:latin typeface="Leelawadee UI" pitchFamily="34" charset="0"/>
-                <a:ea typeface="Leelawadee UI" pitchFamily="34" charset="-122"/>
-                <a:cs typeface="Leelawadee UI" pitchFamily="34" charset="-120"/>
-              </a:rPr>
-              <a:t>มืออาชีพ</a:t>
+                  <a:srgbClr val="2F5548"/>
+                </a:solidFill>
+                <a:latin typeface="Leelawadee UI" pitchFamily="34" charset="0"/>
+                <a:ea typeface="Leelawadee UI" pitchFamily="34" charset="-122"/>
+                <a:cs typeface="Leelawadee UI" pitchFamily="34" charset="-120"/>
+              </a:rPr>
+              <a:t>ระดับกลาง</a:t>
             </a:r>
             <a:endParaRPr lang="en-US" sz="1200" dirty="0"/>
           </a:p>
@@ -4203,13 +4180,13 @@
             <a:r>
               <a:rPr lang="en-US" sz="1300" b="1" spc="200" kern="0" dirty="0">
                 <a:solidFill>
-                  <a:srgbClr val="1E2E28"/>
-                </a:solidFill>
-                <a:latin typeface="Leelawadee UI" pitchFamily="34" charset="0"/>
-                <a:ea typeface="Leelawadee UI" pitchFamily="34" charset="-122"/>
-                <a:cs typeface="Leelawadee UI" pitchFamily="34" charset="-120"/>
-              </a:rPr>
-              <a:t>ใช้ Codex เป็นทีม</a:t>
+                  <a:srgbClr val="2F5548"/>
+                </a:solidFill>
+                <a:latin typeface="Leelawadee UI" pitchFamily="34" charset="0"/>
+                <a:ea typeface="Leelawadee UI" pitchFamily="34" charset="-122"/>
+                <a:cs typeface="Leelawadee UI" pitchFamily="34" charset="-120"/>
+              </a:rPr>
+              <a:t>ให้ Codex จำงานได้</a:t>
             </a:r>
             <a:endParaRPr lang="en-US" sz="1300" dirty="0"/>
           </a:p>
@@ -4240,7 +4217,7 @@
               <a:buNone/>
             </a:pPr>
             <a:r>
-              <a:rPr lang="en-US" sz="2500" b="1" dirty="0">
+              <a:rPr lang="en-US" sz="2700" b="1" dirty="0">
                 <a:solidFill>
                   <a:srgbClr val="1E2E28"/>
                 </a:solidFill>
@@ -4248,26 +4225,65 @@
                 <a:ea typeface="Leelawadee UI" pitchFamily="34" charset="-122"/>
                 <a:cs typeface="Leelawadee UI" pitchFamily="34" charset="-120"/>
               </a:rPr>
-              <a:t>4 แนวคิด: จากผู้ช่วยเดี่ยว สู่หัวหน้าทีม</a:t>
-            </a:r>
-            <a:endParaRPr lang="en-US" sz="2500" dirty="0"/>
-          </a:p>
-        </p:txBody>
-      </p:sp>
-      <p:sp>
-        <p:nvSpPr>
-          <p:cNvPr id="6" name="Shape 4"/>
+              <a:t>3 แนวคิด: Memory · Skill · Harness</a:t>
+            </a:r>
+            <a:endParaRPr lang="en-US" sz="2700" dirty="0"/>
+          </a:p>
+        </p:txBody>
+      </p:sp>
+      <p:sp>
+        <p:nvSpPr>
+          <p:cNvPr id="6" name="Text 4"/>
+          <p:cNvSpPr txBox="1"/>
+          <p:nvPr/>
+        </p:nvSpPr>
+        <p:spPr>
+          <a:xfrm>
+            <a:off x="548640" y="1508760"/>
+            <a:ext cx="10881360" cy="365760"/>
+          </a:xfrm>
+          <a:prstGeom prst="rect">
+            <a:avLst/>
+          </a:prstGeom>
+          <a:noFill/>
+          <a:ln/>
+        </p:spPr>
+        <p:txBody>
+          <a:bodyPr wrap="square" lIns="0" tIns="0" rIns="0" bIns="0" rtlCol="0" anchor="ctr"/>
+          <a:lstStyle/>
+          <a:p>
+            <a:pPr indent="0" marL="0">
+              <a:buNone/>
+            </a:pPr>
+            <a:r>
+              <a:rPr lang="en-US" sz="1200" i="1" dirty="0">
+                <a:solidFill>
+                  <a:srgbClr val="8A9A8F"/>
+                </a:solidFill>
+                <a:latin typeface="Leelawadee UI" pitchFamily="34" charset="0"/>
+                <a:ea typeface="Leelawadee UI" pitchFamily="34" charset="-122"/>
+                <a:cs typeface="Leelawadee UI" pitchFamily="34" charset="-120"/>
+              </a:rPr>
+              <a:t>หมายเหตุ: ไม่ใช่ปุ่มในแอป Codex — เป็นวิธีทำงานที่ตั้งเอง ใช้ได้กับ AI agent ตัวไหนก็ได้</a:t>
+            </a:r>
+            <a:endParaRPr lang="en-US" sz="1200" dirty="0"/>
+          </a:p>
+        </p:txBody>
+      </p:sp>
+      <p:sp>
+        <p:nvSpPr>
+          <p:cNvPr id="7" name="Shape 5"/>
           <p:cNvSpPr/>
           <p:nvPr/>
         </p:nvSpPr>
         <p:spPr>
           <a:xfrm>
-            <a:off x="548640" y="1874520"/>
-            <a:ext cx="5257800" cy="1874520"/>
+            <a:off x="548640" y="2057400"/>
+            <a:ext cx="3520440" cy="2926080"/>
           </a:xfrm>
           <a:prstGeom prst="roundRect">
             <a:avLst>
-              <a:gd name="adj" fmla="val 5854"/>
+              <a:gd name="adj" fmla="val 3750"/>
             </a:avLst>
           </a:prstGeom>
           <a:solidFill>
@@ -4290,13 +4306,13 @@
       </p:sp>
       <p:sp>
         <p:nvSpPr>
-          <p:cNvPr id="7" name="Text 5"/>
-          <p:cNvSpPr txBox="1"/>
-          <p:nvPr/>
-        </p:nvSpPr>
-        <p:spPr>
-          <a:xfrm>
-            <a:off x="749808" y="2039112"/>
+          <p:cNvPr id="8" name="Text 6"/>
+          <p:cNvSpPr txBox="1"/>
+          <p:nvPr/>
+        </p:nvSpPr>
+        <p:spPr>
+          <a:xfrm>
+            <a:off x="749808" y="2221992"/>
             <a:ext cx="548640" cy="457200"/>
           </a:xfrm>
           <a:prstGeom prst="rect">
@@ -4321,7 +4337,7 @@
                 <a:ea typeface="Leelawadee UI" pitchFamily="34" charset="-122"/>
                 <a:cs typeface="Leelawadee UI" pitchFamily="34" charset="-120"/>
               </a:rPr>
-              <a:t>👥</a:t>
+              <a:t>📝</a:t>
             </a:r>
             <a:endParaRPr lang="en-US" sz="2400" dirty="0"/>
           </a:p>
@@ -4329,14 +4345,14 @@
       </p:sp>
       <p:sp>
         <p:nvSpPr>
-          <p:cNvPr id="8" name="Text 6"/>
-          <p:cNvSpPr txBox="1"/>
-          <p:nvPr/>
-        </p:nvSpPr>
-        <p:spPr>
-          <a:xfrm>
-            <a:off x="749808" y="2441448"/>
-            <a:ext cx="4855464" cy="457200"/>
+          <p:cNvPr id="9" name="Text 7"/>
+          <p:cNvSpPr txBox="1"/>
+          <p:nvPr/>
+        </p:nvSpPr>
+        <p:spPr>
+          <a:xfrm>
+            <a:off x="749808" y="2624328"/>
+            <a:ext cx="3118104" cy="457200"/>
           </a:xfrm>
           <a:prstGeom prst="rect">
             <a:avLst/>
@@ -4360,7 +4376,7 @@
                 <a:ea typeface="Leelawadee UI" pitchFamily="34" charset="-122"/>
                 <a:cs typeface="Leelawadee UI" pitchFamily="34" charset="-120"/>
               </a:rPr>
-              <a:t>แบ่งบทบาทเฉพาะทาง</a:t>
+              <a:t>MEMORY.md</a:t>
             </a:r>
             <a:endParaRPr lang="en-US" sz="1450" dirty="0"/>
           </a:p>
@@ -4368,14 +4384,14 @@
       </p:sp>
       <p:sp>
         <p:nvSpPr>
-          <p:cNvPr id="9" name="Text 7"/>
-          <p:cNvSpPr txBox="1"/>
-          <p:nvPr/>
-        </p:nvSpPr>
-        <p:spPr>
-          <a:xfrm>
-            <a:off x="749808" y="2862072"/>
-            <a:ext cx="4855464" cy="722376"/>
+          <p:cNvPr id="10" name="Text 8"/>
+          <p:cNvSpPr txBox="1"/>
+          <p:nvPr/>
+        </p:nvSpPr>
+        <p:spPr>
+          <a:xfrm>
+            <a:off x="749808" y="3044952"/>
+            <a:ext cx="3118104" cy="1773936"/>
           </a:xfrm>
           <a:prstGeom prst="rect">
             <a:avLst/>
@@ -4402,7 +4418,7 @@
                 <a:ea typeface="Leelawadee UI" pitchFamily="34" charset="-122"/>
                 <a:cs typeface="Leelawadee UI" pitchFamily="34" charset="-120"/>
               </a:rPr>
-              <a:t>แยกเป็น "ตัวค้นข้อมูล" "ตัวเขียนร่าง" "ตัวตรวจทาน" — คุณมอบงานและอนุมัติ ไม่ใช่ลงมือทำเอง</a:t>
+              <a:t>ไฟล์ความจำ ให้ Codex อ่านก่อนเริ่มงาน + จดสิ่งที่ตัดสินใจไว้ท้ายไฟล์เมื่อทำเสร็จ — เซสชันหน้าไม่ต้องอธิบายซ้ำ</a:t>
             </a:r>
             <a:endParaRPr lang="en-US" sz="1100" dirty="0"/>
           </a:p>
@@ -4410,18 +4426,18 @@
       </p:sp>
       <p:sp>
         <p:nvSpPr>
-          <p:cNvPr id="10" name="Shape 8"/>
+          <p:cNvPr id="11" name="Shape 9"/>
           <p:cNvSpPr/>
           <p:nvPr/>
         </p:nvSpPr>
         <p:spPr>
           <a:xfrm>
-            <a:off x="6172200" y="1874520"/>
-            <a:ext cx="5257800" cy="1874520"/>
+            <a:off x="4297680" y="2057400"/>
+            <a:ext cx="3520440" cy="2926080"/>
           </a:xfrm>
           <a:prstGeom prst="roundRect">
             <a:avLst>
-              <a:gd name="adj" fmla="val 5854"/>
+              <a:gd name="adj" fmla="val 3750"/>
             </a:avLst>
           </a:prstGeom>
           <a:solidFill>
@@ -4444,13 +4460,13 @@
       </p:sp>
       <p:sp>
         <p:nvSpPr>
-          <p:cNvPr id="11" name="Text 9"/>
-          <p:cNvSpPr txBox="1"/>
-          <p:nvPr/>
-        </p:nvSpPr>
-        <p:spPr>
-          <a:xfrm>
-            <a:off x="6373368" y="2039112"/>
+          <p:cNvPr id="12" name="Text 10"/>
+          <p:cNvSpPr txBox="1"/>
+          <p:nvPr/>
+        </p:nvSpPr>
+        <p:spPr>
+          <a:xfrm>
+            <a:off x="4498848" y="2221992"/>
             <a:ext cx="548640" cy="457200"/>
           </a:xfrm>
           <a:prstGeom prst="rect">
@@ -4475,7 +4491,7 @@
                 <a:ea typeface="Leelawadee UI" pitchFamily="34" charset="-122"/>
                 <a:cs typeface="Leelawadee UI" pitchFamily="34" charset="-120"/>
               </a:rPr>
-              <a:t>🔗</a:t>
+              <a:t>📋</a:t>
             </a:r>
             <a:endParaRPr lang="en-US" sz="2400" dirty="0"/>
           </a:p>
@@ -4483,14 +4499,14 @@
       </p:sp>
       <p:sp>
         <p:nvSpPr>
-          <p:cNvPr id="12" name="Text 10"/>
-          <p:cNvSpPr txBox="1"/>
-          <p:nvPr/>
-        </p:nvSpPr>
-        <p:spPr>
-          <a:xfrm>
-            <a:off x="6373368" y="2441448"/>
-            <a:ext cx="4855464" cy="457200"/>
+          <p:cNvPr id="13" name="Text 11"/>
+          <p:cNvSpPr txBox="1"/>
+          <p:nvPr/>
+        </p:nvSpPr>
+        <p:spPr>
+          <a:xfrm>
+            <a:off x="4498848" y="2624328"/>
+            <a:ext cx="3118104" cy="457200"/>
           </a:xfrm>
           <a:prstGeom prst="rect">
             <a:avLst/>
@@ -4514,7 +4530,7 @@
                 <a:ea typeface="Leelawadee UI" pitchFamily="34" charset="-122"/>
                 <a:cs typeface="Leelawadee UI" pitchFamily="34" charset="-120"/>
               </a:rPr>
-              <a:t>ต่อกันเป็นสายงาน (pipeline)</a:t>
+              <a:t>SKILL.md</a:t>
             </a:r>
             <a:endParaRPr lang="en-US" sz="1450" dirty="0"/>
           </a:p>
@@ -4522,14 +4538,14 @@
       </p:sp>
       <p:sp>
         <p:nvSpPr>
-          <p:cNvPr id="13" name="Text 11"/>
-          <p:cNvSpPr txBox="1"/>
-          <p:nvPr/>
-        </p:nvSpPr>
-        <p:spPr>
-          <a:xfrm>
-            <a:off x="6373368" y="2862072"/>
-            <a:ext cx="4855464" cy="722376"/>
+          <p:cNvPr id="14" name="Text 12"/>
+          <p:cNvSpPr txBox="1"/>
+          <p:nvPr/>
+        </p:nvSpPr>
+        <p:spPr>
+          <a:xfrm>
+            <a:off x="4498848" y="3044952"/>
+            <a:ext cx="3118104" cy="1773936"/>
           </a:xfrm>
           <a:prstGeom prst="rect">
             <a:avLst/>
@@ -4556,7 +4572,7 @@
                 <a:ea typeface="Leelawadee UI" pitchFamily="34" charset="-122"/>
                 <a:cs typeface="Leelawadee UI" pitchFamily="34" charset="-120"/>
               </a:rPr>
-              <a:t>ผลลัพธ์ตัวหนึ่งส่งต่อเป็นข้อมูลตั้งต้นให้อีกตัว ทุกจุดต่อคือที่ที่คุณเข้าไปตรวจได้ก่อนส่งต่อ</a:t>
+              <a:t>งานที่ทำซ้ำบ่อย เขียนเป็นไฟล์ขั้นตอนแยกไว้ต่างหาก — เหมือน SOP ให้พนักงานใหม่ แทนสอนปากเปล่าทุกครั้ง</a:t>
             </a:r>
             <a:endParaRPr lang="en-US" sz="1100" dirty="0"/>
           </a:p>
@@ -4564,18 +4580,18 @@
       </p:sp>
       <p:sp>
         <p:nvSpPr>
-          <p:cNvPr id="14" name="Shape 12"/>
+          <p:cNvPr id="15" name="Shape 13"/>
           <p:cNvSpPr/>
           <p:nvPr/>
         </p:nvSpPr>
         <p:spPr>
           <a:xfrm>
-            <a:off x="548640" y="4023360"/>
-            <a:ext cx="5257800" cy="1874520"/>
+            <a:off x="8046720" y="2057400"/>
+            <a:ext cx="3520440" cy="2926080"/>
           </a:xfrm>
           <a:prstGeom prst="roundRect">
             <a:avLst>
-              <a:gd name="adj" fmla="val 5854"/>
+              <a:gd name="adj" fmla="val 3750"/>
             </a:avLst>
           </a:prstGeom>
           <a:solidFill>
@@ -4598,13 +4614,13 @@
       </p:sp>
       <p:sp>
         <p:nvSpPr>
-          <p:cNvPr id="15" name="Text 13"/>
-          <p:cNvSpPr txBox="1"/>
-          <p:nvPr/>
-        </p:nvSpPr>
-        <p:spPr>
-          <a:xfrm>
-            <a:off x="749808" y="4187952"/>
+          <p:cNvPr id="16" name="Text 14"/>
+          <p:cNvSpPr txBox="1"/>
+          <p:nvPr/>
+        </p:nvSpPr>
+        <p:spPr>
+          <a:xfrm>
+            <a:off x="8247888" y="2221992"/>
             <a:ext cx="548640" cy="457200"/>
           </a:xfrm>
           <a:prstGeom prst="rect">
@@ -4629,7 +4645,7 @@
                 <a:ea typeface="Leelawadee UI" pitchFamily="34" charset="-122"/>
                 <a:cs typeface="Leelawadee UI" pitchFamily="34" charset="-120"/>
               </a:rPr>
-              <a:t>🔄</a:t>
+              <a:t>🧩</a:t>
             </a:r>
             <a:endParaRPr lang="en-US" sz="2400" dirty="0"/>
           </a:p>
@@ -4637,14 +4653,14 @@
       </p:sp>
       <p:sp>
         <p:nvSpPr>
-          <p:cNvPr id="16" name="Text 14"/>
-          <p:cNvSpPr txBox="1"/>
-          <p:nvPr/>
-        </p:nvSpPr>
-        <p:spPr>
-          <a:xfrm>
-            <a:off x="749808" y="4590288"/>
-            <a:ext cx="4855464" cy="457200"/>
+          <p:cNvPr id="17" name="Text 15"/>
+          <p:cNvSpPr txBox="1"/>
+          <p:nvPr/>
+        </p:nvSpPr>
+        <p:spPr>
+          <a:xfrm>
+            <a:off x="8247888" y="2624328"/>
+            <a:ext cx="3118104" cy="457200"/>
           </a:xfrm>
           <a:prstGeom prst="rect">
             <a:avLst/>
@@ -4668,7 +4684,7 @@
                 <a:ea typeface="Leelawadee UI" pitchFamily="34" charset="-122"/>
                 <a:cs typeface="Leelawadee UI" pitchFamily="34" charset="-120"/>
               </a:rPr>
-              <a:t>ปล่อยลองซ้ำได้ แต่ต้องมีเพดาน</a:t>
+              <a:t>Harness</a:t>
             </a:r>
             <a:endParaRPr lang="en-US" sz="1450" dirty="0"/>
           </a:p>
@@ -4676,14 +4692,14 @@
       </p:sp>
       <p:sp>
         <p:nvSpPr>
-          <p:cNvPr id="17" name="Text 15"/>
-          <p:cNvSpPr txBox="1"/>
-          <p:nvPr/>
-        </p:nvSpPr>
-        <p:spPr>
-          <a:xfrm>
-            <a:off x="749808" y="5010912"/>
-            <a:ext cx="4855464" cy="722376"/>
+          <p:cNvPr id="18" name="Text 16"/>
+          <p:cNvSpPr txBox="1"/>
+          <p:nvPr/>
+        </p:nvSpPr>
+        <p:spPr>
+          <a:xfrm>
+            <a:off x="8247888" y="3044952"/>
+            <a:ext cx="3118104" cy="1773936"/>
           </a:xfrm>
           <a:prstGeom prst="rect">
             <a:avLst/>
@@ -4710,7 +4726,7 @@
                 <a:ea typeface="Leelawadee UI" pitchFamily="34" charset="-122"/>
                 <a:cs typeface="Leelawadee UI" pitchFamily="34" charset="-120"/>
               </a:rPr>
-              <a:t>ให้แก้งานซ้ำเองได้ แต่จำกัดจำนวนรอบเสมอ — ห้ามปล่อยเป็นลูปไม่มีที่สิ้นสุด</a:t>
+              <a:t>แอปที่ห่อโมเดล AI แล้วให้เครื่องมือมัน (แตะไฟล์ ท่องเว็บ) — Chat เปล่าไม่มี harness, Codex/Work มี</a:t>
             </a:r>
             <a:endParaRPr lang="en-US" sz="1100" dirty="0"/>
           </a:p>
@@ -4718,13 +4734,223 @@
       </p:sp>
       <p:sp>
         <p:nvSpPr>
-          <p:cNvPr id="18" name="Shape 16"/>
+          <p:cNvPr id="19" name="Text 17"/>
+          <p:cNvSpPr txBox="1"/>
+          <p:nvPr/>
+        </p:nvSpPr>
+        <p:spPr>
+          <a:xfrm>
+            <a:off x="11368735" y="6355080"/>
+            <a:ext cx="548640" cy="320040"/>
+          </a:xfrm>
+          <a:prstGeom prst="rect">
+            <a:avLst/>
+          </a:prstGeom>
+          <a:noFill/>
+          <a:ln/>
+        </p:spPr>
+        <p:txBody>
+          <a:bodyPr wrap="square" lIns="0" tIns="0" rIns="0" bIns="0" rtlCol="0" anchor="ctr"/>
+          <a:lstStyle/>
+          <a:p>
+            <a:pPr algn="r" indent="0" marL="0">
+              <a:buNone/>
+            </a:pPr>
+            <a:r>
+              <a:rPr lang="en-US" sz="1100" dirty="0">
+                <a:solidFill>
+                  <a:srgbClr val="8A9A8F"/>
+                </a:solidFill>
+                <a:latin typeface="Leelawadee UI" pitchFamily="34" charset="0"/>
+                <a:ea typeface="Leelawadee UI" pitchFamily="34" charset="-122"/>
+                <a:cs typeface="Leelawadee UI" pitchFamily="34" charset="-120"/>
+              </a:rPr>
+              <a:t>12</a:t>
+            </a:r>
+            <a:endParaRPr lang="en-US" sz="1100" dirty="0"/>
+          </a:p>
+        </p:txBody>
+      </p:sp>
+    </p:spTree>
+  </p:cSld>
+  <p:clrMapOvr>
+    <a:masterClrMapping/>
+  </p:clrMapOvr>
+</p:sld>
+</file>
+
+<file path=ppt/slides/slide13.xml><?xml version="1.0" encoding="utf-8"?>
+<p:sld xmlns:a="http://schemas.openxmlformats.org/drawingml/2006/main" xmlns:r="http://schemas.openxmlformats.org/officeDocument/2006/relationships" xmlns:p="http://schemas.openxmlformats.org/presentationml/2006/main">
+  <p:cSld name="Slide 13">
+    <p:bg>
+      <p:bgPr>
+        <a:solidFill>
+          <a:srgbClr val="F1F3EC"/>
+        </a:solidFill>
+      </p:bgPr>
+    </p:bg>
+    <p:spTree>
+      <p:nvGrpSpPr>
+        <p:cNvPr id="1" name=""/>
+        <p:cNvGrpSpPr/>
+        <p:nvPr/>
+      </p:nvGrpSpPr>
+      <p:grpSpPr>
+        <a:xfrm>
+          <a:off x="0" y="0"/>
+          <a:ext cx="0" cy="0"/>
+          <a:chOff x="0" y="0"/>
+          <a:chExt cx="0" cy="0"/>
+        </a:xfrm>
+      </p:grpSpPr>
+      <p:sp>
+        <p:nvSpPr>
+          <p:cNvPr id="2" name="Shape 0"/>
           <p:cNvSpPr/>
           <p:nvPr/>
         </p:nvSpPr>
         <p:spPr>
           <a:xfrm>
-            <a:off x="6172200" y="4023360"/>
+            <a:off x="9814255" y="384048"/>
+            <a:ext cx="1828800" cy="384048"/>
+          </a:xfrm>
+          <a:prstGeom prst="roundRect">
+            <a:avLst>
+              <a:gd name="adj" fmla="val 50000"/>
+            </a:avLst>
+          </a:prstGeom>
+          <a:solidFill>
+            <a:srgbClr val="14201B"/>
+          </a:solidFill>
+          <a:ln/>
+        </p:spPr>
+      </p:sp>
+      <p:sp>
+        <p:nvSpPr>
+          <p:cNvPr id="3" name="Text 1"/>
+          <p:cNvSpPr txBox="1"/>
+          <p:nvPr/>
+        </p:nvSpPr>
+        <p:spPr>
+          <a:xfrm>
+            <a:off x="9814255" y="384048"/>
+            <a:ext cx="1828800" cy="384048"/>
+          </a:xfrm>
+          <a:prstGeom prst="rect">
+            <a:avLst/>
+          </a:prstGeom>
+          <a:noFill/>
+          <a:ln/>
+        </p:spPr>
+        <p:txBody>
+          <a:bodyPr wrap="square" lIns="0" tIns="0" rIns="0" bIns="0" rtlCol="0" anchor="ctr"/>
+          <a:lstStyle/>
+          <a:p>
+            <a:pPr algn="ctr" indent="0" marL="0">
+              <a:buNone/>
+            </a:pPr>
+            <a:r>
+              <a:rPr lang="en-US" sz="1200" b="1" dirty="0">
+                <a:solidFill>
+                  <a:srgbClr val="F0AC4C"/>
+                </a:solidFill>
+                <a:latin typeface="Leelawadee UI" pitchFamily="34" charset="0"/>
+                <a:ea typeface="Leelawadee UI" pitchFamily="34" charset="-122"/>
+                <a:cs typeface="Leelawadee UI" pitchFamily="34" charset="-120"/>
+              </a:rPr>
+              <a:t>มืออาชีพ</a:t>
+            </a:r>
+            <a:endParaRPr lang="en-US" sz="1200" dirty="0"/>
+          </a:p>
+        </p:txBody>
+      </p:sp>
+      <p:sp>
+        <p:nvSpPr>
+          <p:cNvPr id="4" name="Text 2"/>
+          <p:cNvSpPr txBox="1"/>
+          <p:nvPr/>
+        </p:nvSpPr>
+        <p:spPr>
+          <a:xfrm>
+            <a:off x="548640" y="384048"/>
+            <a:ext cx="7315200" cy="365760"/>
+          </a:xfrm>
+          <a:prstGeom prst="rect">
+            <a:avLst/>
+          </a:prstGeom>
+          <a:noFill/>
+          <a:ln/>
+        </p:spPr>
+        <p:txBody>
+          <a:bodyPr wrap="square" lIns="0" tIns="0" rIns="0" bIns="0" rtlCol="0" anchor="ctr"/>
+          <a:lstStyle/>
+          <a:p>
+            <a:pPr indent="0" marL="0">
+              <a:buNone/>
+            </a:pPr>
+            <a:r>
+              <a:rPr lang="en-US" sz="1300" b="1" spc="200" kern="0" dirty="0">
+                <a:solidFill>
+                  <a:srgbClr val="1E2E28"/>
+                </a:solidFill>
+                <a:latin typeface="Leelawadee UI" pitchFamily="34" charset="0"/>
+                <a:ea typeface="Leelawadee UI" pitchFamily="34" charset="-122"/>
+                <a:cs typeface="Leelawadee UI" pitchFamily="34" charset="-120"/>
+              </a:rPr>
+              <a:t>ใช้ Codex เป็นทีม</a:t>
+            </a:r>
+            <a:endParaRPr lang="en-US" sz="1300" dirty="0"/>
+          </a:p>
+        </p:txBody>
+      </p:sp>
+      <p:sp>
+        <p:nvSpPr>
+          <p:cNvPr id="5" name="Text 3"/>
+          <p:cNvSpPr txBox="1"/>
+          <p:nvPr/>
+        </p:nvSpPr>
+        <p:spPr>
+          <a:xfrm>
+            <a:off x="548640" y="713232"/>
+            <a:ext cx="9601200" cy="822960"/>
+          </a:xfrm>
+          <a:prstGeom prst="rect">
+            <a:avLst/>
+          </a:prstGeom>
+          <a:noFill/>
+          <a:ln/>
+        </p:spPr>
+        <p:txBody>
+          <a:bodyPr wrap="square" lIns="0" tIns="0" rIns="0" bIns="0" rtlCol="0" anchor="ctr"/>
+          <a:lstStyle/>
+          <a:p>
+            <a:pPr indent="0" marL="0">
+              <a:buNone/>
+            </a:pPr>
+            <a:r>
+              <a:rPr lang="en-US" sz="2500" b="1" dirty="0">
+                <a:solidFill>
+                  <a:srgbClr val="1E2E28"/>
+                </a:solidFill>
+                <a:latin typeface="Leelawadee UI" pitchFamily="34" charset="0"/>
+                <a:ea typeface="Leelawadee UI" pitchFamily="34" charset="-122"/>
+                <a:cs typeface="Leelawadee UI" pitchFamily="34" charset="-120"/>
+              </a:rPr>
+              <a:t>4 แนวคิด: จากผู้ช่วยเดี่ยว สู่หัวหน้าทีม</a:t>
+            </a:r>
+            <a:endParaRPr lang="en-US" sz="2500" dirty="0"/>
+          </a:p>
+        </p:txBody>
+      </p:sp>
+      <p:sp>
+        <p:nvSpPr>
+          <p:cNvPr id="6" name="Shape 4"/>
+          <p:cNvSpPr/>
+          <p:nvPr/>
+        </p:nvSpPr>
+        <p:spPr>
+          <a:xfrm>
+            <a:off x="548640" y="1874520"/>
             <a:ext cx="5257800" cy="1874520"/>
           </a:xfrm>
           <a:prstGeom prst="roundRect">
@@ -4752,13 +4978,13 @@
       </p:sp>
       <p:sp>
         <p:nvSpPr>
-          <p:cNvPr id="19" name="Text 17"/>
-          <p:cNvSpPr txBox="1"/>
-          <p:nvPr/>
-        </p:nvSpPr>
-        <p:spPr>
-          <a:xfrm>
-            <a:off x="6373368" y="4187952"/>
+          <p:cNvPr id="7" name="Text 5"/>
+          <p:cNvSpPr txBox="1"/>
+          <p:nvPr/>
+        </p:nvSpPr>
+        <p:spPr>
+          <a:xfrm>
+            <a:off x="749808" y="2039112"/>
             <a:ext cx="548640" cy="457200"/>
           </a:xfrm>
           <a:prstGeom prst="rect">
@@ -4783,7 +5009,7 @@
                 <a:ea typeface="Leelawadee UI" pitchFamily="34" charset="-122"/>
                 <a:cs typeface="Leelawadee UI" pitchFamily="34" charset="-120"/>
               </a:rPr>
-              <a:t>📌</a:t>
+              <a:t>👥</a:t>
             </a:r>
             <a:endParaRPr lang="en-US" sz="2400" dirty="0"/>
           </a:p>
@@ -4791,13 +5017,13 @@
       </p:sp>
       <p:sp>
         <p:nvSpPr>
-          <p:cNvPr id="20" name="Text 18"/>
-          <p:cNvSpPr txBox="1"/>
-          <p:nvPr/>
-        </p:nvSpPr>
-        <p:spPr>
-          <a:xfrm>
-            <a:off x="6373368" y="4590288"/>
+          <p:cNvPr id="8" name="Text 6"/>
+          <p:cNvSpPr txBox="1"/>
+          <p:nvPr/>
+        </p:nvSpPr>
+        <p:spPr>
+          <a:xfrm>
+            <a:off x="749808" y="2441448"/>
             <a:ext cx="4855464" cy="457200"/>
           </a:xfrm>
           <a:prstGeom prst="rect">
@@ -4822,7 +5048,7 @@
                 <a:ea typeface="Leelawadee UI" pitchFamily="34" charset="-122"/>
                 <a:cs typeface="Leelawadee UI" pitchFamily="34" charset="-120"/>
               </a:rPr>
-              <a:t>จบเซสชันด้วยการสรุป (wrap)</a:t>
+              <a:t>แบ่งบทบาทเฉพาะทาง</a:t>
             </a:r>
             <a:endParaRPr lang="en-US" sz="1450" dirty="0"/>
           </a:p>
@@ -4830,13 +5056,13 @@
       </p:sp>
       <p:sp>
         <p:nvSpPr>
-          <p:cNvPr id="21" name="Text 19"/>
-          <p:cNvSpPr txBox="1"/>
-          <p:nvPr/>
-        </p:nvSpPr>
-        <p:spPr>
-          <a:xfrm>
-            <a:off x="6373368" y="5010912"/>
+          <p:cNvPr id="9" name="Text 7"/>
+          <p:cNvSpPr txBox="1"/>
+          <p:nvPr/>
+        </p:nvSpPr>
+        <p:spPr>
+          <a:xfrm>
+            <a:off x="749808" y="2862072"/>
             <a:ext cx="4855464" cy="722376"/>
           </a:xfrm>
           <a:prstGeom prst="rect">
@@ -4864,6 +5090,468 @@
                 <a:ea typeface="Leelawadee UI" pitchFamily="34" charset="-122"/>
                 <a:cs typeface="Leelawadee UI" pitchFamily="34" charset="-120"/>
               </a:rPr>
+              <a:t>แยกเป็น "ตัวค้นข้อมูล" "ตัวเขียนร่าง" "ตัวตรวจทาน" — คุณมอบงานและอนุมัติ ไม่ใช่ลงมือทำเอง</a:t>
+            </a:r>
+            <a:endParaRPr lang="en-US" sz="1100" dirty="0"/>
+          </a:p>
+        </p:txBody>
+      </p:sp>
+      <p:sp>
+        <p:nvSpPr>
+          <p:cNvPr id="10" name="Shape 8"/>
+          <p:cNvSpPr/>
+          <p:nvPr/>
+        </p:nvSpPr>
+        <p:spPr>
+          <a:xfrm>
+            <a:off x="6172200" y="1874520"/>
+            <a:ext cx="5257800" cy="1874520"/>
+          </a:xfrm>
+          <a:prstGeom prst="roundRect">
+            <a:avLst>
+              <a:gd name="adj" fmla="val 5854"/>
+            </a:avLst>
+          </a:prstGeom>
+          <a:solidFill>
+            <a:srgbClr val="FFFFFF"/>
+          </a:solidFill>
+          <a:ln w="12700">
+            <a:solidFill>
+              <a:srgbClr val="D9DECB"/>
+            </a:solidFill>
+            <a:prstDash val="solid"/>
+          </a:ln>
+          <a:effectLst>
+            <a:outerShdw sx="100000" sy="100000" kx="0" ky="0" algn="bl" rotWithShape="0" blurRad="76200" dist="25400" dir="5400000">
+              <a:srgbClr val="1E2E28">
+                <a:alpha val="12000"/>
+              </a:srgbClr>
+            </a:outerShdw>
+          </a:effectLst>
+        </p:spPr>
+      </p:sp>
+      <p:sp>
+        <p:nvSpPr>
+          <p:cNvPr id="11" name="Text 9"/>
+          <p:cNvSpPr txBox="1"/>
+          <p:nvPr/>
+        </p:nvSpPr>
+        <p:spPr>
+          <a:xfrm>
+            <a:off x="6373368" y="2039112"/>
+            <a:ext cx="548640" cy="457200"/>
+          </a:xfrm>
+          <a:prstGeom prst="rect">
+            <a:avLst/>
+          </a:prstGeom>
+          <a:noFill/>
+          <a:ln/>
+        </p:spPr>
+        <p:txBody>
+          <a:bodyPr wrap="square" lIns="0" tIns="0" rIns="0" bIns="0" rtlCol="0" anchor="ctr"/>
+          <a:lstStyle/>
+          <a:p>
+            <a:pPr indent="0" marL="0">
+              <a:buNone/>
+            </a:pPr>
+            <a:r>
+              <a:rPr lang="en-US" sz="2400" dirty="0">
+                <a:solidFill>
+                  <a:srgbClr val="000000"/>
+                </a:solidFill>
+                <a:latin typeface="Leelawadee UI" pitchFamily="34" charset="0"/>
+                <a:ea typeface="Leelawadee UI" pitchFamily="34" charset="-122"/>
+                <a:cs typeface="Leelawadee UI" pitchFamily="34" charset="-120"/>
+              </a:rPr>
+              <a:t>🔗</a:t>
+            </a:r>
+            <a:endParaRPr lang="en-US" sz="2400" dirty="0"/>
+          </a:p>
+        </p:txBody>
+      </p:sp>
+      <p:sp>
+        <p:nvSpPr>
+          <p:cNvPr id="12" name="Text 10"/>
+          <p:cNvSpPr txBox="1"/>
+          <p:nvPr/>
+        </p:nvSpPr>
+        <p:spPr>
+          <a:xfrm>
+            <a:off x="6373368" y="2441448"/>
+            <a:ext cx="4855464" cy="457200"/>
+          </a:xfrm>
+          <a:prstGeom prst="rect">
+            <a:avLst/>
+          </a:prstGeom>
+          <a:noFill/>
+          <a:ln/>
+        </p:spPr>
+        <p:txBody>
+          <a:bodyPr wrap="square" lIns="0" tIns="0" rIns="0" bIns="0" rtlCol="0" anchor="t"/>
+          <a:lstStyle/>
+          <a:p>
+            <a:pPr indent="0" marL="0">
+              <a:buNone/>
+            </a:pPr>
+            <a:r>
+              <a:rPr lang="en-US" sz="1450" b="1" dirty="0">
+                <a:solidFill>
+                  <a:srgbClr val="1E2E28"/>
+                </a:solidFill>
+                <a:latin typeface="Leelawadee UI" pitchFamily="34" charset="0"/>
+                <a:ea typeface="Leelawadee UI" pitchFamily="34" charset="-122"/>
+                <a:cs typeface="Leelawadee UI" pitchFamily="34" charset="-120"/>
+              </a:rPr>
+              <a:t>ต่อกันเป็นสายงาน (pipeline)</a:t>
+            </a:r>
+            <a:endParaRPr lang="en-US" sz="1450" dirty="0"/>
+          </a:p>
+        </p:txBody>
+      </p:sp>
+      <p:sp>
+        <p:nvSpPr>
+          <p:cNvPr id="13" name="Text 11"/>
+          <p:cNvSpPr txBox="1"/>
+          <p:nvPr/>
+        </p:nvSpPr>
+        <p:spPr>
+          <a:xfrm>
+            <a:off x="6373368" y="2862072"/>
+            <a:ext cx="4855464" cy="722376"/>
+          </a:xfrm>
+          <a:prstGeom prst="rect">
+            <a:avLst/>
+          </a:prstGeom>
+          <a:noFill/>
+          <a:ln/>
+        </p:spPr>
+        <p:txBody>
+          <a:bodyPr wrap="square" lIns="0" tIns="0" rIns="0" bIns="0" rtlCol="0" anchor="t"/>
+          <a:lstStyle/>
+          <a:p>
+            <a:pPr indent="0" marL="0">
+              <a:lnSpc>
+                <a:spcPct val="115000"/>
+              </a:lnSpc>
+              <a:buNone/>
+            </a:pPr>
+            <a:r>
+              <a:rPr lang="en-US" sz="1100" dirty="0">
+                <a:solidFill>
+                  <a:srgbClr val="55685D"/>
+                </a:solidFill>
+                <a:latin typeface="Leelawadee UI" pitchFamily="34" charset="0"/>
+                <a:ea typeface="Leelawadee UI" pitchFamily="34" charset="-122"/>
+                <a:cs typeface="Leelawadee UI" pitchFamily="34" charset="-120"/>
+              </a:rPr>
+              <a:t>ผลลัพธ์ตัวหนึ่งส่งต่อเป็นข้อมูลตั้งต้นให้อีกตัว ทุกจุดต่อคือที่ที่คุณเข้าไปตรวจได้ก่อนส่งต่อ</a:t>
+            </a:r>
+            <a:endParaRPr lang="en-US" sz="1100" dirty="0"/>
+          </a:p>
+        </p:txBody>
+      </p:sp>
+      <p:sp>
+        <p:nvSpPr>
+          <p:cNvPr id="14" name="Shape 12"/>
+          <p:cNvSpPr/>
+          <p:nvPr/>
+        </p:nvSpPr>
+        <p:spPr>
+          <a:xfrm>
+            <a:off x="548640" y="4023360"/>
+            <a:ext cx="5257800" cy="1874520"/>
+          </a:xfrm>
+          <a:prstGeom prst="roundRect">
+            <a:avLst>
+              <a:gd name="adj" fmla="val 5854"/>
+            </a:avLst>
+          </a:prstGeom>
+          <a:solidFill>
+            <a:srgbClr val="FFFFFF"/>
+          </a:solidFill>
+          <a:ln w="12700">
+            <a:solidFill>
+              <a:srgbClr val="D9DECB"/>
+            </a:solidFill>
+            <a:prstDash val="solid"/>
+          </a:ln>
+          <a:effectLst>
+            <a:outerShdw sx="100000" sy="100000" kx="0" ky="0" algn="bl" rotWithShape="0" blurRad="76200" dist="25400" dir="5400000">
+              <a:srgbClr val="1E2E28">
+                <a:alpha val="12000"/>
+              </a:srgbClr>
+            </a:outerShdw>
+          </a:effectLst>
+        </p:spPr>
+      </p:sp>
+      <p:sp>
+        <p:nvSpPr>
+          <p:cNvPr id="15" name="Text 13"/>
+          <p:cNvSpPr txBox="1"/>
+          <p:nvPr/>
+        </p:nvSpPr>
+        <p:spPr>
+          <a:xfrm>
+            <a:off x="749808" y="4187952"/>
+            <a:ext cx="548640" cy="457200"/>
+          </a:xfrm>
+          <a:prstGeom prst="rect">
+            <a:avLst/>
+          </a:prstGeom>
+          <a:noFill/>
+          <a:ln/>
+        </p:spPr>
+        <p:txBody>
+          <a:bodyPr wrap="square" lIns="0" tIns="0" rIns="0" bIns="0" rtlCol="0" anchor="ctr"/>
+          <a:lstStyle/>
+          <a:p>
+            <a:pPr indent="0" marL="0">
+              <a:buNone/>
+            </a:pPr>
+            <a:r>
+              <a:rPr lang="en-US" sz="2400" dirty="0">
+                <a:solidFill>
+                  <a:srgbClr val="000000"/>
+                </a:solidFill>
+                <a:latin typeface="Leelawadee UI" pitchFamily="34" charset="0"/>
+                <a:ea typeface="Leelawadee UI" pitchFamily="34" charset="-122"/>
+                <a:cs typeface="Leelawadee UI" pitchFamily="34" charset="-120"/>
+              </a:rPr>
+              <a:t>🔄</a:t>
+            </a:r>
+            <a:endParaRPr lang="en-US" sz="2400" dirty="0"/>
+          </a:p>
+        </p:txBody>
+      </p:sp>
+      <p:sp>
+        <p:nvSpPr>
+          <p:cNvPr id="16" name="Text 14"/>
+          <p:cNvSpPr txBox="1"/>
+          <p:nvPr/>
+        </p:nvSpPr>
+        <p:spPr>
+          <a:xfrm>
+            <a:off x="749808" y="4590288"/>
+            <a:ext cx="4855464" cy="457200"/>
+          </a:xfrm>
+          <a:prstGeom prst="rect">
+            <a:avLst/>
+          </a:prstGeom>
+          <a:noFill/>
+          <a:ln/>
+        </p:spPr>
+        <p:txBody>
+          <a:bodyPr wrap="square" lIns="0" tIns="0" rIns="0" bIns="0" rtlCol="0" anchor="t"/>
+          <a:lstStyle/>
+          <a:p>
+            <a:pPr indent="0" marL="0">
+              <a:buNone/>
+            </a:pPr>
+            <a:r>
+              <a:rPr lang="en-US" sz="1450" b="1" dirty="0">
+                <a:solidFill>
+                  <a:srgbClr val="1E2E28"/>
+                </a:solidFill>
+                <a:latin typeface="Leelawadee UI" pitchFamily="34" charset="0"/>
+                <a:ea typeface="Leelawadee UI" pitchFamily="34" charset="-122"/>
+                <a:cs typeface="Leelawadee UI" pitchFamily="34" charset="-120"/>
+              </a:rPr>
+              <a:t>ปล่อยลองซ้ำได้ แต่ต้องมีเพดาน</a:t>
+            </a:r>
+            <a:endParaRPr lang="en-US" sz="1450" dirty="0"/>
+          </a:p>
+        </p:txBody>
+      </p:sp>
+      <p:sp>
+        <p:nvSpPr>
+          <p:cNvPr id="17" name="Text 15"/>
+          <p:cNvSpPr txBox="1"/>
+          <p:nvPr/>
+        </p:nvSpPr>
+        <p:spPr>
+          <a:xfrm>
+            <a:off x="749808" y="5010912"/>
+            <a:ext cx="4855464" cy="722376"/>
+          </a:xfrm>
+          <a:prstGeom prst="rect">
+            <a:avLst/>
+          </a:prstGeom>
+          <a:noFill/>
+          <a:ln/>
+        </p:spPr>
+        <p:txBody>
+          <a:bodyPr wrap="square" lIns="0" tIns="0" rIns="0" bIns="0" rtlCol="0" anchor="t"/>
+          <a:lstStyle/>
+          <a:p>
+            <a:pPr indent="0" marL="0">
+              <a:lnSpc>
+                <a:spcPct val="115000"/>
+              </a:lnSpc>
+              <a:buNone/>
+            </a:pPr>
+            <a:r>
+              <a:rPr lang="en-US" sz="1100" dirty="0">
+                <a:solidFill>
+                  <a:srgbClr val="55685D"/>
+                </a:solidFill>
+                <a:latin typeface="Leelawadee UI" pitchFamily="34" charset="0"/>
+                <a:ea typeface="Leelawadee UI" pitchFamily="34" charset="-122"/>
+                <a:cs typeface="Leelawadee UI" pitchFamily="34" charset="-120"/>
+              </a:rPr>
+              <a:t>ให้แก้งานซ้ำเองได้ แต่จำกัดจำนวนรอบเสมอ — ห้ามปล่อยเป็นลูปไม่มีที่สิ้นสุด</a:t>
+            </a:r>
+            <a:endParaRPr lang="en-US" sz="1100" dirty="0"/>
+          </a:p>
+        </p:txBody>
+      </p:sp>
+      <p:sp>
+        <p:nvSpPr>
+          <p:cNvPr id="18" name="Shape 16"/>
+          <p:cNvSpPr/>
+          <p:nvPr/>
+        </p:nvSpPr>
+        <p:spPr>
+          <a:xfrm>
+            <a:off x="6172200" y="4023360"/>
+            <a:ext cx="5257800" cy="1874520"/>
+          </a:xfrm>
+          <a:prstGeom prst="roundRect">
+            <a:avLst>
+              <a:gd name="adj" fmla="val 5854"/>
+            </a:avLst>
+          </a:prstGeom>
+          <a:solidFill>
+            <a:srgbClr val="FFFFFF"/>
+          </a:solidFill>
+          <a:ln w="12700">
+            <a:solidFill>
+              <a:srgbClr val="D9DECB"/>
+            </a:solidFill>
+            <a:prstDash val="solid"/>
+          </a:ln>
+          <a:effectLst>
+            <a:outerShdw sx="100000" sy="100000" kx="0" ky="0" algn="bl" rotWithShape="0" blurRad="76200" dist="25400" dir="5400000">
+              <a:srgbClr val="1E2E28">
+                <a:alpha val="12000"/>
+              </a:srgbClr>
+            </a:outerShdw>
+          </a:effectLst>
+        </p:spPr>
+      </p:sp>
+      <p:sp>
+        <p:nvSpPr>
+          <p:cNvPr id="19" name="Text 17"/>
+          <p:cNvSpPr txBox="1"/>
+          <p:nvPr/>
+        </p:nvSpPr>
+        <p:spPr>
+          <a:xfrm>
+            <a:off x="6373368" y="4187952"/>
+            <a:ext cx="548640" cy="457200"/>
+          </a:xfrm>
+          <a:prstGeom prst="rect">
+            <a:avLst/>
+          </a:prstGeom>
+          <a:noFill/>
+          <a:ln/>
+        </p:spPr>
+        <p:txBody>
+          <a:bodyPr wrap="square" lIns="0" tIns="0" rIns="0" bIns="0" rtlCol="0" anchor="ctr"/>
+          <a:lstStyle/>
+          <a:p>
+            <a:pPr indent="0" marL="0">
+              <a:buNone/>
+            </a:pPr>
+            <a:r>
+              <a:rPr lang="en-US" sz="2400" dirty="0">
+                <a:solidFill>
+                  <a:srgbClr val="000000"/>
+                </a:solidFill>
+                <a:latin typeface="Leelawadee UI" pitchFamily="34" charset="0"/>
+                <a:ea typeface="Leelawadee UI" pitchFamily="34" charset="-122"/>
+                <a:cs typeface="Leelawadee UI" pitchFamily="34" charset="-120"/>
+              </a:rPr>
+              <a:t>📌</a:t>
+            </a:r>
+            <a:endParaRPr lang="en-US" sz="2400" dirty="0"/>
+          </a:p>
+        </p:txBody>
+      </p:sp>
+      <p:sp>
+        <p:nvSpPr>
+          <p:cNvPr id="20" name="Text 18"/>
+          <p:cNvSpPr txBox="1"/>
+          <p:nvPr/>
+        </p:nvSpPr>
+        <p:spPr>
+          <a:xfrm>
+            <a:off x="6373368" y="4590288"/>
+            <a:ext cx="4855464" cy="457200"/>
+          </a:xfrm>
+          <a:prstGeom prst="rect">
+            <a:avLst/>
+          </a:prstGeom>
+          <a:noFill/>
+          <a:ln/>
+        </p:spPr>
+        <p:txBody>
+          <a:bodyPr wrap="square" lIns="0" tIns="0" rIns="0" bIns="0" rtlCol="0" anchor="t"/>
+          <a:lstStyle/>
+          <a:p>
+            <a:pPr indent="0" marL="0">
+              <a:buNone/>
+            </a:pPr>
+            <a:r>
+              <a:rPr lang="en-US" sz="1450" b="1" dirty="0">
+                <a:solidFill>
+                  <a:srgbClr val="1E2E28"/>
+                </a:solidFill>
+                <a:latin typeface="Leelawadee UI" pitchFamily="34" charset="0"/>
+                <a:ea typeface="Leelawadee UI" pitchFamily="34" charset="-122"/>
+                <a:cs typeface="Leelawadee UI" pitchFamily="34" charset="-120"/>
+              </a:rPr>
+              <a:t>จบเซสชันด้วยการสรุป (wrap)</a:t>
+            </a:r>
+            <a:endParaRPr lang="en-US" sz="1450" dirty="0"/>
+          </a:p>
+        </p:txBody>
+      </p:sp>
+      <p:sp>
+        <p:nvSpPr>
+          <p:cNvPr id="21" name="Text 19"/>
+          <p:cNvSpPr txBox="1"/>
+          <p:nvPr/>
+        </p:nvSpPr>
+        <p:spPr>
+          <a:xfrm>
+            <a:off x="6373368" y="5010912"/>
+            <a:ext cx="4855464" cy="722376"/>
+          </a:xfrm>
+          <a:prstGeom prst="rect">
+            <a:avLst/>
+          </a:prstGeom>
+          <a:noFill/>
+          <a:ln/>
+        </p:spPr>
+        <p:txBody>
+          <a:bodyPr wrap="square" lIns="0" tIns="0" rIns="0" bIns="0" rtlCol="0" anchor="t"/>
+          <a:lstStyle/>
+          <a:p>
+            <a:pPr indent="0" marL="0">
+              <a:lnSpc>
+                <a:spcPct val="115000"/>
+              </a:lnSpc>
+              <a:buNone/>
+            </a:pPr>
+            <a:r>
+              <a:rPr lang="en-US" sz="1100" dirty="0">
+                <a:solidFill>
+                  <a:srgbClr val="55685D"/>
+                </a:solidFill>
+                <a:latin typeface="Leelawadee UI" pitchFamily="34" charset="0"/>
+                <a:ea typeface="Leelawadee UI" pitchFamily="34" charset="-122"/>
+                <a:cs typeface="Leelawadee UI" pitchFamily="34" charset="-120"/>
+              </a:rPr>
               <a:t>ก่อนปิดงาน สรุปว่าเปลี่ยนอะไร เหลืออะไรค้าง แล้วบันทึกลง MEMORY.md ทุกครั้ง</a:t>
             </a:r>
             <a:endParaRPr lang="en-US" sz="1100" dirty="0"/>
@@ -4903,7 +5591,7 @@
                 <a:ea typeface="Leelawadee UI" pitchFamily="34" charset="-122"/>
                 <a:cs typeface="Leelawadee UI" pitchFamily="34" charset="-120"/>
               </a:rPr>
-              <a:t>12</a:t>
+              <a:t>13</a:t>
             </a:r>
             <a:endParaRPr lang="en-US" sz="1100" dirty="0"/>
           </a:p>
@@ -4917,9 +5605,9 @@
 </p:sld>
 </file>
 
-<file path=ppt/slides/slide13.xml><?xml version="1.0" encoding="utf-8"?>
+<file path=ppt/slides/slide14.xml><?xml version="1.0" encoding="utf-8"?>
 <p:sld xmlns:a="http://schemas.openxmlformats.org/drawingml/2006/main" xmlns:r="http://schemas.openxmlformats.org/officeDocument/2006/relationships" xmlns:p="http://schemas.openxmlformats.org/presentationml/2006/main">
-  <p:cSld name="Slide 13">
+  <p:cSld name="Slide 14">
     <p:bg>
       <p:bgPr>
         <a:solidFill>
@@ -5669,7 +6357,7 @@
                 <a:ea typeface="Leelawadee UI" pitchFamily="34" charset="-122"/>
                 <a:cs typeface="Leelawadee UI" pitchFamily="34" charset="-120"/>
               </a:rPr>
-              <a:t>13</a:t>
+              <a:t>14</a:t>
             </a:r>
             <a:endParaRPr lang="en-US" sz="1100" dirty="0"/>
           </a:p>
@@ -5683,9 +6371,9 @@
 </p:sld>
 </file>
 
-<file path=ppt/slides/slide14.xml><?xml version="1.0" encoding="utf-8"?>
+<file path=ppt/slides/slide15.xml><?xml version="1.0" encoding="utf-8"?>
 <p:sld xmlns:a="http://schemas.openxmlformats.org/drawingml/2006/main" xmlns:r="http://schemas.openxmlformats.org/officeDocument/2006/relationships" xmlns:p="http://schemas.openxmlformats.org/presentationml/2006/main">
-  <p:cSld name="Slide 14">
+  <p:cSld name="Slide 15">
     <p:bg>
       <p:bgPr>
         <a:solidFill>
@@ -6803,7 +7491,7 @@
                 <a:ea typeface="Leelawadee UI" pitchFamily="34" charset="-122"/>
                 <a:cs typeface="Leelawadee UI" pitchFamily="34" charset="-120"/>
               </a:rPr>
-              <a:t>14</a:t>
+              <a:t>15</a:t>
             </a:r>
             <a:endParaRPr lang="en-US" sz="1100" dirty="0"/>
           </a:p>
@@ -6817,9 +7505,1025 @@
 </p:sld>
 </file>
 
-<file path=ppt/slides/slide15.xml><?xml version="1.0" encoding="utf-8"?>
+<file path=ppt/slides/slide16.xml><?xml version="1.0" encoding="utf-8"?>
 <p:sld xmlns:a="http://schemas.openxmlformats.org/drawingml/2006/main" xmlns:r="http://schemas.openxmlformats.org/officeDocument/2006/relationships" xmlns:p="http://schemas.openxmlformats.org/presentationml/2006/main">
-  <p:cSld name="Slide 15">
+  <p:cSld name="Slide 16">
+    <p:bg>
+      <p:bgPr>
+        <a:solidFill>
+          <a:srgbClr val="F1F3EC"/>
+        </a:solidFill>
+      </p:bgPr>
+    </p:bg>
+    <p:spTree>
+      <p:nvGrpSpPr>
+        <p:cNvPr id="1" name=""/>
+        <p:cNvGrpSpPr/>
+        <p:nvPr/>
+      </p:nvGrpSpPr>
+      <p:grpSpPr>
+        <a:xfrm>
+          <a:off x="0" y="0"/>
+          <a:ext cx="0" cy="0"/>
+          <a:chOff x="0" y="0"/>
+          <a:chExt cx="0" cy="0"/>
+        </a:xfrm>
+      </p:grpSpPr>
+      <p:sp>
+        <p:nvSpPr>
+          <p:cNvPr id="2" name="Shape 0"/>
+          <p:cNvSpPr/>
+          <p:nvPr/>
+        </p:nvSpPr>
+        <p:spPr>
+          <a:xfrm>
+            <a:off x="9814255" y="384048"/>
+            <a:ext cx="1828800" cy="384048"/>
+          </a:xfrm>
+          <a:prstGeom prst="roundRect">
+            <a:avLst>
+              <a:gd name="adj" fmla="val 50000"/>
+            </a:avLst>
+          </a:prstGeom>
+          <a:solidFill>
+            <a:srgbClr val="14201B"/>
+          </a:solidFill>
+          <a:ln/>
+        </p:spPr>
+      </p:sp>
+      <p:sp>
+        <p:nvSpPr>
+          <p:cNvPr id="3" name="Text 1"/>
+          <p:cNvSpPr txBox="1"/>
+          <p:nvPr/>
+        </p:nvSpPr>
+        <p:spPr>
+          <a:xfrm>
+            <a:off x="9814255" y="384048"/>
+            <a:ext cx="1828800" cy="384048"/>
+          </a:xfrm>
+          <a:prstGeom prst="rect">
+            <a:avLst/>
+          </a:prstGeom>
+          <a:noFill/>
+          <a:ln/>
+        </p:spPr>
+        <p:txBody>
+          <a:bodyPr wrap="square" lIns="0" tIns="0" rIns="0" bIns="0" rtlCol="0" anchor="ctr"/>
+          <a:lstStyle/>
+          <a:p>
+            <a:pPr algn="ctr" indent="0" marL="0">
+              <a:buNone/>
+            </a:pPr>
+            <a:r>
+              <a:rPr lang="en-US" sz="1200" b="1" dirty="0">
+                <a:solidFill>
+                  <a:srgbClr val="F0AC4C"/>
+                </a:solidFill>
+                <a:latin typeface="Leelawadee UI" pitchFamily="34" charset="0"/>
+                <a:ea typeface="Leelawadee UI" pitchFamily="34" charset="-122"/>
+                <a:cs typeface="Leelawadee UI" pitchFamily="34" charset="-120"/>
+              </a:rPr>
+              <a:t>มืออาชีพ</a:t>
+            </a:r>
+            <a:endParaRPr lang="en-US" sz="1200" dirty="0"/>
+          </a:p>
+        </p:txBody>
+      </p:sp>
+      <p:sp>
+        <p:nvSpPr>
+          <p:cNvPr id="4" name="Text 2"/>
+          <p:cNvSpPr txBox="1"/>
+          <p:nvPr/>
+        </p:nvSpPr>
+        <p:spPr>
+          <a:xfrm>
+            <a:off x="548640" y="384048"/>
+            <a:ext cx="7315200" cy="365760"/>
+          </a:xfrm>
+          <a:prstGeom prst="rect">
+            <a:avLst/>
+          </a:prstGeom>
+          <a:noFill/>
+          <a:ln/>
+        </p:spPr>
+        <p:txBody>
+          <a:bodyPr wrap="square" lIns="0" tIns="0" rIns="0" bIns="0" rtlCol="0" anchor="ctr"/>
+          <a:lstStyle/>
+          <a:p>
+            <a:pPr indent="0" marL="0">
+              <a:buNone/>
+            </a:pPr>
+            <a:r>
+              <a:rPr lang="en-US" sz="1300" b="1" spc="200" kern="0" dirty="0">
+                <a:solidFill>
+                  <a:srgbClr val="1E2E28"/>
+                </a:solidFill>
+                <a:latin typeface="Leelawadee UI" pitchFamily="34" charset="0"/>
+                <a:ea typeface="Leelawadee UI" pitchFamily="34" charset="-122"/>
+                <a:cs typeface="Leelawadee UI" pitchFamily="34" charset="-120"/>
+              </a:rPr>
+              <a:t>ไม่ใช่ทฤษฎีลอยๆ</a:t>
+            </a:r>
+            <a:endParaRPr lang="en-US" sz="1300" dirty="0"/>
+          </a:p>
+        </p:txBody>
+      </p:sp>
+      <p:sp>
+        <p:nvSpPr>
+          <p:cNvPr id="5" name="Text 3"/>
+          <p:cNvSpPr txBox="1"/>
+          <p:nvPr/>
+        </p:nvSpPr>
+        <p:spPr>
+          <a:xfrm>
+            <a:off x="548640" y="713232"/>
+            <a:ext cx="9601200" cy="822960"/>
+          </a:xfrm>
+          <a:prstGeom prst="rect">
+            <a:avLst/>
+          </a:prstGeom>
+          <a:noFill/>
+          <a:ln/>
+        </p:spPr>
+        <p:txBody>
+          <a:bodyPr wrap="square" lIns="0" tIns="0" rIns="0" bIns="0" rtlCol="0" anchor="ctr"/>
+          <a:lstStyle/>
+          <a:p>
+            <a:pPr indent="0" marL="0">
+              <a:buNone/>
+            </a:pPr>
+            <a:r>
+              <a:rPr lang="en-US" sz="2700" b="1" dirty="0">
+                <a:solidFill>
+                  <a:srgbClr val="1E2E28"/>
+                </a:solidFill>
+                <a:latin typeface="Leelawadee UI" pitchFamily="34" charset="0"/>
+                <a:ea typeface="Leelawadee UI" pitchFamily="34" charset="-122"/>
+                <a:cs typeface="Leelawadee UI" pitchFamily="34" charset="-120"/>
+              </a:rPr>
+              <a:t>ทำไมต้องมีไฟล์จดความจำ</a:t>
+            </a:r>
+            <a:endParaRPr lang="en-US" sz="2700" dirty="0"/>
+          </a:p>
+        </p:txBody>
+      </p:sp>
+      <p:sp>
+        <p:nvSpPr>
+          <p:cNvPr id="6" name="Text 4"/>
+          <p:cNvSpPr txBox="1"/>
+          <p:nvPr/>
+        </p:nvSpPr>
+        <p:spPr>
+          <a:xfrm>
+            <a:off x="548640" y="1481328"/>
+            <a:ext cx="10881360" cy="822960"/>
+          </a:xfrm>
+          <a:prstGeom prst="rect">
+            <a:avLst/>
+          </a:prstGeom>
+          <a:noFill/>
+          <a:ln/>
+        </p:spPr>
+        <p:txBody>
+          <a:bodyPr wrap="square" lIns="0" tIns="0" rIns="0" bIns="0" rtlCol="0" anchor="ctr"/>
+          <a:lstStyle/>
+          <a:p>
+            <a:pPr indent="0" marL="0">
+              <a:lnSpc>
+                <a:spcPct val="125000"/>
+              </a:lnSpc>
+              <a:buNone/>
+            </a:pPr>
+            <a:r>
+              <a:rPr lang="en-US" sz="1400" dirty="0">
+                <a:solidFill>
+                  <a:srgbClr val="55685D"/>
+                </a:solidFill>
+                <a:latin typeface="Leelawadee UI" pitchFamily="34" charset="0"/>
+                <a:ea typeface="Leelawadee UI" pitchFamily="34" charset="-122"/>
+                <a:cs typeface="Leelawadee UI" pitchFamily="34" charset="-120"/>
+              </a:rPr>
+              <a:t>คู่มือ+วิดีโอชุดนี้เอง สร้างด้วย </a:t>
+            </a:r>
+            <a:pPr indent="0" marL="0">
+              <a:lnSpc>
+                <a:spcPct val="125000"/>
+              </a:lnSpc>
+              <a:buNone/>
+            </a:pPr>
+            <a:r>
+              <a:rPr lang="en-US" sz="1400" b="1" dirty="0">
+                <a:solidFill>
+                  <a:srgbClr val="2F5548"/>
+                </a:solidFill>
+                <a:latin typeface="Leelawadee UI" pitchFamily="34" charset="0"/>
+                <a:ea typeface="Leelawadee UI" pitchFamily="34" charset="-122"/>
+                <a:cs typeface="Leelawadee UI" pitchFamily="34" charset="-120"/>
+              </a:rPr>
+              <a:t>Claude Code</a:t>
+            </a:r>
+            <a:pPr indent="0" marL="0">
+              <a:lnSpc>
+                <a:spcPct val="125000"/>
+              </a:lnSpc>
+              <a:buNone/>
+            </a:pPr>
+            <a:r>
+              <a:rPr lang="en-US" sz="1400" dirty="0">
+                <a:solidFill>
+                  <a:srgbClr val="55685D"/>
+                </a:solidFill>
+                <a:latin typeface="Leelawadee UI" pitchFamily="34" charset="0"/>
+                <a:ea typeface="Leelawadee UI" pitchFamily="34" charset="-122"/>
+                <a:cs typeface="Leelawadee UI" pitchFamily="34" charset="-120"/>
+              </a:rPr>
+              <a:t> (เอเจนต์แบบเดียวกับ Codex คนละเจ้า) ระหว่างทางเจอบั๊กจริง 2 ตัว — เอามาเล่าตรงๆ เพราะอธิบายชัดว่าทำไมไฟล์พวกนี้ถึงสำคัญ:</a:t>
+            </a:r>
+            <a:endParaRPr lang="en-US" sz="1400" dirty="0"/>
+          </a:p>
+        </p:txBody>
+      </p:sp>
+      <p:sp>
+        <p:nvSpPr>
+          <p:cNvPr id="7" name="Shape 5"/>
+          <p:cNvSpPr/>
+          <p:nvPr/>
+        </p:nvSpPr>
+        <p:spPr>
+          <a:xfrm>
+            <a:off x="548640" y="2331720"/>
+            <a:ext cx="10881360" cy="1417320"/>
+          </a:xfrm>
+          <a:prstGeom prst="roundRect">
+            <a:avLst>
+              <a:gd name="adj" fmla="val 7742"/>
+            </a:avLst>
+          </a:prstGeom>
+          <a:solidFill>
+            <a:srgbClr val="EFDCBB"/>
+          </a:solidFill>
+          <a:ln/>
+        </p:spPr>
+      </p:sp>
+      <p:sp>
+        <p:nvSpPr>
+          <p:cNvPr id="8" name="Text 6"/>
+          <p:cNvSpPr txBox="1"/>
+          <p:nvPr/>
+        </p:nvSpPr>
+        <p:spPr>
+          <a:xfrm>
+            <a:off x="777240" y="2487168"/>
+            <a:ext cx="320040" cy="548640"/>
+          </a:xfrm>
+          <a:prstGeom prst="rect">
+            <a:avLst/>
+          </a:prstGeom>
+          <a:noFill/>
+          <a:ln/>
+        </p:spPr>
+        <p:txBody>
+          <a:bodyPr wrap="square" lIns="0" tIns="0" rIns="0" bIns="0" rtlCol="0" anchor="ctr"/>
+          <a:lstStyle/>
+          <a:p>
+            <a:pPr indent="0" marL="0">
+              <a:buNone/>
+            </a:pPr>
+            <a:r>
+              <a:rPr lang="en-US" sz="1500" b="1" dirty="0">
+                <a:solidFill>
+                  <a:srgbClr val="C97F1E"/>
+                </a:solidFill>
+                <a:latin typeface="Leelawadee UI" pitchFamily="34" charset="0"/>
+                <a:ea typeface="Leelawadee UI" pitchFamily="34" charset="-122"/>
+                <a:cs typeface="Leelawadee UI" pitchFamily="34" charset="-120"/>
+              </a:rPr>
+              <a:t>!</a:t>
+            </a:r>
+            <a:endParaRPr lang="en-US" sz="1500" dirty="0"/>
+          </a:p>
+        </p:txBody>
+      </p:sp>
+      <p:sp>
+        <p:nvSpPr>
+          <p:cNvPr id="9" name="Text 7"/>
+          <p:cNvSpPr txBox="1"/>
+          <p:nvPr/>
+        </p:nvSpPr>
+        <p:spPr>
+          <a:xfrm>
+            <a:off x="1143000" y="2487168"/>
+            <a:ext cx="10058400" cy="594360"/>
+          </a:xfrm>
+          <a:prstGeom prst="rect">
+            <a:avLst/>
+          </a:prstGeom>
+          <a:noFill/>
+          <a:ln/>
+        </p:spPr>
+        <p:txBody>
+          <a:bodyPr wrap="square" lIns="0" tIns="0" rIns="0" bIns="0" rtlCol="0" anchor="ctr"/>
+          <a:lstStyle/>
+          <a:p>
+            <a:pPr indent="0" marL="0">
+              <a:lnSpc>
+                <a:spcPct val="110000"/>
+              </a:lnSpc>
+              <a:buNone/>
+            </a:pPr>
+            <a:r>
+              <a:rPr lang="en-US" sz="1200" dirty="0">
+                <a:solidFill>
+                  <a:srgbClr val="1E2E28"/>
+                </a:solidFill>
+                <a:latin typeface="Leelawadee UI" pitchFamily="34" charset="0"/>
+                <a:ea typeface="Leelawadee UI" pitchFamily="34" charset="-122"/>
+                <a:cs typeface="Leelawadee UI" pitchFamily="34" charset="-120"/>
+              </a:rPr>
+              <a:t>ปุ่มสลับภาษา: เผลอเพิ่ม CSS selector ที่เจาะจงกว่า ไปทับกฎซ่อนภาษาแบบเงียบๆ — ไทย/อังกฤษโชว์พร้อมกันทั้งคู่ ไม่มี error ให้เห็น</a:t>
+            </a:r>
+            <a:endParaRPr lang="en-US" sz="1200" dirty="0"/>
+          </a:p>
+        </p:txBody>
+      </p:sp>
+      <p:sp>
+        <p:nvSpPr>
+          <p:cNvPr id="10" name="Text 8"/>
+          <p:cNvSpPr txBox="1"/>
+          <p:nvPr/>
+        </p:nvSpPr>
+        <p:spPr>
+          <a:xfrm>
+            <a:off x="777240" y="3145536"/>
+            <a:ext cx="320040" cy="548640"/>
+          </a:xfrm>
+          <a:prstGeom prst="rect">
+            <a:avLst/>
+          </a:prstGeom>
+          <a:noFill/>
+          <a:ln/>
+        </p:spPr>
+        <p:txBody>
+          <a:bodyPr wrap="square" lIns="0" tIns="0" rIns="0" bIns="0" rtlCol="0" anchor="ctr"/>
+          <a:lstStyle/>
+          <a:p>
+            <a:pPr indent="0" marL="0">
+              <a:buNone/>
+            </a:pPr>
+            <a:r>
+              <a:rPr lang="en-US" sz="1500" b="1" dirty="0">
+                <a:solidFill>
+                  <a:srgbClr val="C97F1E"/>
+                </a:solidFill>
+                <a:latin typeface="Leelawadee UI" pitchFamily="34" charset="0"/>
+                <a:ea typeface="Leelawadee UI" pitchFamily="34" charset="-122"/>
+                <a:cs typeface="Leelawadee UI" pitchFamily="34" charset="-120"/>
+              </a:rPr>
+              <a:t>!</a:t>
+            </a:r>
+            <a:endParaRPr lang="en-US" sz="1500" dirty="0"/>
+          </a:p>
+        </p:txBody>
+      </p:sp>
+      <p:sp>
+        <p:nvSpPr>
+          <p:cNvPr id="11" name="Text 9"/>
+          <p:cNvSpPr txBox="1"/>
+          <p:nvPr/>
+        </p:nvSpPr>
+        <p:spPr>
+          <a:xfrm>
+            <a:off x="1143000" y="3145536"/>
+            <a:ext cx="10058400" cy="594360"/>
+          </a:xfrm>
+          <a:prstGeom prst="rect">
+            <a:avLst/>
+          </a:prstGeom>
+          <a:noFill/>
+          <a:ln/>
+        </p:spPr>
+        <p:txBody>
+          <a:bodyPr wrap="square" lIns="0" tIns="0" rIns="0" bIns="0" rtlCol="0" anchor="ctr"/>
+          <a:lstStyle/>
+          <a:p>
+            <a:pPr indent="0" marL="0">
+              <a:lnSpc>
+                <a:spcPct val="110000"/>
+              </a:lnSpc>
+              <a:buNone/>
+            </a:pPr>
+            <a:r>
+              <a:rPr lang="en-US" sz="1200" dirty="0">
+                <a:solidFill>
+                  <a:srgbClr val="1E2E28"/>
+                </a:solidFill>
+                <a:latin typeface="Leelawadee UI" pitchFamily="34" charset="0"/>
+                <a:ea typeface="Leelawadee UI" pitchFamily="34" charset="-122"/>
+                <a:cs typeface="Leelawadee UI" pitchFamily="34" charset="-120"/>
+              </a:rPr>
+              <a:t>วิดีโอ 9 ฉากคู่ขนาน: ตั้งชื่อ id/class ขึ้นต้นด้วยตัวเลข (เช่น "01-hook") ซึ่งผิดกฎ CSS — 4 ใน 9 ฉากพังตั้งแต่รอบแรก</a:t>
+            </a:r>
+            <a:endParaRPr lang="en-US" sz="1200" dirty="0"/>
+          </a:p>
+        </p:txBody>
+      </p:sp>
+      <p:sp>
+        <p:nvSpPr>
+          <p:cNvPr id="12" name="Text 10"/>
+          <p:cNvSpPr txBox="1"/>
+          <p:nvPr/>
+        </p:nvSpPr>
+        <p:spPr>
+          <a:xfrm>
+            <a:off x="548640" y="3931920"/>
+            <a:ext cx="10881360" cy="365760"/>
+          </a:xfrm>
+          <a:prstGeom prst="rect">
+            <a:avLst/>
+          </a:prstGeom>
+          <a:noFill/>
+          <a:ln/>
+        </p:spPr>
+        <p:txBody>
+          <a:bodyPr wrap="square" lIns="0" tIns="0" rIns="0" bIns="0" rtlCol="0" anchor="ctr"/>
+          <a:lstStyle/>
+          <a:p>
+            <a:pPr indent="0" marL="0">
+              <a:buNone/>
+            </a:pPr>
+            <a:r>
+              <a:rPr lang="en-US" sz="1300" b="1" dirty="0">
+                <a:solidFill>
+                  <a:srgbClr val="2F5548"/>
+                </a:solidFill>
+                <a:latin typeface="Leelawadee UI" pitchFamily="34" charset="0"/>
+                <a:ea typeface="Leelawadee UI" pitchFamily="34" charset="-122"/>
+                <a:cs typeface="Leelawadee UI" pitchFamily="34" charset="-120"/>
+              </a:rPr>
+              <a:t>แก้ครั้งเดียว เขียนกฎไว้ในไฟล์ — ครั้งต่อไปไม่ต้องดีบั๊กซ้ำ หลักการเดียวกัน ใช้ได้ 4 แบบไฟล์:</a:t>
+            </a:r>
+            <a:endParaRPr lang="en-US" sz="1300" dirty="0"/>
+          </a:p>
+        </p:txBody>
+      </p:sp>
+      <p:sp>
+        <p:nvSpPr>
+          <p:cNvPr id="13" name="Text 11"/>
+          <p:cNvSpPr txBox="1"/>
+          <p:nvPr/>
+        </p:nvSpPr>
+        <p:spPr>
+          <a:xfrm>
+            <a:off x="548640" y="4389120"/>
+            <a:ext cx="320040" cy="411480"/>
+          </a:xfrm>
+          <a:prstGeom prst="rect">
+            <a:avLst/>
+          </a:prstGeom>
+          <a:noFill/>
+          <a:ln/>
+        </p:spPr>
+        <p:txBody>
+          <a:bodyPr wrap="square" lIns="0" tIns="0" rIns="0" bIns="0" rtlCol="0" anchor="ctr"/>
+          <a:lstStyle/>
+          <a:p>
+            <a:pPr indent="0" marL="0">
+              <a:buNone/>
+            </a:pPr>
+            <a:r>
+              <a:rPr lang="en-US" sz="1300" b="1" dirty="0">
+                <a:solidFill>
+                  <a:srgbClr val="2F5548"/>
+                </a:solidFill>
+                <a:latin typeface="Leelawadee UI" pitchFamily="34" charset="0"/>
+                <a:ea typeface="Leelawadee UI" pitchFamily="34" charset="-122"/>
+                <a:cs typeface="Leelawadee UI" pitchFamily="34" charset="-120"/>
+              </a:rPr>
+              <a:t>✓</a:t>
+            </a:r>
+            <a:endParaRPr lang="en-US" sz="1300" dirty="0"/>
+          </a:p>
+        </p:txBody>
+      </p:sp>
+      <p:sp>
+        <p:nvSpPr>
+          <p:cNvPr id="14" name="Text 12"/>
+          <p:cNvSpPr txBox="1"/>
+          <p:nvPr/>
+        </p:nvSpPr>
+        <p:spPr>
+          <a:xfrm>
+            <a:off x="914400" y="4389120"/>
+            <a:ext cx="2651760" cy="411480"/>
+          </a:xfrm>
+          <a:prstGeom prst="rect">
+            <a:avLst/>
+          </a:prstGeom>
+          <a:noFill/>
+          <a:ln/>
+        </p:spPr>
+        <p:txBody>
+          <a:bodyPr wrap="square" lIns="0" tIns="0" rIns="0" bIns="0" rtlCol="0" anchor="ctr"/>
+          <a:lstStyle/>
+          <a:p>
+            <a:pPr indent="0" marL="0">
+              <a:buNone/>
+            </a:pPr>
+            <a:r>
+              <a:rPr lang="en-US" sz="1250" b="1" dirty="0">
+                <a:solidFill>
+                  <a:srgbClr val="1E2E28"/>
+                </a:solidFill>
+                <a:latin typeface="Leelawadee UI" pitchFamily="34" charset="0"/>
+                <a:ea typeface="Leelawadee UI" pitchFamily="34" charset="-122"/>
+                <a:cs typeface="Leelawadee UI" pitchFamily="34" charset="-120"/>
+              </a:rPr>
+              <a:t>MEMORY.md</a:t>
+            </a:r>
+            <a:endParaRPr lang="en-US" sz="1250" dirty="0"/>
+          </a:p>
+        </p:txBody>
+      </p:sp>
+      <p:sp>
+        <p:nvSpPr>
+          <p:cNvPr id="15" name="Text 13"/>
+          <p:cNvSpPr txBox="1"/>
+          <p:nvPr/>
+        </p:nvSpPr>
+        <p:spPr>
+          <a:xfrm>
+            <a:off x="3611880" y="4389120"/>
+            <a:ext cx="7772400" cy="411480"/>
+          </a:xfrm>
+          <a:prstGeom prst="rect">
+            <a:avLst/>
+          </a:prstGeom>
+          <a:noFill/>
+          <a:ln/>
+        </p:spPr>
+        <p:txBody>
+          <a:bodyPr wrap="square" lIns="0" tIns="0" rIns="0" bIns="0" rtlCol="0" anchor="ctr"/>
+          <a:lstStyle/>
+          <a:p>
+            <a:pPr indent="0" marL="0">
+              <a:buNone/>
+            </a:pPr>
+            <a:r>
+              <a:rPr lang="en-US" sz="1200" dirty="0">
+                <a:solidFill>
+                  <a:srgbClr val="55685D"/>
+                </a:solidFill>
+                <a:latin typeface="Leelawadee UI" pitchFamily="34" charset="0"/>
+                <a:ea typeface="Leelawadee UI" pitchFamily="34" charset="-122"/>
+                <a:cs typeface="Leelawadee UI" pitchFamily="34" charset="-120"/>
+              </a:rPr>
+              <a:t>จดสิ่งที่เพิ่งเรียนรู้ไว้เรื่อยๆ — อ่านทวนตอนเริ่มงานรอบถัดไป</a:t>
+            </a:r>
+            <a:endParaRPr lang="en-US" sz="1200" dirty="0"/>
+          </a:p>
+        </p:txBody>
+      </p:sp>
+      <p:sp>
+        <p:nvSpPr>
+          <p:cNvPr id="16" name="Text 14"/>
+          <p:cNvSpPr txBox="1"/>
+          <p:nvPr/>
+        </p:nvSpPr>
+        <p:spPr>
+          <a:xfrm>
+            <a:off x="548640" y="4846320"/>
+            <a:ext cx="320040" cy="411480"/>
+          </a:xfrm>
+          <a:prstGeom prst="rect">
+            <a:avLst/>
+          </a:prstGeom>
+          <a:noFill/>
+          <a:ln/>
+        </p:spPr>
+        <p:txBody>
+          <a:bodyPr wrap="square" lIns="0" tIns="0" rIns="0" bIns="0" rtlCol="0" anchor="ctr"/>
+          <a:lstStyle/>
+          <a:p>
+            <a:pPr indent="0" marL="0">
+              <a:buNone/>
+            </a:pPr>
+            <a:r>
+              <a:rPr lang="en-US" sz="1300" b="1" dirty="0">
+                <a:solidFill>
+                  <a:srgbClr val="2F5548"/>
+                </a:solidFill>
+                <a:latin typeface="Leelawadee UI" pitchFamily="34" charset="0"/>
+                <a:ea typeface="Leelawadee UI" pitchFamily="34" charset="-122"/>
+                <a:cs typeface="Leelawadee UI" pitchFamily="34" charset="-120"/>
+              </a:rPr>
+              <a:t>✓</a:t>
+            </a:r>
+            <a:endParaRPr lang="en-US" sz="1300" dirty="0"/>
+          </a:p>
+        </p:txBody>
+      </p:sp>
+      <p:sp>
+        <p:nvSpPr>
+          <p:cNvPr id="17" name="Text 15"/>
+          <p:cNvSpPr txBox="1"/>
+          <p:nvPr/>
+        </p:nvSpPr>
+        <p:spPr>
+          <a:xfrm>
+            <a:off x="914400" y="4846320"/>
+            <a:ext cx="2651760" cy="411480"/>
+          </a:xfrm>
+          <a:prstGeom prst="rect">
+            <a:avLst/>
+          </a:prstGeom>
+          <a:noFill/>
+          <a:ln/>
+        </p:spPr>
+        <p:txBody>
+          <a:bodyPr wrap="square" lIns="0" tIns="0" rIns="0" bIns="0" rtlCol="0" anchor="ctr"/>
+          <a:lstStyle/>
+          <a:p>
+            <a:pPr indent="0" marL="0">
+              <a:buNone/>
+            </a:pPr>
+            <a:r>
+              <a:rPr lang="en-US" sz="1250" b="1" dirty="0">
+                <a:solidFill>
+                  <a:srgbClr val="1E2E28"/>
+                </a:solidFill>
+                <a:latin typeface="Leelawadee UI" pitchFamily="34" charset="0"/>
+                <a:ea typeface="Leelawadee UI" pitchFamily="34" charset="-122"/>
+                <a:cs typeface="Leelawadee UI" pitchFamily="34" charset="-120"/>
+              </a:rPr>
+              <a:t>GOTCHAS.md / SKILL.md</a:t>
+            </a:r>
+            <a:endParaRPr lang="en-US" sz="1250" dirty="0"/>
+          </a:p>
+        </p:txBody>
+      </p:sp>
+      <p:sp>
+        <p:nvSpPr>
+          <p:cNvPr id="18" name="Text 16"/>
+          <p:cNvSpPr txBox="1"/>
+          <p:nvPr/>
+        </p:nvSpPr>
+        <p:spPr>
+          <a:xfrm>
+            <a:off x="3611880" y="4846320"/>
+            <a:ext cx="7772400" cy="411480"/>
+          </a:xfrm>
+          <a:prstGeom prst="rect">
+            <a:avLst/>
+          </a:prstGeom>
+          <a:noFill/>
+          <a:ln/>
+        </p:spPr>
+        <p:txBody>
+          <a:bodyPr wrap="square" lIns="0" tIns="0" rIns="0" bIns="0" rtlCol="0" anchor="ctr"/>
+          <a:lstStyle/>
+          <a:p>
+            <a:pPr indent="0" marL="0">
+              <a:buNone/>
+            </a:pPr>
+            <a:r>
+              <a:rPr lang="en-US" sz="1200" dirty="0">
+                <a:solidFill>
+                  <a:srgbClr val="55685D"/>
+                </a:solidFill>
+                <a:latin typeface="Leelawadee UI" pitchFamily="34" charset="0"/>
+                <a:ea typeface="Leelawadee UI" pitchFamily="34" charset="-122"/>
+                <a:cs typeface="Leelawadee UI" pitchFamily="34" charset="-120"/>
+              </a:rPr>
+              <a:t>จดวิธีแก้ปัญหาเฉพาะเรื่องไว้ครั้งเดียว ใช้ซ้ำได้ตลอด</a:t>
+            </a:r>
+            <a:endParaRPr lang="en-US" sz="1200" dirty="0"/>
+          </a:p>
+        </p:txBody>
+      </p:sp>
+      <p:sp>
+        <p:nvSpPr>
+          <p:cNvPr id="19" name="Text 17"/>
+          <p:cNvSpPr txBox="1"/>
+          <p:nvPr/>
+        </p:nvSpPr>
+        <p:spPr>
+          <a:xfrm>
+            <a:off x="548640" y="5303520"/>
+            <a:ext cx="320040" cy="411480"/>
+          </a:xfrm>
+          <a:prstGeom prst="rect">
+            <a:avLst/>
+          </a:prstGeom>
+          <a:noFill/>
+          <a:ln/>
+        </p:spPr>
+        <p:txBody>
+          <a:bodyPr wrap="square" lIns="0" tIns="0" rIns="0" bIns="0" rtlCol="0" anchor="ctr"/>
+          <a:lstStyle/>
+          <a:p>
+            <a:pPr indent="0" marL="0">
+              <a:buNone/>
+            </a:pPr>
+            <a:r>
+              <a:rPr lang="en-US" sz="1300" b="1" dirty="0">
+                <a:solidFill>
+                  <a:srgbClr val="2F5548"/>
+                </a:solidFill>
+                <a:latin typeface="Leelawadee UI" pitchFamily="34" charset="0"/>
+                <a:ea typeface="Leelawadee UI" pitchFamily="34" charset="-122"/>
+                <a:cs typeface="Leelawadee UI" pitchFamily="34" charset="-120"/>
+              </a:rPr>
+              <a:t>✓</a:t>
+            </a:r>
+            <a:endParaRPr lang="en-US" sz="1300" dirty="0"/>
+          </a:p>
+        </p:txBody>
+      </p:sp>
+      <p:sp>
+        <p:nvSpPr>
+          <p:cNvPr id="20" name="Text 18"/>
+          <p:cNvSpPr txBox="1"/>
+          <p:nvPr/>
+        </p:nvSpPr>
+        <p:spPr>
+          <a:xfrm>
+            <a:off x="914400" y="5303520"/>
+            <a:ext cx="2651760" cy="411480"/>
+          </a:xfrm>
+          <a:prstGeom prst="rect">
+            <a:avLst/>
+          </a:prstGeom>
+          <a:noFill/>
+          <a:ln/>
+        </p:spPr>
+        <p:txBody>
+          <a:bodyPr wrap="square" lIns="0" tIns="0" rIns="0" bIns="0" rtlCol="0" anchor="ctr"/>
+          <a:lstStyle/>
+          <a:p>
+            <a:pPr indent="0" marL="0">
+              <a:buNone/>
+            </a:pPr>
+            <a:r>
+              <a:rPr lang="en-US" sz="1250" b="1" dirty="0">
+                <a:solidFill>
+                  <a:srgbClr val="1E2E28"/>
+                </a:solidFill>
+                <a:latin typeface="Leelawadee UI" pitchFamily="34" charset="0"/>
+                <a:ea typeface="Leelawadee UI" pitchFamily="34" charset="-122"/>
+                <a:cs typeface="Leelawadee UI" pitchFamily="34" charset="-120"/>
+              </a:rPr>
+              <a:t>CLAUDE.md / AGENTS.md</a:t>
+            </a:r>
+            <a:endParaRPr lang="en-US" sz="1250" dirty="0"/>
+          </a:p>
+        </p:txBody>
+      </p:sp>
+      <p:sp>
+        <p:nvSpPr>
+          <p:cNvPr id="21" name="Text 19"/>
+          <p:cNvSpPr txBox="1"/>
+          <p:nvPr/>
+        </p:nvSpPr>
+        <p:spPr>
+          <a:xfrm>
+            <a:off x="3611880" y="5303520"/>
+            <a:ext cx="7772400" cy="411480"/>
+          </a:xfrm>
+          <a:prstGeom prst="rect">
+            <a:avLst/>
+          </a:prstGeom>
+          <a:noFill/>
+          <a:ln/>
+        </p:spPr>
+        <p:txBody>
+          <a:bodyPr wrap="square" lIns="0" tIns="0" rIns="0" bIns="0" rtlCol="0" anchor="ctr"/>
+          <a:lstStyle/>
+          <a:p>
+            <a:pPr indent="0" marL="0">
+              <a:buNone/>
+            </a:pPr>
+            <a:r>
+              <a:rPr lang="en-US" sz="1200" dirty="0">
+                <a:solidFill>
+                  <a:srgbClr val="55685D"/>
+                </a:solidFill>
+                <a:latin typeface="Leelawadee UI" pitchFamily="34" charset="0"/>
+                <a:ea typeface="Leelawadee UI" pitchFamily="34" charset="-122"/>
+                <a:cs typeface="Leelawadee UI" pitchFamily="34" charset="-120"/>
+              </a:rPr>
+              <a:t>กติกากลาง ทุก session อ่านก่อนเริ่มงานเสมอ</a:t>
+            </a:r>
+            <a:endParaRPr lang="en-US" sz="1200" dirty="0"/>
+          </a:p>
+        </p:txBody>
+      </p:sp>
+      <p:sp>
+        <p:nvSpPr>
+          <p:cNvPr id="22" name="Text 20"/>
+          <p:cNvSpPr txBox="1"/>
+          <p:nvPr/>
+        </p:nvSpPr>
+        <p:spPr>
+          <a:xfrm>
+            <a:off x="548640" y="5760720"/>
+            <a:ext cx="320040" cy="411480"/>
+          </a:xfrm>
+          <a:prstGeom prst="rect">
+            <a:avLst/>
+          </a:prstGeom>
+          <a:noFill/>
+          <a:ln/>
+        </p:spPr>
+        <p:txBody>
+          <a:bodyPr wrap="square" lIns="0" tIns="0" rIns="0" bIns="0" rtlCol="0" anchor="ctr"/>
+          <a:lstStyle/>
+          <a:p>
+            <a:pPr indent="0" marL="0">
+              <a:buNone/>
+            </a:pPr>
+            <a:r>
+              <a:rPr lang="en-US" sz="1300" b="1" dirty="0">
+                <a:solidFill>
+                  <a:srgbClr val="2F5548"/>
+                </a:solidFill>
+                <a:latin typeface="Leelawadee UI" pitchFamily="34" charset="0"/>
+                <a:ea typeface="Leelawadee UI" pitchFamily="34" charset="-122"/>
+                <a:cs typeface="Leelawadee UI" pitchFamily="34" charset="-120"/>
+              </a:rPr>
+              <a:t>✓</a:t>
+            </a:r>
+            <a:endParaRPr lang="en-US" sz="1300" dirty="0"/>
+          </a:p>
+        </p:txBody>
+      </p:sp>
+      <p:sp>
+        <p:nvSpPr>
+          <p:cNvPr id="23" name="Text 21"/>
+          <p:cNvSpPr txBox="1"/>
+          <p:nvPr/>
+        </p:nvSpPr>
+        <p:spPr>
+          <a:xfrm>
+            <a:off x="914400" y="5760720"/>
+            <a:ext cx="2651760" cy="411480"/>
+          </a:xfrm>
+          <a:prstGeom prst="rect">
+            <a:avLst/>
+          </a:prstGeom>
+          <a:noFill/>
+          <a:ln/>
+        </p:spPr>
+        <p:txBody>
+          <a:bodyPr wrap="square" lIns="0" tIns="0" rIns="0" bIns="0" rtlCol="0" anchor="ctr"/>
+          <a:lstStyle/>
+          <a:p>
+            <a:pPr indent="0" marL="0">
+              <a:buNone/>
+            </a:pPr>
+            <a:r>
+              <a:rPr lang="en-US" sz="1250" b="1" dirty="0">
+                <a:solidFill>
+                  <a:srgbClr val="1E2E28"/>
+                </a:solidFill>
+                <a:latin typeface="Leelawadee UI" pitchFamily="34" charset="0"/>
+                <a:ea typeface="Leelawadee UI" pitchFamily="34" charset="-122"/>
+                <a:cs typeface="Leelawadee UI" pitchFamily="34" charset="-120"/>
+              </a:rPr>
+              <a:t>ARCHITECTURE.md</a:t>
+            </a:r>
+            <a:endParaRPr lang="en-US" sz="1250" dirty="0"/>
+          </a:p>
+        </p:txBody>
+      </p:sp>
+      <p:sp>
+        <p:nvSpPr>
+          <p:cNvPr id="24" name="Text 22"/>
+          <p:cNvSpPr txBox="1"/>
+          <p:nvPr/>
+        </p:nvSpPr>
+        <p:spPr>
+          <a:xfrm>
+            <a:off x="3611880" y="5760720"/>
+            <a:ext cx="7772400" cy="411480"/>
+          </a:xfrm>
+          <a:prstGeom prst="rect">
+            <a:avLst/>
+          </a:prstGeom>
+          <a:noFill/>
+          <a:ln/>
+        </p:spPr>
+        <p:txBody>
+          <a:bodyPr wrap="square" lIns="0" tIns="0" rIns="0" bIns="0" rtlCol="0" anchor="ctr"/>
+          <a:lstStyle/>
+          <a:p>
+            <a:pPr indent="0" marL="0">
+              <a:buNone/>
+            </a:pPr>
+            <a:r>
+              <a:rPr lang="en-US" sz="1200" dirty="0">
+                <a:solidFill>
+                  <a:srgbClr val="55685D"/>
+                </a:solidFill>
+                <a:latin typeface="Leelawadee UI" pitchFamily="34" charset="0"/>
+                <a:ea typeface="Leelawadee UI" pitchFamily="34" charset="-122"/>
+                <a:cs typeface="Leelawadee UI" pitchFamily="34" charset="-120"/>
+              </a:rPr>
+              <a:t>แผนที่ว่าไฟล์ไหนทำหน้าที่อะไร ต่อกันยังไง</a:t>
+            </a:r>
+            <a:endParaRPr lang="en-US" sz="1200" dirty="0"/>
+          </a:p>
+        </p:txBody>
+      </p:sp>
+      <p:sp>
+        <p:nvSpPr>
+          <p:cNvPr id="25" name="Text 23"/>
+          <p:cNvSpPr txBox="1"/>
+          <p:nvPr/>
+        </p:nvSpPr>
+        <p:spPr>
+          <a:xfrm>
+            <a:off x="548640" y="6355080"/>
+            <a:ext cx="10881360" cy="365760"/>
+          </a:xfrm>
+          <a:prstGeom prst="rect">
+            <a:avLst/>
+          </a:prstGeom>
+          <a:noFill/>
+          <a:ln/>
+        </p:spPr>
+        <p:txBody>
+          <a:bodyPr wrap="square" lIns="0" tIns="0" rIns="0" bIns="0" rtlCol="0" anchor="ctr"/>
+          <a:lstStyle/>
+          <a:p>
+            <a:pPr indent="0" marL="0">
+              <a:buNone/>
+            </a:pPr>
+            <a:r>
+              <a:rPr lang="en-US" sz="1150" i="1" dirty="0">
+                <a:solidFill>
+                  <a:srgbClr val="8A9A8F"/>
+                </a:solidFill>
+                <a:latin typeface="Leelawadee UI" pitchFamily="34" charset="0"/>
+                <a:ea typeface="Leelawadee UI" pitchFamily="34" charset="-122"/>
+                <a:cs typeface="Leelawadee UI" pitchFamily="34" charset="-120"/>
+              </a:rPr>
+              <a:t>หลักการนี้ใช้ได้ไม่ว่าเอเจนต์จะเป็น Claude Code หรือ Codex — วิธีทำงานกับ AI agent ตัวไหนก็ได้</a:t>
+            </a:r>
+            <a:endParaRPr lang="en-US" sz="1150" dirty="0"/>
+          </a:p>
+        </p:txBody>
+      </p:sp>
+      <p:sp>
+        <p:nvSpPr>
+          <p:cNvPr id="26" name="Text 24"/>
+          <p:cNvSpPr txBox="1"/>
+          <p:nvPr/>
+        </p:nvSpPr>
+        <p:spPr>
+          <a:xfrm>
+            <a:off x="11368735" y="6355080"/>
+            <a:ext cx="548640" cy="320040"/>
+          </a:xfrm>
+          <a:prstGeom prst="rect">
+            <a:avLst/>
+          </a:prstGeom>
+          <a:noFill/>
+          <a:ln/>
+        </p:spPr>
+        <p:txBody>
+          <a:bodyPr wrap="square" lIns="0" tIns="0" rIns="0" bIns="0" rtlCol="0" anchor="ctr"/>
+          <a:lstStyle/>
+          <a:p>
+            <a:pPr algn="r" indent="0" marL="0">
+              <a:buNone/>
+            </a:pPr>
+            <a:r>
+              <a:rPr lang="en-US" sz="1100" dirty="0">
+                <a:solidFill>
+                  <a:srgbClr val="8A9A8F"/>
+                </a:solidFill>
+                <a:latin typeface="Leelawadee UI" pitchFamily="34" charset="0"/>
+                <a:ea typeface="Leelawadee UI" pitchFamily="34" charset="-122"/>
+                <a:cs typeface="Leelawadee UI" pitchFamily="34" charset="-120"/>
+              </a:rPr>
+              <a:t>16</a:t>
+            </a:r>
+            <a:endParaRPr lang="en-US" sz="1100" dirty="0"/>
+          </a:p>
+        </p:txBody>
+      </p:sp>
+    </p:spTree>
+  </p:cSld>
+  <p:clrMapOvr>
+    <a:masterClrMapping/>
+  </p:clrMapOvr>
+</p:sld>
+</file>
+
+<file path=ppt/slides/slide17.xml><?xml version="1.0" encoding="utf-8"?>
+<p:sld xmlns:a="http://schemas.openxmlformats.org/drawingml/2006/main" xmlns:r="http://schemas.openxmlformats.org/officeDocument/2006/relationships" xmlns:p="http://schemas.openxmlformats.org/presentationml/2006/main">
+  <p:cSld name="Slide 17">
     <p:bg>
       <p:bgPr>
         <a:solidFill>
@@ -11889,7 +13593,7 @@
                 <a:ea typeface="Leelawadee UI" pitchFamily="34" charset="-122"/>
                 <a:cs typeface="Leelawadee UI" pitchFamily="34" charset="-120"/>
               </a:rPr>
-              <a:t>งบประมาณ</a:t>
+              <a:t>ใช้ได้กว้างกว่าที่คิด</a:t>
             </a:r>
             <a:endParaRPr lang="en-US" sz="1300" dirty="0"/>
           </a:p>
@@ -11920,6 +13624,832 @@
               <a:buNone/>
             </a:pPr>
             <a:r>
+              <a:rPr lang="en-US" sz="2500" b="1" dirty="0">
+                <a:solidFill>
+                  <a:srgbClr val="1E2E28"/>
+                </a:solidFill>
+                <a:latin typeface="Leelawadee UI" pitchFamily="34" charset="0"/>
+                <a:ea typeface="Leelawadee UI" pitchFamily="34" charset="-122"/>
+                <a:cs typeface="Leelawadee UI" pitchFamily="34" charset="-120"/>
+              </a:rPr>
+              <a:t>ไม่ใช่แค่งานสายเทค — งานเอกสารก็ใช้ได้</a:t>
+            </a:r>
+            <a:endParaRPr lang="en-US" sz="2500" dirty="0"/>
+          </a:p>
+        </p:txBody>
+      </p:sp>
+      <p:sp>
+        <p:nvSpPr>
+          <p:cNvPr id="6" name="Shape 4"/>
+          <p:cNvSpPr/>
+          <p:nvPr/>
+        </p:nvSpPr>
+        <p:spPr>
+          <a:xfrm>
+            <a:off x="548640" y="1874520"/>
+            <a:ext cx="2560320" cy="4023360"/>
+          </a:xfrm>
+          <a:prstGeom prst="roundRect">
+            <a:avLst>
+              <a:gd name="adj" fmla="val 4286"/>
+            </a:avLst>
+          </a:prstGeom>
+          <a:solidFill>
+            <a:srgbClr val="FFFFFF"/>
+          </a:solidFill>
+          <a:ln w="12700">
+            <a:solidFill>
+              <a:srgbClr val="D9DECB"/>
+            </a:solidFill>
+            <a:prstDash val="solid"/>
+          </a:ln>
+          <a:effectLst>
+            <a:outerShdw sx="100000" sy="100000" kx="0" ky="0" algn="bl" rotWithShape="0" blurRad="76200" dist="25400" dir="5400000">
+              <a:srgbClr val="1E2E28">
+                <a:alpha val="12000"/>
+              </a:srgbClr>
+            </a:outerShdw>
+          </a:effectLst>
+        </p:spPr>
+      </p:sp>
+      <p:sp>
+        <p:nvSpPr>
+          <p:cNvPr id="7" name="Text 5"/>
+          <p:cNvSpPr txBox="1"/>
+          <p:nvPr/>
+        </p:nvSpPr>
+        <p:spPr>
+          <a:xfrm>
+            <a:off x="749808" y="2039112"/>
+            <a:ext cx="548640" cy="457200"/>
+          </a:xfrm>
+          <a:prstGeom prst="rect">
+            <a:avLst/>
+          </a:prstGeom>
+          <a:noFill/>
+          <a:ln/>
+        </p:spPr>
+        <p:txBody>
+          <a:bodyPr wrap="square" lIns="0" tIns="0" rIns="0" bIns="0" rtlCol="0" anchor="ctr"/>
+          <a:lstStyle/>
+          <a:p>
+            <a:pPr indent="0" marL="0">
+              <a:buNone/>
+            </a:pPr>
+            <a:r>
+              <a:rPr lang="en-US" sz="2400" dirty="0">
+                <a:solidFill>
+                  <a:srgbClr val="000000"/>
+                </a:solidFill>
+                <a:latin typeface="Leelawadee UI" pitchFamily="34" charset="0"/>
+                <a:ea typeface="Leelawadee UI" pitchFamily="34" charset="-122"/>
+                <a:cs typeface="Leelawadee UI" pitchFamily="34" charset="-120"/>
+              </a:rPr>
+              <a:t>📋</a:t>
+            </a:r>
+            <a:endParaRPr lang="en-US" sz="2400" dirty="0"/>
+          </a:p>
+        </p:txBody>
+      </p:sp>
+      <p:sp>
+        <p:nvSpPr>
+          <p:cNvPr id="8" name="Text 6"/>
+          <p:cNvSpPr txBox="1"/>
+          <p:nvPr/>
+        </p:nvSpPr>
+        <p:spPr>
+          <a:xfrm>
+            <a:off x="749808" y="2441448"/>
+            <a:ext cx="2157984" cy="457200"/>
+          </a:xfrm>
+          <a:prstGeom prst="rect">
+            <a:avLst/>
+          </a:prstGeom>
+          <a:noFill/>
+          <a:ln/>
+        </p:spPr>
+        <p:txBody>
+          <a:bodyPr wrap="square" lIns="0" tIns="0" rIns="0" bIns="0" rtlCol="0" anchor="t"/>
+          <a:lstStyle/>
+          <a:p>
+            <a:pPr indent="0" marL="0">
+              <a:buNone/>
+            </a:pPr>
+            <a:r>
+              <a:rPr lang="en-US" sz="1450" b="1" dirty="0">
+                <a:solidFill>
+                  <a:srgbClr val="1E2E28"/>
+                </a:solidFill>
+                <a:latin typeface="Leelawadee UI" pitchFamily="34" charset="0"/>
+                <a:ea typeface="Leelawadee UI" pitchFamily="34" charset="-122"/>
+                <a:cs typeface="Leelawadee UI" pitchFamily="34" charset="-120"/>
+              </a:rPr>
+              <a:t>ร่าง TOR ประกวดราคา</a:t>
+            </a:r>
+            <a:endParaRPr lang="en-US" sz="1450" dirty="0"/>
+          </a:p>
+        </p:txBody>
+      </p:sp>
+      <p:sp>
+        <p:nvSpPr>
+          <p:cNvPr id="9" name="Text 7"/>
+          <p:cNvSpPr txBox="1"/>
+          <p:nvPr/>
+        </p:nvSpPr>
+        <p:spPr>
+          <a:xfrm>
+            <a:off x="749808" y="2862072"/>
+            <a:ext cx="2157984" cy="2871216"/>
+          </a:xfrm>
+          <a:prstGeom prst="rect">
+            <a:avLst/>
+          </a:prstGeom>
+          <a:noFill/>
+          <a:ln/>
+        </p:spPr>
+        <p:txBody>
+          <a:bodyPr wrap="square" lIns="0" tIns="0" rIns="0" bIns="0" rtlCol="0" anchor="t"/>
+          <a:lstStyle/>
+          <a:p>
+            <a:pPr indent="0" marL="0">
+              <a:lnSpc>
+                <a:spcPct val="115000"/>
+              </a:lnSpc>
+              <a:buNone/>
+            </a:pPr>
+            <a:r>
+              <a:rPr lang="en-US" sz="1100" dirty="0">
+                <a:solidFill>
+                  <a:srgbClr val="55685D"/>
+                </a:solidFill>
+                <a:latin typeface="Leelawadee UI" pitchFamily="34" charset="0"/>
+                <a:ea typeface="Leelawadee UI" pitchFamily="34" charset="-122"/>
+                <a:cs typeface="Leelawadee UI" pitchFamily="34" charset="-120"/>
+              </a:rPr>
+              <a:t>ป้อนไฟล์ TOR เก่า ให้ร่างขอบเขตงาน คุณสมบัติผู้เสนอราคา และเกณฑ์ให้คะแนนของงานใหม่</a:t>
+            </a:r>
+            <a:endParaRPr lang="en-US" sz="1100" dirty="0"/>
+          </a:p>
+        </p:txBody>
+      </p:sp>
+      <p:sp>
+        <p:nvSpPr>
+          <p:cNvPr id="10" name="Shape 8"/>
+          <p:cNvSpPr/>
+          <p:nvPr/>
+        </p:nvSpPr>
+        <p:spPr>
+          <a:xfrm>
+            <a:off x="3319272" y="1874520"/>
+            <a:ext cx="2560320" cy="4023360"/>
+          </a:xfrm>
+          <a:prstGeom prst="roundRect">
+            <a:avLst>
+              <a:gd name="adj" fmla="val 4286"/>
+            </a:avLst>
+          </a:prstGeom>
+          <a:solidFill>
+            <a:srgbClr val="FFFFFF"/>
+          </a:solidFill>
+          <a:ln w="12700">
+            <a:solidFill>
+              <a:srgbClr val="D9DECB"/>
+            </a:solidFill>
+            <a:prstDash val="solid"/>
+          </a:ln>
+          <a:effectLst>
+            <a:outerShdw sx="100000" sy="100000" kx="0" ky="0" algn="bl" rotWithShape="0" blurRad="76200" dist="25400" dir="5400000">
+              <a:srgbClr val="1E2E28">
+                <a:alpha val="12000"/>
+              </a:srgbClr>
+            </a:outerShdw>
+          </a:effectLst>
+        </p:spPr>
+      </p:sp>
+      <p:sp>
+        <p:nvSpPr>
+          <p:cNvPr id="11" name="Text 9"/>
+          <p:cNvSpPr txBox="1"/>
+          <p:nvPr/>
+        </p:nvSpPr>
+        <p:spPr>
+          <a:xfrm>
+            <a:off x="3520440" y="2039112"/>
+            <a:ext cx="548640" cy="457200"/>
+          </a:xfrm>
+          <a:prstGeom prst="rect">
+            <a:avLst/>
+          </a:prstGeom>
+          <a:noFill/>
+          <a:ln/>
+        </p:spPr>
+        <p:txBody>
+          <a:bodyPr wrap="square" lIns="0" tIns="0" rIns="0" bIns="0" rtlCol="0" anchor="ctr"/>
+          <a:lstStyle/>
+          <a:p>
+            <a:pPr indent="0" marL="0">
+              <a:buNone/>
+            </a:pPr>
+            <a:r>
+              <a:rPr lang="en-US" sz="2400" dirty="0">
+                <a:solidFill>
+                  <a:srgbClr val="000000"/>
+                </a:solidFill>
+                <a:latin typeface="Leelawadee UI" pitchFamily="34" charset="0"/>
+                <a:ea typeface="Leelawadee UI" pitchFamily="34" charset="-122"/>
+                <a:cs typeface="Leelawadee UI" pitchFamily="34" charset="-120"/>
+              </a:rPr>
+              <a:t>🧾</a:t>
+            </a:r>
+            <a:endParaRPr lang="en-US" sz="2400" dirty="0"/>
+          </a:p>
+        </p:txBody>
+      </p:sp>
+      <p:sp>
+        <p:nvSpPr>
+          <p:cNvPr id="12" name="Text 10"/>
+          <p:cNvSpPr txBox="1"/>
+          <p:nvPr/>
+        </p:nvSpPr>
+        <p:spPr>
+          <a:xfrm>
+            <a:off x="3520440" y="2441448"/>
+            <a:ext cx="2157984" cy="457200"/>
+          </a:xfrm>
+          <a:prstGeom prst="rect">
+            <a:avLst/>
+          </a:prstGeom>
+          <a:noFill/>
+          <a:ln/>
+        </p:spPr>
+        <p:txBody>
+          <a:bodyPr wrap="square" lIns="0" tIns="0" rIns="0" bIns="0" rtlCol="0" anchor="t"/>
+          <a:lstStyle/>
+          <a:p>
+            <a:pPr indent="0" marL="0">
+              <a:buNone/>
+            </a:pPr>
+            <a:r>
+              <a:rPr lang="en-US" sz="1450" b="1" dirty="0">
+                <a:solidFill>
+                  <a:srgbClr val="1E2E28"/>
+                </a:solidFill>
+                <a:latin typeface="Leelawadee UI" pitchFamily="34" charset="0"/>
+                <a:ea typeface="Leelawadee UI" pitchFamily="34" charset="-122"/>
+                <a:cs typeface="Leelawadee UI" pitchFamily="34" charset="-120"/>
+              </a:rPr>
+              <a:t>สร้าง BOM อัตโนมัติ</a:t>
+            </a:r>
+            <a:endParaRPr lang="en-US" sz="1450" dirty="0"/>
+          </a:p>
+        </p:txBody>
+      </p:sp>
+      <p:sp>
+        <p:nvSpPr>
+          <p:cNvPr id="13" name="Text 11"/>
+          <p:cNvSpPr txBox="1"/>
+          <p:nvPr/>
+        </p:nvSpPr>
+        <p:spPr>
+          <a:xfrm>
+            <a:off x="3520440" y="2862072"/>
+            <a:ext cx="2157984" cy="2871216"/>
+          </a:xfrm>
+          <a:prstGeom prst="rect">
+            <a:avLst/>
+          </a:prstGeom>
+          <a:noFill/>
+          <a:ln/>
+        </p:spPr>
+        <p:txBody>
+          <a:bodyPr wrap="square" lIns="0" tIns="0" rIns="0" bIns="0" rtlCol="0" anchor="t"/>
+          <a:lstStyle/>
+          <a:p>
+            <a:pPr indent="0" marL="0">
+              <a:lnSpc>
+                <a:spcPct val="115000"/>
+              </a:lnSpc>
+              <a:buNone/>
+            </a:pPr>
+            <a:r>
+              <a:rPr lang="en-US" sz="1100" dirty="0">
+                <a:solidFill>
+                  <a:srgbClr val="55685D"/>
+                </a:solidFill>
+                <a:latin typeface="Leelawadee UI" pitchFamily="34" charset="0"/>
+                <a:ea typeface="Leelawadee UI" pitchFamily="34" charset="-122"/>
+                <a:cs typeface="Leelawadee UI" pitchFamily="34" charset="-120"/>
+              </a:rPr>
+              <a:t>รวมใบเสนอราคา/ใบสั่งซื้อจากหลายไฟล์ Excel หรือ PDF เป็นตาราง BOM เดียว พร้อมราคารวม</a:t>
+            </a:r>
+            <a:endParaRPr lang="en-US" sz="1100" dirty="0"/>
+          </a:p>
+        </p:txBody>
+      </p:sp>
+      <p:sp>
+        <p:nvSpPr>
+          <p:cNvPr id="14" name="Shape 12"/>
+          <p:cNvSpPr/>
+          <p:nvPr/>
+        </p:nvSpPr>
+        <p:spPr>
+          <a:xfrm>
+            <a:off x="6089904" y="1874520"/>
+            <a:ext cx="2560320" cy="4023360"/>
+          </a:xfrm>
+          <a:prstGeom prst="roundRect">
+            <a:avLst>
+              <a:gd name="adj" fmla="val 4286"/>
+            </a:avLst>
+          </a:prstGeom>
+          <a:solidFill>
+            <a:srgbClr val="FFFFFF"/>
+          </a:solidFill>
+          <a:ln w="12700">
+            <a:solidFill>
+              <a:srgbClr val="D9DECB"/>
+            </a:solidFill>
+            <a:prstDash val="solid"/>
+          </a:ln>
+          <a:effectLst>
+            <a:outerShdw sx="100000" sy="100000" kx="0" ky="0" algn="bl" rotWithShape="0" blurRad="76200" dist="25400" dir="5400000">
+              <a:srgbClr val="1E2E28">
+                <a:alpha val="12000"/>
+              </a:srgbClr>
+            </a:outerShdw>
+          </a:effectLst>
+        </p:spPr>
+      </p:sp>
+      <p:sp>
+        <p:nvSpPr>
+          <p:cNvPr id="15" name="Text 13"/>
+          <p:cNvSpPr txBox="1"/>
+          <p:nvPr/>
+        </p:nvSpPr>
+        <p:spPr>
+          <a:xfrm>
+            <a:off x="6291072" y="2039112"/>
+            <a:ext cx="548640" cy="457200"/>
+          </a:xfrm>
+          <a:prstGeom prst="rect">
+            <a:avLst/>
+          </a:prstGeom>
+          <a:noFill/>
+          <a:ln/>
+        </p:spPr>
+        <p:txBody>
+          <a:bodyPr wrap="square" lIns="0" tIns="0" rIns="0" bIns="0" rtlCol="0" anchor="ctr"/>
+          <a:lstStyle/>
+          <a:p>
+            <a:pPr indent="0" marL="0">
+              <a:buNone/>
+            </a:pPr>
+            <a:r>
+              <a:rPr lang="en-US" sz="2400" dirty="0">
+                <a:solidFill>
+                  <a:srgbClr val="000000"/>
+                </a:solidFill>
+                <a:latin typeface="Leelawadee UI" pitchFamily="34" charset="0"/>
+                <a:ea typeface="Leelawadee UI" pitchFamily="34" charset="-122"/>
+                <a:cs typeface="Leelawadee UI" pitchFamily="34" charset="-120"/>
+              </a:rPr>
+              <a:t>📊</a:t>
+            </a:r>
+            <a:endParaRPr lang="en-US" sz="2400" dirty="0"/>
+          </a:p>
+        </p:txBody>
+      </p:sp>
+      <p:sp>
+        <p:nvSpPr>
+          <p:cNvPr id="16" name="Text 14"/>
+          <p:cNvSpPr txBox="1"/>
+          <p:nvPr/>
+        </p:nvSpPr>
+        <p:spPr>
+          <a:xfrm>
+            <a:off x="6291072" y="2441448"/>
+            <a:ext cx="2157984" cy="457200"/>
+          </a:xfrm>
+          <a:prstGeom prst="rect">
+            <a:avLst/>
+          </a:prstGeom>
+          <a:noFill/>
+          <a:ln/>
+        </p:spPr>
+        <p:txBody>
+          <a:bodyPr wrap="square" lIns="0" tIns="0" rIns="0" bIns="0" rtlCol="0" anchor="t"/>
+          <a:lstStyle/>
+          <a:p>
+            <a:pPr indent="0" marL="0">
+              <a:buNone/>
+            </a:pPr>
+            <a:r>
+              <a:rPr lang="en-US" sz="1450" b="1" dirty="0">
+                <a:solidFill>
+                  <a:srgbClr val="1E2E28"/>
+                </a:solidFill>
+                <a:latin typeface="Leelawadee UI" pitchFamily="34" charset="0"/>
+                <a:ea typeface="Leelawadee UI" pitchFamily="34" charset="-122"/>
+                <a:cs typeface="Leelawadee UI" pitchFamily="34" charset="-120"/>
+              </a:rPr>
+              <a:t>สรุปกระแสเงินสด</a:t>
+            </a:r>
+            <a:endParaRPr lang="en-US" sz="1450" dirty="0"/>
+          </a:p>
+        </p:txBody>
+      </p:sp>
+      <p:sp>
+        <p:nvSpPr>
+          <p:cNvPr id="17" name="Text 15"/>
+          <p:cNvSpPr txBox="1"/>
+          <p:nvPr/>
+        </p:nvSpPr>
+        <p:spPr>
+          <a:xfrm>
+            <a:off x="6291072" y="2862072"/>
+            <a:ext cx="2157984" cy="2871216"/>
+          </a:xfrm>
+          <a:prstGeom prst="rect">
+            <a:avLst/>
+          </a:prstGeom>
+          <a:noFill/>
+          <a:ln/>
+        </p:spPr>
+        <p:txBody>
+          <a:bodyPr wrap="square" lIns="0" tIns="0" rIns="0" bIns="0" rtlCol="0" anchor="t"/>
+          <a:lstStyle/>
+          <a:p>
+            <a:pPr indent="0" marL="0">
+              <a:lnSpc>
+                <a:spcPct val="115000"/>
+              </a:lnSpc>
+              <a:buNone/>
+            </a:pPr>
+            <a:r>
+              <a:rPr lang="en-US" sz="1100" dirty="0">
+                <a:solidFill>
+                  <a:srgbClr val="55685D"/>
+                </a:solidFill>
+                <a:latin typeface="Leelawadee UI" pitchFamily="34" charset="0"/>
+                <a:ea typeface="Leelawadee UI" pitchFamily="34" charset="-122"/>
+                <a:cs typeface="Leelawadee UI" pitchFamily="34" charset="-120"/>
+              </a:rPr>
+              <a:t>อ่าน PDF สเตทเมนต์ธนาคารหรืองบดุลหลายเดือน สรุปเป็นตาราง Excel ให้ดูง่าย</a:t>
+            </a:r>
+            <a:endParaRPr lang="en-US" sz="1100" dirty="0"/>
+          </a:p>
+        </p:txBody>
+      </p:sp>
+      <p:sp>
+        <p:nvSpPr>
+          <p:cNvPr id="18" name="Shape 16"/>
+          <p:cNvSpPr/>
+          <p:nvPr/>
+        </p:nvSpPr>
+        <p:spPr>
+          <a:xfrm>
+            <a:off x="8860536" y="1874520"/>
+            <a:ext cx="2560320" cy="4023360"/>
+          </a:xfrm>
+          <a:prstGeom prst="roundRect">
+            <a:avLst>
+              <a:gd name="adj" fmla="val 4286"/>
+            </a:avLst>
+          </a:prstGeom>
+          <a:solidFill>
+            <a:srgbClr val="FFFFFF"/>
+          </a:solidFill>
+          <a:ln w="12700">
+            <a:solidFill>
+              <a:srgbClr val="D9DECB"/>
+            </a:solidFill>
+            <a:prstDash val="solid"/>
+          </a:ln>
+          <a:effectLst>
+            <a:outerShdw sx="100000" sy="100000" kx="0" ky="0" algn="bl" rotWithShape="0" blurRad="76200" dist="25400" dir="5400000">
+              <a:srgbClr val="1E2E28">
+                <a:alpha val="12000"/>
+              </a:srgbClr>
+            </a:outerShdw>
+          </a:effectLst>
+        </p:spPr>
+      </p:sp>
+      <p:sp>
+        <p:nvSpPr>
+          <p:cNvPr id="19" name="Text 17"/>
+          <p:cNvSpPr txBox="1"/>
+          <p:nvPr/>
+        </p:nvSpPr>
+        <p:spPr>
+          <a:xfrm>
+            <a:off x="9061704" y="2039112"/>
+            <a:ext cx="548640" cy="457200"/>
+          </a:xfrm>
+          <a:prstGeom prst="rect">
+            <a:avLst/>
+          </a:prstGeom>
+          <a:noFill/>
+          <a:ln/>
+        </p:spPr>
+        <p:txBody>
+          <a:bodyPr wrap="square" lIns="0" tIns="0" rIns="0" bIns="0" rtlCol="0" anchor="ctr"/>
+          <a:lstStyle/>
+          <a:p>
+            <a:pPr indent="0" marL="0">
+              <a:buNone/>
+            </a:pPr>
+            <a:r>
+              <a:rPr lang="en-US" sz="2400" dirty="0">
+                <a:solidFill>
+                  <a:srgbClr val="000000"/>
+                </a:solidFill>
+                <a:latin typeface="Leelawadee UI" pitchFamily="34" charset="0"/>
+                <a:ea typeface="Leelawadee UI" pitchFamily="34" charset="-122"/>
+                <a:cs typeface="Leelawadee UI" pitchFamily="34" charset="-120"/>
+              </a:rPr>
+              <a:t>🧾</a:t>
+            </a:r>
+            <a:endParaRPr lang="en-US" sz="2400" dirty="0"/>
+          </a:p>
+        </p:txBody>
+      </p:sp>
+      <p:sp>
+        <p:nvSpPr>
+          <p:cNvPr id="20" name="Text 18"/>
+          <p:cNvSpPr txBox="1"/>
+          <p:nvPr/>
+        </p:nvSpPr>
+        <p:spPr>
+          <a:xfrm>
+            <a:off x="9061704" y="2441448"/>
+            <a:ext cx="2157984" cy="457200"/>
+          </a:xfrm>
+          <a:prstGeom prst="rect">
+            <a:avLst/>
+          </a:prstGeom>
+          <a:noFill/>
+          <a:ln/>
+        </p:spPr>
+        <p:txBody>
+          <a:bodyPr wrap="square" lIns="0" tIns="0" rIns="0" bIns="0" rtlCol="0" anchor="t"/>
+          <a:lstStyle/>
+          <a:p>
+            <a:pPr indent="0" marL="0">
+              <a:buNone/>
+            </a:pPr>
+            <a:r>
+              <a:rPr lang="en-US" sz="1450" b="1" dirty="0">
+                <a:solidFill>
+                  <a:srgbClr val="1E2E28"/>
+                </a:solidFill>
+                <a:latin typeface="Leelawadee UI" pitchFamily="34" charset="0"/>
+                <a:ea typeface="Leelawadee UI" pitchFamily="34" charset="-122"/>
+                <a:cs typeface="Leelawadee UI" pitchFamily="34" charset="-120"/>
+              </a:rPr>
+              <a:t>เทียบใบเสนอราคาประมูล</a:t>
+            </a:r>
+            <a:endParaRPr lang="en-US" sz="1450" dirty="0"/>
+          </a:p>
+        </p:txBody>
+      </p:sp>
+      <p:sp>
+        <p:nvSpPr>
+          <p:cNvPr id="21" name="Text 19"/>
+          <p:cNvSpPr txBox="1"/>
+          <p:nvPr/>
+        </p:nvSpPr>
+        <p:spPr>
+          <a:xfrm>
+            <a:off x="9061704" y="2862072"/>
+            <a:ext cx="2157984" cy="2871216"/>
+          </a:xfrm>
+          <a:prstGeom prst="rect">
+            <a:avLst/>
+          </a:prstGeom>
+          <a:noFill/>
+          <a:ln/>
+        </p:spPr>
+        <p:txBody>
+          <a:bodyPr wrap="square" lIns="0" tIns="0" rIns="0" bIns="0" rtlCol="0" anchor="t"/>
+          <a:lstStyle/>
+          <a:p>
+            <a:pPr indent="0" marL="0">
+              <a:lnSpc>
+                <a:spcPct val="115000"/>
+              </a:lnSpc>
+              <a:buNone/>
+            </a:pPr>
+            <a:r>
+              <a:rPr lang="en-US" sz="1100" dirty="0">
+                <a:solidFill>
+                  <a:srgbClr val="55685D"/>
+                </a:solidFill>
+                <a:latin typeface="Leelawadee UI" pitchFamily="34" charset="0"/>
+                <a:ea typeface="Leelawadee UI" pitchFamily="34" charset="-122"/>
+                <a:cs typeface="Leelawadee UI" pitchFamily="34" charset="-120"/>
+              </a:rPr>
+              <a:t>อ่านใบเสนอราคาของผู้เสนอราคาแต่ละราย เรียงเทียบกันในตารางเดียว พร้อมชี้จุดที่ไม่ตรงกัน</a:t>
+            </a:r>
+            <a:endParaRPr lang="en-US" sz="1100" dirty="0"/>
+          </a:p>
+        </p:txBody>
+      </p:sp>
+      <p:sp>
+        <p:nvSpPr>
+          <p:cNvPr id="22" name="Text 20"/>
+          <p:cNvSpPr txBox="1"/>
+          <p:nvPr/>
+        </p:nvSpPr>
+        <p:spPr>
+          <a:xfrm>
+            <a:off x="11368735" y="6355080"/>
+            <a:ext cx="548640" cy="320040"/>
+          </a:xfrm>
+          <a:prstGeom prst="rect">
+            <a:avLst/>
+          </a:prstGeom>
+          <a:noFill/>
+          <a:ln/>
+        </p:spPr>
+        <p:txBody>
+          <a:bodyPr wrap="square" lIns="0" tIns="0" rIns="0" bIns="0" rtlCol="0" anchor="ctr"/>
+          <a:lstStyle/>
+          <a:p>
+            <a:pPr algn="r" indent="0" marL="0">
+              <a:buNone/>
+            </a:pPr>
+            <a:r>
+              <a:rPr lang="en-US" sz="1100" dirty="0">
+                <a:solidFill>
+                  <a:srgbClr val="8A9A8F"/>
+                </a:solidFill>
+                <a:latin typeface="Leelawadee UI" pitchFamily="34" charset="0"/>
+                <a:ea typeface="Leelawadee UI" pitchFamily="34" charset="-122"/>
+                <a:cs typeface="Leelawadee UI" pitchFamily="34" charset="-120"/>
+              </a:rPr>
+              <a:t>07</a:t>
+            </a:r>
+            <a:endParaRPr lang="en-US" sz="1100" dirty="0"/>
+          </a:p>
+        </p:txBody>
+      </p:sp>
+    </p:spTree>
+  </p:cSld>
+  <p:clrMapOvr>
+    <a:masterClrMapping/>
+  </p:clrMapOvr>
+</p:sld>
+</file>
+
+<file path=ppt/slides/slide8.xml><?xml version="1.0" encoding="utf-8"?>
+<p:sld xmlns:a="http://schemas.openxmlformats.org/drawingml/2006/main" xmlns:r="http://schemas.openxmlformats.org/officeDocument/2006/relationships" xmlns:p="http://schemas.openxmlformats.org/presentationml/2006/main">
+  <p:cSld name="Slide 8">
+    <p:bg>
+      <p:bgPr>
+        <a:solidFill>
+          <a:srgbClr val="F1F3EC"/>
+        </a:solidFill>
+      </p:bgPr>
+    </p:bg>
+    <p:spTree>
+      <p:nvGrpSpPr>
+        <p:cNvPr id="1" name=""/>
+        <p:cNvGrpSpPr/>
+        <p:nvPr/>
+      </p:nvGrpSpPr>
+      <p:grpSpPr>
+        <a:xfrm>
+          <a:off x="0" y="0"/>
+          <a:ext cx="0" cy="0"/>
+          <a:chOff x="0" y="0"/>
+          <a:chExt cx="0" cy="0"/>
+        </a:xfrm>
+      </p:grpSpPr>
+      <p:sp>
+        <p:nvSpPr>
+          <p:cNvPr id="2" name="Shape 0"/>
+          <p:cNvSpPr/>
+          <p:nvPr/>
+        </p:nvSpPr>
+        <p:spPr>
+          <a:xfrm>
+            <a:off x="9814255" y="384048"/>
+            <a:ext cx="1828800" cy="384048"/>
+          </a:xfrm>
+          <a:prstGeom prst="roundRect">
+            <a:avLst>
+              <a:gd name="adj" fmla="val 50000"/>
+            </a:avLst>
+          </a:prstGeom>
+          <a:solidFill>
+            <a:srgbClr val="EFDCBB"/>
+          </a:solidFill>
+          <a:ln/>
+        </p:spPr>
+      </p:sp>
+      <p:sp>
+        <p:nvSpPr>
+          <p:cNvPr id="3" name="Text 1"/>
+          <p:cNvSpPr txBox="1"/>
+          <p:nvPr/>
+        </p:nvSpPr>
+        <p:spPr>
+          <a:xfrm>
+            <a:off x="9814255" y="384048"/>
+            <a:ext cx="1828800" cy="384048"/>
+          </a:xfrm>
+          <a:prstGeom prst="rect">
+            <a:avLst/>
+          </a:prstGeom>
+          <a:noFill/>
+          <a:ln/>
+        </p:spPr>
+        <p:txBody>
+          <a:bodyPr wrap="square" lIns="0" tIns="0" rIns="0" bIns="0" rtlCol="0" anchor="ctr"/>
+          <a:lstStyle/>
+          <a:p>
+            <a:pPr algn="ctr" indent="0" marL="0">
+              <a:buNone/>
+            </a:pPr>
+            <a:r>
+              <a:rPr lang="en-US" sz="1200" b="1" dirty="0">
+                <a:solidFill>
+                  <a:srgbClr val="C97F1E"/>
+                </a:solidFill>
+                <a:latin typeface="Leelawadee UI" pitchFamily="34" charset="0"/>
+                <a:ea typeface="Leelawadee UI" pitchFamily="34" charset="-122"/>
+                <a:cs typeface="Leelawadee UI" pitchFamily="34" charset="-120"/>
+              </a:rPr>
+              <a:t>มือใหม่</a:t>
+            </a:r>
+            <a:endParaRPr lang="en-US" sz="1200" dirty="0"/>
+          </a:p>
+        </p:txBody>
+      </p:sp>
+      <p:sp>
+        <p:nvSpPr>
+          <p:cNvPr id="4" name="Text 2"/>
+          <p:cNvSpPr txBox="1"/>
+          <p:nvPr/>
+        </p:nvSpPr>
+        <p:spPr>
+          <a:xfrm>
+            <a:off x="548640" y="384048"/>
+            <a:ext cx="7315200" cy="365760"/>
+          </a:xfrm>
+          <a:prstGeom prst="rect">
+            <a:avLst/>
+          </a:prstGeom>
+          <a:noFill/>
+          <a:ln/>
+        </p:spPr>
+        <p:txBody>
+          <a:bodyPr wrap="square" lIns="0" tIns="0" rIns="0" bIns="0" rtlCol="0" anchor="ctr"/>
+          <a:lstStyle/>
+          <a:p>
+            <a:pPr indent="0" marL="0">
+              <a:buNone/>
+            </a:pPr>
+            <a:r>
+              <a:rPr lang="en-US" sz="1300" b="1" spc="200" kern="0" dirty="0">
+                <a:solidFill>
+                  <a:srgbClr val="C97F1E"/>
+                </a:solidFill>
+                <a:latin typeface="Leelawadee UI" pitchFamily="34" charset="0"/>
+                <a:ea typeface="Leelawadee UI" pitchFamily="34" charset="-122"/>
+                <a:cs typeface="Leelawadee UI" pitchFamily="34" charset="-120"/>
+              </a:rPr>
+              <a:t>งบประมาณ</a:t>
+            </a:r>
+            <a:endParaRPr lang="en-US" sz="1300" dirty="0"/>
+          </a:p>
+        </p:txBody>
+      </p:sp>
+      <p:sp>
+        <p:nvSpPr>
+          <p:cNvPr id="5" name="Text 3"/>
+          <p:cNvSpPr txBox="1"/>
+          <p:nvPr/>
+        </p:nvSpPr>
+        <p:spPr>
+          <a:xfrm>
+            <a:off x="548640" y="713232"/>
+            <a:ext cx="9601200" cy="822960"/>
+          </a:xfrm>
+          <a:prstGeom prst="rect">
+            <a:avLst/>
+          </a:prstGeom>
+          <a:noFill/>
+          <a:ln/>
+        </p:spPr>
+        <p:txBody>
+          <a:bodyPr wrap="square" lIns="0" tIns="0" rIns="0" bIns="0" rtlCol="0" anchor="ctr"/>
+          <a:lstStyle/>
+          <a:p>
+            <a:pPr indent="0" marL="0">
+              <a:buNone/>
+            </a:pPr>
+            <a:r>
               <a:rPr lang="en-US" sz="3000" b="1" dirty="0">
                 <a:solidFill>
                   <a:srgbClr val="1E2E28"/>
@@ -11936,7 +14466,7 @@
       </p:sp>
       <p:graphicFrame>
         <p:nvGraphicFramePr>
-          <p:cNvPr id="8" name="Table 0"/>
+          <p:cNvPr id="9" name="Table 0"/>
           <p:cNvGraphicFramePr>
             <a:graphicFrameLocks noGrp="1"/>
           </p:cNvGraphicFramePr>
@@ -13067,7 +15597,7 @@
                 <a:ea typeface="Leelawadee UI" pitchFamily="34" charset="-122"/>
                 <a:cs typeface="Leelawadee UI" pitchFamily="34" charset="-120"/>
               </a:rPr>
-              <a:t>07</a:t>
+              <a:t>08</a:t>
             </a:r>
             <a:endParaRPr lang="en-US" sz="1100" dirty="0"/>
           </a:p>
@@ -13081,9 +15611,9 @@
 </p:sld>
 </file>
 
-<file path=ppt/slides/slide8.xml><?xml version="1.0" encoding="utf-8"?>
+<file path=ppt/slides/slide9.xml><?xml version="1.0" encoding="utf-8"?>
 <p:sld xmlns:a="http://schemas.openxmlformats.org/drawingml/2006/main" xmlns:r="http://schemas.openxmlformats.org/officeDocument/2006/relationships" xmlns:p="http://schemas.openxmlformats.org/presentationml/2006/main">
-  <p:cSld name="Slide 8">
+  <p:cSld name="Slide 9">
     <p:bg>
       <p:bgPr>
         <a:solidFill>
@@ -13572,516 +16102,6 @@
       <p:sp>
         <p:nvSpPr>
           <p:cNvPr id="16" name="Text 14"/>
-          <p:cNvSpPr txBox="1"/>
-          <p:nvPr/>
-        </p:nvSpPr>
-        <p:spPr>
-          <a:xfrm>
-            <a:off x="11368735" y="6355080"/>
-            <a:ext cx="548640" cy="320040"/>
-          </a:xfrm>
-          <a:prstGeom prst="rect">
-            <a:avLst/>
-          </a:prstGeom>
-          <a:noFill/>
-          <a:ln/>
-        </p:spPr>
-        <p:txBody>
-          <a:bodyPr wrap="square" lIns="0" tIns="0" rIns="0" bIns="0" rtlCol="0" anchor="ctr"/>
-          <a:lstStyle/>
-          <a:p>
-            <a:pPr algn="r" indent="0" marL="0">
-              <a:buNone/>
-            </a:pPr>
-            <a:r>
-              <a:rPr lang="en-US" sz="1100" dirty="0">
-                <a:solidFill>
-                  <a:srgbClr val="8A9A8F"/>
-                </a:solidFill>
-                <a:latin typeface="Leelawadee UI" pitchFamily="34" charset="0"/>
-                <a:ea typeface="Leelawadee UI" pitchFamily="34" charset="-122"/>
-                <a:cs typeface="Leelawadee UI" pitchFamily="34" charset="-120"/>
-              </a:rPr>
-              <a:t>08</a:t>
-            </a:r>
-            <a:endParaRPr lang="en-US" sz="1100" dirty="0"/>
-          </a:p>
-        </p:txBody>
-      </p:sp>
-    </p:spTree>
-  </p:cSld>
-  <p:clrMapOvr>
-    <a:masterClrMapping/>
-  </p:clrMapOvr>
-</p:sld>
-</file>
-
-<file path=ppt/slides/slide9.xml><?xml version="1.0" encoding="utf-8"?>
-<p:sld xmlns:a="http://schemas.openxmlformats.org/drawingml/2006/main" xmlns:r="http://schemas.openxmlformats.org/officeDocument/2006/relationships" xmlns:p="http://schemas.openxmlformats.org/presentationml/2006/main">
-  <p:cSld name="Slide 9">
-    <p:bg>
-      <p:bgPr>
-        <a:solidFill>
-          <a:srgbClr val="14201B"/>
-        </a:solidFill>
-      </p:bgPr>
-    </p:bg>
-    <p:spTree>
-      <p:nvGrpSpPr>
-        <p:cNvPr id="1" name=""/>
-        <p:cNvGrpSpPr/>
-        <p:nvPr/>
-      </p:nvGrpSpPr>
-      <p:grpSpPr>
-        <a:xfrm>
-          <a:off x="0" y="0"/>
-          <a:ext cx="0" cy="0"/>
-          <a:chOff x="0" y="0"/>
-          <a:chExt cx="0" cy="0"/>
-        </a:xfrm>
-      </p:grpSpPr>
-      <p:sp>
-        <p:nvSpPr>
-          <p:cNvPr id="2" name="Shape 0"/>
-          <p:cNvSpPr/>
-          <p:nvPr/>
-        </p:nvSpPr>
-        <p:spPr>
-          <a:xfrm>
-            <a:off x="548640" y="457200"/>
-            <a:ext cx="1920240" cy="411480"/>
-          </a:xfrm>
-          <a:prstGeom prst="roundRect">
-            <a:avLst>
-              <a:gd name="adj" fmla="val 48889"/>
-            </a:avLst>
-          </a:prstGeom>
-          <a:solidFill>
-            <a:srgbClr val="C97F1E"/>
-          </a:solidFill>
-          <a:ln/>
-        </p:spPr>
-      </p:sp>
-      <p:sp>
-        <p:nvSpPr>
-          <p:cNvPr id="3" name="Text 1"/>
-          <p:cNvSpPr txBox="1"/>
-          <p:nvPr/>
-        </p:nvSpPr>
-        <p:spPr>
-          <a:xfrm>
-            <a:off x="548640" y="457200"/>
-            <a:ext cx="1920240" cy="411480"/>
-          </a:xfrm>
-          <a:prstGeom prst="rect">
-            <a:avLst/>
-          </a:prstGeom>
-          <a:noFill/>
-          <a:ln/>
-        </p:spPr>
-        <p:txBody>
-          <a:bodyPr wrap="square" lIns="0" tIns="0" rIns="0" bIns="0" rtlCol="0" anchor="ctr"/>
-          <a:lstStyle/>
-          <a:p>
-            <a:pPr algn="ctr" indent="0" marL="0">
-              <a:buNone/>
-            </a:pPr>
-            <a:r>
-              <a:rPr lang="en-US" sz="1300" b="1" dirty="0">
-                <a:solidFill>
-                  <a:srgbClr val="14201B"/>
-                </a:solidFill>
-                <a:latin typeface="Leelawadee UI" pitchFamily="34" charset="0"/>
-                <a:ea typeface="Leelawadee UI" pitchFamily="34" charset="-122"/>
-                <a:cs typeface="Leelawadee UI" pitchFamily="34" charset="-120"/>
-              </a:rPr>
-              <a:t>ใหม่ล่าสุด</a:t>
-            </a:r>
-            <a:endParaRPr lang="en-US" sz="1300" dirty="0"/>
-          </a:p>
-        </p:txBody>
-      </p:sp>
-      <p:sp>
-        <p:nvSpPr>
-          <p:cNvPr id="4" name="Text 2"/>
-          <p:cNvSpPr txBox="1"/>
-          <p:nvPr/>
-        </p:nvSpPr>
-        <p:spPr>
-          <a:xfrm>
-            <a:off x="548640" y="1280160"/>
-            <a:ext cx="10515600" cy="1005840"/>
-          </a:xfrm>
-          <a:prstGeom prst="rect">
-            <a:avLst/>
-          </a:prstGeom>
-          <a:noFill/>
-          <a:ln/>
-        </p:spPr>
-        <p:txBody>
-          <a:bodyPr wrap="square" lIns="0" tIns="0" rIns="0" bIns="0" rtlCol="0" anchor="ctr"/>
-          <a:lstStyle/>
-          <a:p>
-            <a:pPr indent="0" marL="0">
-              <a:buNone/>
-            </a:pPr>
-            <a:r>
-              <a:rPr lang="en-US" sz="4000" b="1" dirty="0">
-                <a:solidFill>
-                  <a:srgbClr val="ECF1E8"/>
-                </a:solidFill>
-                <a:latin typeface="Leelawadee UI" pitchFamily="34" charset="0"/>
-                <a:ea typeface="Leelawadee UI" pitchFamily="34" charset="-122"/>
-                <a:cs typeface="Leelawadee UI" pitchFamily="34" charset="-120"/>
-              </a:rPr>
-              <a:t>GPT-6 Astra</a:t>
-            </a:r>
-            <a:endParaRPr lang="en-US" sz="4000" dirty="0"/>
-          </a:p>
-        </p:txBody>
-      </p:sp>
-      <p:sp>
-        <p:nvSpPr>
-          <p:cNvPr id="5" name="Text 3"/>
-          <p:cNvSpPr txBox="1"/>
-          <p:nvPr/>
-        </p:nvSpPr>
-        <p:spPr>
-          <a:xfrm>
-            <a:off x="548640" y="2286000"/>
-            <a:ext cx="10515600" cy="457200"/>
-          </a:xfrm>
-          <a:prstGeom prst="rect">
-            <a:avLst/>
-          </a:prstGeom>
-          <a:noFill/>
-          <a:ln/>
-        </p:spPr>
-        <p:txBody>
-          <a:bodyPr wrap="square" lIns="0" tIns="0" rIns="0" bIns="0" rtlCol="0" anchor="ctr"/>
-          <a:lstStyle/>
-          <a:p>
-            <a:pPr indent="0" marL="0">
-              <a:buNone/>
-            </a:pPr>
-            <a:r>
-              <a:rPr lang="en-US" sz="1800" dirty="0">
-                <a:solidFill>
-                  <a:srgbClr val="86BBA6"/>
-                </a:solidFill>
-                <a:latin typeface="Leelawadee UI" pitchFamily="34" charset="0"/>
-                <a:ea typeface="Leelawadee UI" pitchFamily="34" charset="-122"/>
-                <a:cs typeface="Leelawadee UI" pitchFamily="34" charset="-120"/>
-              </a:rPr>
-              <a:t>โมเดลใหม่ที่ทำให้ Codex ฉลาดขึ้น (ปล่อย 3 ก.ย. 2026)</a:t>
-            </a:r>
-            <a:endParaRPr lang="en-US" sz="1800" dirty="0"/>
-          </a:p>
-        </p:txBody>
-      </p:sp>
-      <p:sp>
-        <p:nvSpPr>
-          <p:cNvPr id="6" name="Text 4"/>
-          <p:cNvSpPr txBox="1"/>
-          <p:nvPr/>
-        </p:nvSpPr>
-        <p:spPr>
-          <a:xfrm>
-            <a:off x="548640" y="3108960"/>
-            <a:ext cx="457200" cy="548640"/>
-          </a:xfrm>
-          <a:prstGeom prst="rect">
-            <a:avLst/>
-          </a:prstGeom>
-          <a:noFill/>
-          <a:ln/>
-        </p:spPr>
-        <p:txBody>
-          <a:bodyPr wrap="square" lIns="0" tIns="0" rIns="0" bIns="0" rtlCol="0" anchor="ctr"/>
-          <a:lstStyle/>
-          <a:p>
-            <a:pPr indent="0" marL="0">
-              <a:buNone/>
-            </a:pPr>
-            <a:r>
-              <a:rPr lang="en-US" sz="1800" b="1" dirty="0">
-                <a:solidFill>
-                  <a:srgbClr val="F0AC4C"/>
-                </a:solidFill>
-                <a:latin typeface="Leelawadee UI" pitchFamily="34" charset="0"/>
-                <a:ea typeface="Leelawadee UI" pitchFamily="34" charset="-122"/>
-                <a:cs typeface="Leelawadee UI" pitchFamily="34" charset="-120"/>
-              </a:rPr>
-              <a:t>→</a:t>
-            </a:r>
-            <a:endParaRPr lang="en-US" sz="1800" dirty="0"/>
-          </a:p>
-        </p:txBody>
-      </p:sp>
-      <p:sp>
-        <p:nvSpPr>
-          <p:cNvPr id="7" name="Text 5"/>
-          <p:cNvSpPr txBox="1"/>
-          <p:nvPr/>
-        </p:nvSpPr>
-        <p:spPr>
-          <a:xfrm>
-            <a:off x="1097280" y="3108960"/>
-            <a:ext cx="9144000" cy="548640"/>
-          </a:xfrm>
-          <a:prstGeom prst="rect">
-            <a:avLst/>
-          </a:prstGeom>
-          <a:noFill/>
-          <a:ln/>
-        </p:spPr>
-        <p:txBody>
-          <a:bodyPr wrap="square" lIns="0" tIns="0" rIns="0" bIns="0" rtlCol="0" anchor="ctr"/>
-          <a:lstStyle/>
-          <a:p>
-            <a:pPr indent="0" marL="0">
-              <a:buNone/>
-            </a:pPr>
-            <a:r>
-              <a:rPr lang="en-US" sz="1600" dirty="0">
-                <a:solidFill>
-                  <a:srgbClr val="ECF1E8"/>
-                </a:solidFill>
-                <a:latin typeface="Leelawadee UI" pitchFamily="34" charset="0"/>
-                <a:ea typeface="Leelawadee UI" pitchFamily="34" charset="-122"/>
-                <a:cs typeface="Leelawadee UI" pitchFamily="34" charset="-120"/>
-              </a:rPr>
-              <a:t>วางแผนงานซับซ้อนได้ดีขึ้น</a:t>
-            </a:r>
-            <a:endParaRPr lang="en-US" sz="1600" dirty="0"/>
-          </a:p>
-        </p:txBody>
-      </p:sp>
-      <p:sp>
-        <p:nvSpPr>
-          <p:cNvPr id="8" name="Text 6"/>
-          <p:cNvSpPr txBox="1"/>
-          <p:nvPr/>
-        </p:nvSpPr>
-        <p:spPr>
-          <a:xfrm>
-            <a:off x="548640" y="3794760"/>
-            <a:ext cx="457200" cy="548640"/>
-          </a:xfrm>
-          <a:prstGeom prst="rect">
-            <a:avLst/>
-          </a:prstGeom>
-          <a:noFill/>
-          <a:ln/>
-        </p:spPr>
-        <p:txBody>
-          <a:bodyPr wrap="square" lIns="0" tIns="0" rIns="0" bIns="0" rtlCol="0" anchor="ctr"/>
-          <a:lstStyle/>
-          <a:p>
-            <a:pPr indent="0" marL="0">
-              <a:buNone/>
-            </a:pPr>
-            <a:r>
-              <a:rPr lang="en-US" sz="1800" b="1" dirty="0">
-                <a:solidFill>
-                  <a:srgbClr val="F0AC4C"/>
-                </a:solidFill>
-                <a:latin typeface="Leelawadee UI" pitchFamily="34" charset="0"/>
-                <a:ea typeface="Leelawadee UI" pitchFamily="34" charset="-122"/>
-                <a:cs typeface="Leelawadee UI" pitchFamily="34" charset="-120"/>
-              </a:rPr>
-              <a:t>→</a:t>
-            </a:r>
-            <a:endParaRPr lang="en-US" sz="1800" dirty="0"/>
-          </a:p>
-        </p:txBody>
-      </p:sp>
-      <p:sp>
-        <p:nvSpPr>
-          <p:cNvPr id="9" name="Text 7"/>
-          <p:cNvSpPr txBox="1"/>
-          <p:nvPr/>
-        </p:nvSpPr>
-        <p:spPr>
-          <a:xfrm>
-            <a:off x="1097280" y="3794760"/>
-            <a:ext cx="9144000" cy="548640"/>
-          </a:xfrm>
-          <a:prstGeom prst="rect">
-            <a:avLst/>
-          </a:prstGeom>
-          <a:noFill/>
-          <a:ln/>
-        </p:spPr>
-        <p:txBody>
-          <a:bodyPr wrap="square" lIns="0" tIns="0" rIns="0" bIns="0" rtlCol="0" anchor="ctr"/>
-          <a:lstStyle/>
-          <a:p>
-            <a:pPr indent="0" marL="0">
-              <a:buNone/>
-            </a:pPr>
-            <a:r>
-              <a:rPr lang="en-US" sz="1600" dirty="0">
-                <a:solidFill>
-                  <a:srgbClr val="ECF1E8"/>
-                </a:solidFill>
-                <a:latin typeface="Leelawadee UI" pitchFamily="34" charset="0"/>
-                <a:ea typeface="Leelawadee UI" pitchFamily="34" charset="-122"/>
-                <a:cs typeface="Leelawadee UI" pitchFamily="34" charset="-120"/>
-              </a:rPr>
-              <a:t>คุมคอมพิวเตอร์ได้แม่นขึ้น (computer use)</a:t>
-            </a:r>
-            <a:endParaRPr lang="en-US" sz="1600" dirty="0"/>
-          </a:p>
-        </p:txBody>
-      </p:sp>
-      <p:sp>
-        <p:nvSpPr>
-          <p:cNvPr id="10" name="Text 8"/>
-          <p:cNvSpPr txBox="1"/>
-          <p:nvPr/>
-        </p:nvSpPr>
-        <p:spPr>
-          <a:xfrm>
-            <a:off x="548640" y="4480560"/>
-            <a:ext cx="457200" cy="548640"/>
-          </a:xfrm>
-          <a:prstGeom prst="rect">
-            <a:avLst/>
-          </a:prstGeom>
-          <a:noFill/>
-          <a:ln/>
-        </p:spPr>
-        <p:txBody>
-          <a:bodyPr wrap="square" lIns="0" tIns="0" rIns="0" bIns="0" rtlCol="0" anchor="ctr"/>
-          <a:lstStyle/>
-          <a:p>
-            <a:pPr indent="0" marL="0">
-              <a:buNone/>
-            </a:pPr>
-            <a:r>
-              <a:rPr lang="en-US" sz="1800" b="1" dirty="0">
-                <a:solidFill>
-                  <a:srgbClr val="F0AC4C"/>
-                </a:solidFill>
-                <a:latin typeface="Leelawadee UI" pitchFamily="34" charset="0"/>
-                <a:ea typeface="Leelawadee UI" pitchFamily="34" charset="-122"/>
-                <a:cs typeface="Leelawadee UI" pitchFamily="34" charset="-120"/>
-              </a:rPr>
-              <a:t>→</a:t>
-            </a:r>
-            <a:endParaRPr lang="en-US" sz="1800" dirty="0"/>
-          </a:p>
-        </p:txBody>
-      </p:sp>
-      <p:sp>
-        <p:nvSpPr>
-          <p:cNvPr id="11" name="Text 9"/>
-          <p:cNvSpPr txBox="1"/>
-          <p:nvPr/>
-        </p:nvSpPr>
-        <p:spPr>
-          <a:xfrm>
-            <a:off x="1097280" y="4480560"/>
-            <a:ext cx="9144000" cy="548640"/>
-          </a:xfrm>
-          <a:prstGeom prst="rect">
-            <a:avLst/>
-          </a:prstGeom>
-          <a:noFill/>
-          <a:ln/>
-        </p:spPr>
-        <p:txBody>
-          <a:bodyPr wrap="square" lIns="0" tIns="0" rIns="0" bIns="0" rtlCol="0" anchor="ctr"/>
-          <a:lstStyle/>
-          <a:p>
-            <a:pPr indent="0" marL="0">
-              <a:buNone/>
-            </a:pPr>
-            <a:r>
-              <a:rPr lang="en-US" sz="1600" dirty="0">
-                <a:solidFill>
-                  <a:srgbClr val="ECF1E8"/>
-                </a:solidFill>
-                <a:latin typeface="Leelawadee UI" pitchFamily="34" charset="0"/>
-                <a:ea typeface="Leelawadee UI" pitchFamily="34" charset="-122"/>
-                <a:cs typeface="Leelawadee UI" pitchFamily="34" charset="-120"/>
-              </a:rPr>
-              <a:t>จำ context ยาวๆ ข้ามหลายเซสชันได้</a:t>
-            </a:r>
-            <a:endParaRPr lang="en-US" sz="1600" dirty="0"/>
-          </a:p>
-        </p:txBody>
-      </p:sp>
-      <p:sp>
-        <p:nvSpPr>
-          <p:cNvPr id="12" name="Shape 10"/>
-          <p:cNvSpPr/>
-          <p:nvPr/>
-        </p:nvSpPr>
-        <p:spPr>
-          <a:xfrm>
-            <a:off x="548640" y="5349240"/>
-            <a:ext cx="10881360" cy="914400"/>
-          </a:xfrm>
-          <a:prstGeom prst="roundRect">
-            <a:avLst>
-              <a:gd name="adj" fmla="val 12000"/>
-            </a:avLst>
-          </a:prstGeom>
-          <a:solidFill>
-            <a:srgbClr val="1B2822"/>
-          </a:solidFill>
-          <a:ln w="12700">
-            <a:solidFill>
-              <a:srgbClr val="2F5548"/>
-            </a:solidFill>
-            <a:prstDash val="solid"/>
-          </a:ln>
-        </p:spPr>
-      </p:sp>
-      <p:sp>
-        <p:nvSpPr>
-          <p:cNvPr id="13" name="Text 11"/>
-          <p:cNvSpPr txBox="1"/>
-          <p:nvPr/>
-        </p:nvSpPr>
-        <p:spPr>
-          <a:xfrm>
-            <a:off x="914400" y="5349240"/>
-            <a:ext cx="10149840" cy="914400"/>
-          </a:xfrm>
-          <a:prstGeom prst="rect">
-            <a:avLst/>
-          </a:prstGeom>
-          <a:noFill/>
-          <a:ln/>
-        </p:spPr>
-        <p:txBody>
-          <a:bodyPr wrap="square" lIns="0" tIns="0" rIns="0" bIns="0" rtlCol="0" anchor="ctr"/>
-          <a:lstStyle/>
-          <a:p>
-            <a:pPr indent="0" marL="0">
-              <a:buNone/>
-            </a:pPr>
-            <a:r>
-              <a:rPr lang="en-US" sz="1300" i="1" dirty="0">
-                <a:solidFill>
-                  <a:srgbClr val="86BBA6"/>
-                </a:solidFill>
-                <a:latin typeface="Leelawadee UI" pitchFamily="34" charset="0"/>
-                <a:ea typeface="Leelawadee UI" pitchFamily="34" charset="-122"/>
-                <a:cs typeface="Leelawadee UI" pitchFamily="34" charset="-120"/>
-              </a:rPr>
-              <a:t>ทยอยเปิดให้ Pro/Business/Enterprise ก่อน · ไม่ต้องติดตั้งอะไรเพิ่ม แค่อัปเดตแอป · ข้อมูลใหม่มาก อาจเปลี่ยนเร็ว</a:t>
-            </a:r>
-            <a:endParaRPr lang="en-US" sz="1300" dirty="0"/>
-          </a:p>
-        </p:txBody>
-      </p:sp>
-      <p:sp>
-        <p:nvSpPr>
-          <p:cNvPr id="14" name="Text 12"/>
           <p:cNvSpPr txBox="1"/>
           <p:nvPr/>
         </p:nvSpPr>
